--- a/decks/postmortem/postmortem.pptx
+++ b/decks/postmortem/postmortem.pptx
@@ -1299,6 +1299,13 @@
 <file path=ppt/slides/slide1.xml><?xml version="1.0" encoding="utf-8"?>
 <p:sld xmlns:a="http://schemas.openxmlformats.org/drawingml/2006/main" xmlns:r="http://schemas.openxmlformats.org/officeDocument/2006/relationships" xmlns:p="http://schemas.openxmlformats.org/presentationml/2006/main">
   <p:cSld name="Slide 1">
+    <p:bg>
+      <p:bgPr>
+        <a:solidFill>
+          <a:srgbClr val="F4F1E8"/>
+        </a:solidFill>
+      </p:bgPr>
+    </p:bg>
     <p:spTree>
       <p:nvGrpSpPr>
         <p:cNvPr id="1" name=""/>
@@ -1313,30 +1320,711 @@
           <a:chExt cx="0" cy="0"/>
         </a:xfrm>
       </p:grpSpPr>
-      <p:pic>
-        <p:nvPicPr>
-          <p:cNvPr id="2" name="Image 0" descr="/tmp/slide-1787840545321-ac3gd1rw2g9.png">    </p:cNvPr>
-          <p:cNvPicPr>
-            <a:picLocks noChangeAspect="1"/>
-          </p:cNvPicPr>
-          <p:nvPr/>
-        </p:nvPicPr>
-        <p:blipFill>
-          <a:blip r:embed="rId1"/>
-          <a:stretch>
-            <a:fillRect/>
-          </a:stretch>
-        </p:blipFill>
-        <p:spPr>
-          <a:xfrm>
-            <a:off x="0" y="0"/>
-            <a:ext cx="12188952" cy="6858000"/>
-          </a:xfrm>
-          <a:prstGeom prst="rect">
-            <a:avLst/>
-          </a:prstGeom>
-        </p:spPr>
-      </p:pic>
+      <p:sp>
+        <p:nvSpPr>
+          <p:cNvPr id="2" name="Text 0"/>
+          <p:cNvSpPr/>
+          <p:nvPr/>
+        </p:nvSpPr>
+        <p:spPr>
+          <a:xfrm>
+            <a:off x="541599" y="406400"/>
+            <a:ext cx="5305158" cy="260747"/>
+          </a:xfrm>
+          <a:prstGeom prst="rect">
+            <a:avLst/>
+          </a:prstGeom>
+          <a:noFill/>
+          <a:ln/>
+        </p:spPr>
+        <p:txBody>
+          <a:bodyPr wrap="square" lIns="0" tIns="0" rIns="0" bIns="0" rtlCol="0" anchor="t"/>
+          <a:lstStyle/>
+          <a:p>
+            <a:pPr algn="l" indent="0" marL="0">
+              <a:lnSpc>
+                <a:spcPts val="2053"/>
+              </a:lnSpc>
+              <a:buNone/>
+            </a:pPr>
+            <a:r>
+              <a:rPr lang="en-US" sz="1466" dirty="0">
+                <a:solidFill>
+                  <a:srgbClr val="2E2C26"/>
+                </a:solidFill>
+                <a:latin typeface="Inter" pitchFamily="34" charset="0"/>
+                <a:ea typeface="Inter" pitchFamily="34" charset="-122"/>
+                <a:cs typeface="Inter" pitchFamily="34" charset="-120"/>
+              </a:rPr>
+              <a:t>BLAMELESS REVIEW · PLATFORM ENGINEERING</a:t>
+            </a:r>
+            <a:endParaRPr lang="en-US" sz="1466" dirty="0"/>
+          </a:p>
+        </p:txBody>
+      </p:sp>
+      <p:sp>
+        <p:nvSpPr>
+          <p:cNvPr id="3" name="Text 1"/>
+          <p:cNvSpPr/>
+          <p:nvPr/>
+        </p:nvSpPr>
+        <p:spPr>
+          <a:xfrm>
+            <a:off x="10112426" y="406400"/>
+            <a:ext cx="1565626" cy="260747"/>
+          </a:xfrm>
+          <a:prstGeom prst="rect">
+            <a:avLst/>
+          </a:prstGeom>
+          <a:noFill/>
+          <a:ln/>
+        </p:spPr>
+        <p:txBody>
+          <a:bodyPr wrap="square" lIns="0" tIns="0" rIns="0" bIns="0" rtlCol="0" anchor="t"/>
+          <a:lstStyle/>
+          <a:p>
+            <a:pPr algn="l" indent="0" marL="0">
+              <a:lnSpc>
+                <a:spcPts val="2053"/>
+              </a:lnSpc>
+              <a:buNone/>
+            </a:pPr>
+            <a:r>
+              <a:rPr lang="en-US" sz="1466" dirty="0">
+                <a:solidFill>
+                  <a:srgbClr val="2E2C26"/>
+                </a:solidFill>
+                <a:latin typeface="Inter" pitchFamily="34" charset="0"/>
+                <a:ea typeface="Inter" pitchFamily="34" charset="-122"/>
+                <a:cs typeface="Inter" pitchFamily="34" charset="-120"/>
+              </a:rPr>
+              <a:t>SHEET 01 / 06</a:t>
+            </a:r>
+            <a:endParaRPr lang="en-US" sz="1466" dirty="0"/>
+          </a:p>
+        </p:txBody>
+      </p:sp>
+      <p:sp>
+        <p:nvSpPr>
+          <p:cNvPr id="4" name="Text 2"/>
+          <p:cNvSpPr/>
+          <p:nvPr/>
+        </p:nvSpPr>
+        <p:spPr>
+          <a:xfrm>
+            <a:off x="541599" y="768747"/>
+            <a:ext cx="11105754" cy="33734"/>
+          </a:xfrm>
+          <a:prstGeom prst="rect">
+            <a:avLst/>
+          </a:prstGeom>
+          <a:solidFill>
+            <a:srgbClr val="1C1B17"/>
+          </a:solidFill>
+          <a:ln/>
+        </p:spPr>
+        <p:txBody>
+          <a:bodyPr wrap="square" rtlCol="0" anchor="ctr"/>
+          <a:lstStyle/>
+          <a:p>
+            <a:pPr indent="0" marL="0">
+              <a:buNone/>
+            </a:pPr>
+            <a:endParaRPr lang="en-US" dirty="0"/>
+          </a:p>
+        </p:txBody>
+      </p:sp>
+      <p:sp>
+        <p:nvSpPr>
+          <p:cNvPr id="5" name="Text 3"/>
+          <p:cNvSpPr/>
+          <p:nvPr/>
+        </p:nvSpPr>
+        <p:spPr>
+          <a:xfrm>
+            <a:off x="541599" y="971748"/>
+            <a:ext cx="11327869" cy="1462881"/>
+          </a:xfrm>
+          <a:prstGeom prst="rect">
+            <a:avLst/>
+          </a:prstGeom>
+          <a:noFill/>
+          <a:ln/>
+        </p:spPr>
+        <p:txBody>
+          <a:bodyPr wrap="square" lIns="0" tIns="0" rIns="0" bIns="0" rtlCol="0" anchor="t"/>
+          <a:lstStyle/>
+          <a:p>
+            <a:pPr algn="l" indent="0" marL="0">
+              <a:lnSpc>
+                <a:spcPts val="11519"/>
+              </a:lnSpc>
+              <a:spcBef>
+                <a:spcPts val="1333"/>
+              </a:spcBef>
+              <a:buNone/>
+            </a:pPr>
+            <a:r>
+              <a:rPr lang="en-US" sz="8532" b="1" dirty="0">
+                <a:solidFill>
+                  <a:srgbClr val="1C1B17"/>
+                </a:solidFill>
+                <a:latin typeface="Playfair Display" pitchFamily="34" charset="0"/>
+                <a:ea typeface="Playfair Display" pitchFamily="34" charset="-122"/>
+                <a:cs typeface="Playfair Display" pitchFamily="34" charset="-120"/>
+              </a:rPr>
+              <a:t>POSTMORTEM</a:t>
+            </a:r>
+            <a:endParaRPr lang="en-US" sz="8532" dirty="0"/>
+          </a:p>
+        </p:txBody>
+      </p:sp>
+      <p:sp>
+        <p:nvSpPr>
+          <p:cNvPr id="6" name="Text 4"/>
+          <p:cNvSpPr/>
+          <p:nvPr/>
+        </p:nvSpPr>
+        <p:spPr>
+          <a:xfrm>
+            <a:off x="541599" y="2569964"/>
+            <a:ext cx="11105754" cy="33734"/>
+          </a:xfrm>
+          <a:prstGeom prst="rect">
+            <a:avLst/>
+          </a:prstGeom>
+          <a:solidFill>
+            <a:srgbClr val="1C1B17"/>
+          </a:solidFill>
+          <a:ln/>
+        </p:spPr>
+        <p:txBody>
+          <a:bodyPr wrap="square" rtlCol="0" anchor="ctr"/>
+          <a:lstStyle/>
+          <a:p>
+            <a:pPr indent="0" marL="0">
+              <a:buNone/>
+            </a:pPr>
+            <a:endParaRPr lang="en-US" dirty="0"/>
+          </a:p>
+        </p:txBody>
+      </p:sp>
+      <p:sp>
+        <p:nvSpPr>
+          <p:cNvPr id="7" name="Text 5"/>
+          <p:cNvSpPr/>
+          <p:nvPr/>
+        </p:nvSpPr>
+        <p:spPr>
+          <a:xfrm>
+            <a:off x="541599" y="2840633"/>
+            <a:ext cx="11327869" cy="260747"/>
+          </a:xfrm>
+          <a:prstGeom prst="rect">
+            <a:avLst/>
+          </a:prstGeom>
+          <a:noFill/>
+          <a:ln/>
+        </p:spPr>
+        <p:txBody>
+          <a:bodyPr wrap="square" lIns="0" tIns="0" rIns="0" bIns="0" rtlCol="0" anchor="t"/>
+          <a:lstStyle/>
+          <a:p>
+            <a:pPr algn="l" indent="0" marL="0">
+              <a:lnSpc>
+                <a:spcPts val="2053"/>
+              </a:lnSpc>
+              <a:buNone/>
+            </a:pPr>
+            <a:r>
+              <a:rPr lang="en-US" sz="1466" dirty="0">
+                <a:solidFill>
+                  <a:srgbClr val="A8231B"/>
+                </a:solidFill>
+                <a:latin typeface="Inter" pitchFamily="34" charset="0"/>
+                <a:ea typeface="Inter" pitchFamily="34" charset="-122"/>
+                <a:cs typeface="Inter" pitchFamily="34" charset="-120"/>
+              </a:rPr>
+              <a:t>THE COST OF THE WORD</a:t>
+            </a:r>
+            <a:endParaRPr lang="en-US" sz="1466" dirty="0"/>
+          </a:p>
+        </p:txBody>
+      </p:sp>
+      <p:sp>
+        <p:nvSpPr>
+          <p:cNvPr id="8" name="Text 6"/>
+          <p:cNvSpPr/>
+          <p:nvPr/>
+        </p:nvSpPr>
+        <p:spPr>
+          <a:xfrm>
+            <a:off x="541599" y="3101380"/>
+            <a:ext cx="11327869" cy="592534"/>
+          </a:xfrm>
+          <a:prstGeom prst="rect">
+            <a:avLst/>
+          </a:prstGeom>
+          <a:noFill/>
+          <a:ln/>
+        </p:spPr>
+        <p:txBody>
+          <a:bodyPr wrap="square" lIns="0" tIns="0" rIns="0" bIns="0" rtlCol="0" anchor="t"/>
+          <a:lstStyle/>
+          <a:p>
+            <a:pPr algn="l" indent="0" marL="0">
+              <a:lnSpc>
+                <a:spcPts val="4666"/>
+              </a:lnSpc>
+              <a:buNone/>
+            </a:pPr>
+            <a:r>
+              <a:rPr lang="en-US" sz="3733" b="1" dirty="0">
+                <a:solidFill>
+                  <a:srgbClr val="1C1B17"/>
+                </a:solidFill>
+                <a:latin typeface="Playfair Display" pitchFamily="34" charset="0"/>
+                <a:ea typeface="Playfair Display" pitchFamily="34" charset="-122"/>
+                <a:cs typeface="Playfair Display" pitchFamily="34" charset="-120"/>
+              </a:rPr>
+              <a:t>What the word actually costs</a:t>
+            </a:r>
+            <a:endParaRPr lang="en-US" sz="3733" dirty="0"/>
+          </a:p>
+        </p:txBody>
+      </p:sp>
+      <p:sp>
+        <p:nvSpPr>
+          <p:cNvPr id="9" name="Text 7"/>
+          <p:cNvSpPr/>
+          <p:nvPr/>
+        </p:nvSpPr>
+        <p:spPr>
+          <a:xfrm>
+            <a:off x="541599" y="3863181"/>
+            <a:ext cx="11105754" cy="8334"/>
+          </a:xfrm>
+          <a:prstGeom prst="rect">
+            <a:avLst/>
+          </a:prstGeom>
+          <a:solidFill>
+            <a:srgbClr val="1C1B17"/>
+          </a:solidFill>
+          <a:ln/>
+        </p:spPr>
+        <p:txBody>
+          <a:bodyPr wrap="square" rtlCol="0" anchor="ctr"/>
+          <a:lstStyle/>
+          <a:p>
+            <a:pPr indent="0" marL="0">
+              <a:buNone/>
+            </a:pPr>
+            <a:endParaRPr lang="en-US" dirty="0"/>
+          </a:p>
+        </p:txBody>
+      </p:sp>
+      <p:sp>
+        <p:nvSpPr>
+          <p:cNvPr id="10" name="Text 8"/>
+          <p:cNvSpPr/>
+          <p:nvPr/>
+        </p:nvSpPr>
+        <p:spPr>
+          <a:xfrm>
+            <a:off x="541599" y="4040783"/>
+            <a:ext cx="5639652" cy="1669256"/>
+          </a:xfrm>
+          <a:prstGeom prst="rect">
+            <a:avLst/>
+          </a:prstGeom>
+          <a:noFill/>
+          <a:ln/>
+        </p:spPr>
+        <p:txBody>
+          <a:bodyPr wrap="square" lIns="0" tIns="0" rIns="0" bIns="0" rtlCol="0" anchor="t"/>
+          <a:lstStyle/>
+          <a:p>
+            <a:pPr algn="l" indent="0" marL="0">
+              <a:lnSpc>
+                <a:spcPts val="3286"/>
+              </a:lnSpc>
+              <a:buNone/>
+            </a:pPr>
+            <a:r>
+              <a:rPr lang="en-US" sz="2266" dirty="0">
+                <a:solidFill>
+                  <a:srgbClr val="1C1B17"/>
+                </a:solidFill>
+                <a:latin typeface="Playfair Display" pitchFamily="34" charset="0"/>
+                <a:ea typeface="Playfair Display" pitchFamily="34" charset="-122"/>
+                <a:cs typeface="Playfair Display" pitchFamily="34" charset="-120"/>
+              </a:rPr>
+              <a:t>“Don’t blame people” is not a tone. It is a set of</a:t>
+            </a:r>
+            <a:endParaRPr lang="en-US" sz="2266" dirty="0"/>
+          </a:p>
+          <a:p>
+            <a:pPr algn="l" indent="0" marL="0">
+              <a:lnSpc>
+                <a:spcPts val="3286"/>
+              </a:lnSpc>
+              <a:buNone/>
+            </a:pPr>
+            <a:r>
+              <a:rPr lang="en-US" sz="2266" dirty="0">
+                <a:solidFill>
+                  <a:srgbClr val="1C1B17"/>
+                </a:solidFill>
+                <a:latin typeface="Playfair Display" pitchFamily="34" charset="0"/>
+                <a:ea typeface="Playfair Display" pitchFamily="34" charset="-122"/>
+                <a:cs typeface="Playfair Display" pitchFamily="34" charset="-120"/>
+              </a:rPr>
+              <a:t>      concessions an organisation has to make, and mostly does not. What follows is what they</a:t>
+            </a:r>
+            <a:endParaRPr lang="en-US" sz="2266" dirty="0"/>
+          </a:p>
+          <a:p>
+            <a:pPr algn="l" indent="0" marL="0">
+              <a:lnSpc>
+                <a:spcPts val="3286"/>
+              </a:lnSpc>
+              <a:buNone/>
+            </a:pPr>
+            <a:r>
+              <a:rPr lang="en-US" sz="2266" dirty="0">
+                <a:solidFill>
+                  <a:srgbClr val="1C1B17"/>
+                </a:solidFill>
+                <a:latin typeface="Playfair Display" pitchFamily="34" charset="0"/>
+                <a:ea typeface="Playfair Display" pitchFamily="34" charset="-122"/>
+                <a:cs typeface="Playfair Display" pitchFamily="34" charset="-120"/>
+              </a:rPr>
+              <a:t>      cost, and who has to pay.</a:t>
+            </a:r>
+            <a:endParaRPr lang="en-US" sz="2266" dirty="0"/>
+          </a:p>
+        </p:txBody>
+      </p:sp>
+      <p:sp>
+        <p:nvSpPr>
+          <p:cNvPr id="11" name="Text 9"/>
+          <p:cNvSpPr/>
+          <p:nvPr/>
+        </p:nvSpPr>
+        <p:spPr>
+          <a:xfrm>
+            <a:off x="6341469" y="4040783"/>
+            <a:ext cx="8332" cy="1813123"/>
+          </a:xfrm>
+          <a:prstGeom prst="rect">
+            <a:avLst/>
+          </a:prstGeom>
+          <a:solidFill>
+            <a:srgbClr val="1C1B17"/>
+          </a:solidFill>
+          <a:ln/>
+        </p:spPr>
+        <p:txBody>
+          <a:bodyPr wrap="square" rtlCol="0" anchor="ctr"/>
+          <a:lstStyle/>
+          <a:p>
+            <a:pPr indent="0" marL="0">
+              <a:buNone/>
+            </a:pPr>
+            <a:endParaRPr lang="en-US" dirty="0"/>
+          </a:p>
+        </p:txBody>
+      </p:sp>
+      <p:sp>
+        <p:nvSpPr>
+          <p:cNvPr id="12" name="Text 10"/>
+          <p:cNvSpPr/>
+          <p:nvPr/>
+        </p:nvSpPr>
+        <p:spPr>
+          <a:xfrm>
+            <a:off x="6620601" y="4040783"/>
+            <a:ext cx="5127287" cy="260747"/>
+          </a:xfrm>
+          <a:prstGeom prst="rect">
+            <a:avLst/>
+          </a:prstGeom>
+          <a:noFill/>
+          <a:ln/>
+        </p:spPr>
+        <p:txBody>
+          <a:bodyPr wrap="square" lIns="0" tIns="0" rIns="0" bIns="0" rtlCol="0" anchor="t"/>
+          <a:lstStyle/>
+          <a:p>
+            <a:pPr algn="l" indent="0" marL="0">
+              <a:lnSpc>
+                <a:spcPts val="2053"/>
+              </a:lnSpc>
+              <a:buNone/>
+            </a:pPr>
+            <a:r>
+              <a:rPr lang="en-US" sz="1466" dirty="0">
+                <a:solidFill>
+                  <a:srgbClr val="2E2C26"/>
+                </a:solidFill>
+                <a:latin typeface="Inter" pitchFamily="34" charset="0"/>
+                <a:ea typeface="Inter" pitchFamily="34" charset="-122"/>
+                <a:cs typeface="Inter" pitchFamily="34" charset="-120"/>
+              </a:rPr>
+              <a:t>BYLINE</a:t>
+            </a:r>
+            <a:endParaRPr lang="en-US" sz="1466" dirty="0"/>
+          </a:p>
+        </p:txBody>
+      </p:sp>
+      <p:sp>
+        <p:nvSpPr>
+          <p:cNvPr id="13" name="Text 11"/>
+          <p:cNvSpPr/>
+          <p:nvPr/>
+        </p:nvSpPr>
+        <p:spPr>
+          <a:xfrm>
+            <a:off x="6620601" y="4369197"/>
+            <a:ext cx="5127287" cy="343694"/>
+          </a:xfrm>
+          <a:prstGeom prst="rect">
+            <a:avLst/>
+          </a:prstGeom>
+          <a:noFill/>
+          <a:ln/>
+        </p:spPr>
+        <p:txBody>
+          <a:bodyPr wrap="square" lIns="0" tIns="0" rIns="0" bIns="0" rtlCol="0" anchor="t"/>
+          <a:lstStyle/>
+          <a:p>
+            <a:pPr algn="l" indent="0" marL="0">
+              <a:lnSpc>
+                <a:spcPts val="2706"/>
+              </a:lnSpc>
+              <a:spcBef>
+                <a:spcPts val="533"/>
+              </a:spcBef>
+              <a:buNone/>
+            </a:pPr>
+            <a:r>
+              <a:rPr lang="en-US" sz="1866" dirty="0">
+                <a:solidFill>
+                  <a:srgbClr val="2E2C26"/>
+                </a:solidFill>
+                <a:latin typeface="Noto Serif" pitchFamily="34" charset="0"/>
+                <a:ea typeface="Noto Serif" pitchFamily="34" charset="-122"/>
+                <a:cs typeface="Noto Serif" pitchFamily="34" charset="-120"/>
+              </a:rPr>
+              <a:t>Presenter · Team</a:t>
+            </a:r>
+            <a:endParaRPr lang="en-US" sz="1866" dirty="0"/>
+          </a:p>
+        </p:txBody>
+      </p:sp>
+      <p:sp>
+        <p:nvSpPr>
+          <p:cNvPr id="14" name="Text 12"/>
+          <p:cNvSpPr/>
+          <p:nvPr/>
+        </p:nvSpPr>
+        <p:spPr>
+          <a:xfrm>
+            <a:off x="6620601" y="4814491"/>
+            <a:ext cx="5026752" cy="8334"/>
+          </a:xfrm>
+          <a:prstGeom prst="rect">
+            <a:avLst/>
+          </a:prstGeom>
+          <a:solidFill>
+            <a:srgbClr val="1C1B17"/>
+          </a:solidFill>
+          <a:ln/>
+        </p:spPr>
+        <p:txBody>
+          <a:bodyPr wrap="square" rtlCol="0" anchor="ctr"/>
+          <a:lstStyle/>
+          <a:p>
+            <a:pPr indent="0" marL="0">
+              <a:buNone/>
+            </a:pPr>
+            <a:endParaRPr lang="en-US" dirty="0"/>
+          </a:p>
+        </p:txBody>
+      </p:sp>
+      <p:sp>
+        <p:nvSpPr>
+          <p:cNvPr id="15" name="Text 13"/>
+          <p:cNvSpPr/>
+          <p:nvPr/>
+        </p:nvSpPr>
+        <p:spPr>
+          <a:xfrm>
+            <a:off x="6620601" y="4822825"/>
+            <a:ext cx="5127287" cy="1031081"/>
+          </a:xfrm>
+          <a:prstGeom prst="rect">
+            <a:avLst/>
+          </a:prstGeom>
+          <a:noFill/>
+          <a:ln/>
+        </p:spPr>
+        <p:txBody>
+          <a:bodyPr wrap="square" lIns="0" tIns="0" rIns="0" bIns="0" rtlCol="0" anchor="t"/>
+          <a:lstStyle/>
+          <a:p>
+            <a:pPr algn="l" indent="0" marL="0">
+              <a:lnSpc>
+                <a:spcPts val="2706"/>
+              </a:lnSpc>
+              <a:buNone/>
+            </a:pPr>
+            <a:r>
+              <a:rPr lang="en-US" sz="1866" b="1" dirty="0">
+                <a:solidFill>
+                  <a:srgbClr val="1C1B17"/>
+                </a:solidFill>
+                <a:latin typeface="Noto Serif" pitchFamily="34" charset="0"/>
+                <a:ea typeface="Noto Serif" pitchFamily="34" charset="-122"/>
+                <a:cs typeface="Noto Serif" pitchFamily="34" charset="-120"/>
+              </a:rPr>
+              <a:t>Source — none.</a:t>
+            </a:r>
+            <a:pPr algn="l" indent="0" marL="0">
+              <a:lnSpc>
+                <a:spcPts val="2706"/>
+              </a:lnSpc>
+              <a:buNone/>
+            </a:pPr>
+            <a:r>
+              <a:rPr lang="en-US" sz="1866" dirty="0">
+                <a:solidFill>
+                  <a:srgbClr val="2E2C26"/>
+                </a:solidFill>
+                <a:latin typeface="Noto Serif" pitchFamily="34" charset="0"/>
+                <a:ea typeface="Noto Serif" pitchFamily="34" charset="-122"/>
+                <a:cs typeface="Noto Serif" pitchFamily="34" charset="-120"/>
+              </a:rPr>
+              <a:t> No metric, rate or duration appears in this deck; the argument is mechanical.</a:t>
+            </a:r>
+            <a:endParaRPr lang="en-US" sz="1866" dirty="0"/>
+          </a:p>
+        </p:txBody>
+      </p:sp>
+      <p:sp>
+        <p:nvSpPr>
+          <p:cNvPr id="16" name="Text 14"/>
+          <p:cNvSpPr/>
+          <p:nvPr/>
+        </p:nvSpPr>
+        <p:spPr>
+          <a:xfrm>
+            <a:off x="541599" y="5962452"/>
+            <a:ext cx="11105754" cy="8334"/>
+          </a:xfrm>
+          <a:prstGeom prst="rect">
+            <a:avLst/>
+          </a:prstGeom>
+          <a:solidFill>
+            <a:srgbClr val="1C1B17"/>
+          </a:solidFill>
+          <a:ln/>
+        </p:spPr>
+        <p:txBody>
+          <a:bodyPr wrap="square" rtlCol="0" anchor="ctr"/>
+          <a:lstStyle/>
+          <a:p>
+            <a:pPr indent="0" marL="0">
+              <a:buNone/>
+            </a:pPr>
+            <a:endParaRPr lang="en-US" dirty="0"/>
+          </a:p>
+        </p:txBody>
+      </p:sp>
+      <p:sp>
+        <p:nvSpPr>
+          <p:cNvPr id="17" name="Text 15"/>
+          <p:cNvSpPr/>
+          <p:nvPr/>
+        </p:nvSpPr>
+        <p:spPr>
+          <a:xfrm>
+            <a:off x="541599" y="6089253"/>
+            <a:ext cx="8140970" cy="260747"/>
+          </a:xfrm>
+          <a:prstGeom prst="rect">
+            <a:avLst/>
+          </a:prstGeom>
+          <a:noFill/>
+          <a:ln/>
+        </p:spPr>
+        <p:txBody>
+          <a:bodyPr wrap="square" lIns="0" tIns="0" rIns="0" bIns="0" rtlCol="0" anchor="t"/>
+          <a:lstStyle/>
+          <a:p>
+            <a:pPr algn="l" indent="0" marL="0">
+              <a:lnSpc>
+                <a:spcPts val="2053"/>
+              </a:lnSpc>
+              <a:buNone/>
+            </a:pPr>
+            <a:r>
+              <a:rPr lang="en-US" sz="1466" dirty="0">
+                <a:solidFill>
+                  <a:srgbClr val="2E2C26"/>
+                </a:solidFill>
+                <a:latin typeface="Inter" pitchFamily="34" charset="0"/>
+                <a:ea typeface="Inter" pitchFamily="34" charset="-122"/>
+                <a:cs typeface="Inter" pitchFamily="34" charset="-120"/>
+              </a:rPr>
+              <a:t>SOURCE — NONE. EVERY CLAIM HERE IS MECHANICAL, NOT MEASURED.</a:t>
+            </a:r>
+            <a:endParaRPr lang="en-US" sz="1466" dirty="0"/>
+          </a:p>
+        </p:txBody>
+      </p:sp>
+      <p:sp>
+        <p:nvSpPr>
+          <p:cNvPr id="18" name="Text 16"/>
+          <p:cNvSpPr/>
+          <p:nvPr/>
+        </p:nvSpPr>
+        <p:spPr>
+          <a:xfrm>
+            <a:off x="9636097" y="6089253"/>
+            <a:ext cx="2051482" cy="260747"/>
+          </a:xfrm>
+          <a:prstGeom prst="rect">
+            <a:avLst/>
+          </a:prstGeom>
+          <a:noFill/>
+          <a:ln/>
+        </p:spPr>
+        <p:txBody>
+          <a:bodyPr wrap="square" lIns="0" tIns="0" rIns="0" bIns="0" rtlCol="0" anchor="t"/>
+          <a:lstStyle/>
+          <a:p>
+            <a:pPr algn="l" indent="0" marL="0">
+              <a:lnSpc>
+                <a:spcPts val="2053"/>
+              </a:lnSpc>
+              <a:buNone/>
+            </a:pPr>
+            <a:r>
+              <a:rPr lang="en-US" sz="1466" dirty="0">
+                <a:solidFill>
+                  <a:srgbClr val="2E2C26"/>
+                </a:solidFill>
+                <a:latin typeface="Inter" pitchFamily="34" charset="0"/>
+                <a:ea typeface="Inter" pitchFamily="34" charset="-122"/>
+                <a:cs typeface="Inter" pitchFamily="34" charset="-120"/>
+              </a:rPr>
+              <a:t>POSTMORTEM · 01</a:t>
+            </a:r>
+            <a:endParaRPr lang="en-US" sz="1466" dirty="0"/>
+          </a:p>
+        </p:txBody>
+      </p:sp>
     </p:spTree>
   </p:cSld>
   <p:clrMapOvr>
@@ -1348,6 +2036,13 @@
 <file path=ppt/slides/slide2.xml><?xml version="1.0" encoding="utf-8"?>
 <p:sld xmlns:a="http://schemas.openxmlformats.org/drawingml/2006/main" xmlns:r="http://schemas.openxmlformats.org/officeDocument/2006/relationships" xmlns:p="http://schemas.openxmlformats.org/presentationml/2006/main">
   <p:cSld name="Slide 2">
+    <p:bg>
+      <p:bgPr>
+        <a:solidFill>
+          <a:srgbClr val="F4F1E8"/>
+        </a:solidFill>
+      </p:bgPr>
+    </p:bg>
     <p:spTree>
       <p:nvGrpSpPr>
         <p:cNvPr id="1" name=""/>
@@ -1362,30 +2057,873 @@
           <a:chExt cx="0" cy="0"/>
         </a:xfrm>
       </p:grpSpPr>
-      <p:pic>
-        <p:nvPicPr>
-          <p:cNvPr id="2" name="Image 0" descr="/tmp/slide-1787840545595-kzt5ns2qclc.png">    </p:cNvPr>
-          <p:cNvPicPr>
-            <a:picLocks noChangeAspect="1"/>
-          </p:cNvPicPr>
-          <p:nvPr/>
-        </p:nvPicPr>
-        <p:blipFill>
-          <a:blip r:embed="rId1"/>
-          <a:stretch>
-            <a:fillRect/>
-          </a:stretch>
-        </p:blipFill>
-        <p:spPr>
-          <a:xfrm>
-            <a:off x="0" y="0"/>
-            <a:ext cx="12188952" cy="6858000"/>
-          </a:xfrm>
-          <a:prstGeom prst="rect">
-            <a:avLst/>
-          </a:prstGeom>
-        </p:spPr>
-      </p:pic>
+      <p:sp>
+        <p:nvSpPr>
+          <p:cNvPr id="2" name="Text 0"/>
+          <p:cNvSpPr/>
+          <p:nvPr/>
+        </p:nvSpPr>
+        <p:spPr>
+          <a:xfrm>
+            <a:off x="541599" y="406400"/>
+            <a:ext cx="5305158" cy="260747"/>
+          </a:xfrm>
+          <a:prstGeom prst="rect">
+            <a:avLst/>
+          </a:prstGeom>
+          <a:noFill/>
+          <a:ln/>
+        </p:spPr>
+        <p:txBody>
+          <a:bodyPr wrap="square" lIns="0" tIns="0" rIns="0" bIns="0" rtlCol="0" anchor="t"/>
+          <a:lstStyle/>
+          <a:p>
+            <a:pPr algn="l" indent="0" marL="0">
+              <a:lnSpc>
+                <a:spcPts val="2053"/>
+              </a:lnSpc>
+              <a:buNone/>
+            </a:pPr>
+            <a:r>
+              <a:rPr lang="en-US" sz="1466" dirty="0">
+                <a:solidFill>
+                  <a:srgbClr val="2E2C26"/>
+                </a:solidFill>
+                <a:latin typeface="Inter" pitchFamily="34" charset="0"/>
+                <a:ea typeface="Inter" pitchFamily="34" charset="-122"/>
+                <a:cs typeface="Inter" pitchFamily="34" charset="-120"/>
+              </a:rPr>
+              <a:t>BLAMELESS REVIEW · PLATFORM ENGINEERING</a:t>
+            </a:r>
+            <a:endParaRPr lang="en-US" sz="1466" dirty="0"/>
+          </a:p>
+        </p:txBody>
+      </p:sp>
+      <p:sp>
+        <p:nvSpPr>
+          <p:cNvPr id="3" name="Text 1"/>
+          <p:cNvSpPr/>
+          <p:nvPr/>
+        </p:nvSpPr>
+        <p:spPr>
+          <a:xfrm>
+            <a:off x="10074335" y="406400"/>
+            <a:ext cx="1604478" cy="260747"/>
+          </a:xfrm>
+          <a:prstGeom prst="rect">
+            <a:avLst/>
+          </a:prstGeom>
+          <a:noFill/>
+          <a:ln/>
+        </p:spPr>
+        <p:txBody>
+          <a:bodyPr wrap="square" lIns="0" tIns="0" rIns="0" bIns="0" rtlCol="0" anchor="t"/>
+          <a:lstStyle/>
+          <a:p>
+            <a:pPr algn="l" indent="0" marL="0">
+              <a:lnSpc>
+                <a:spcPts val="2053"/>
+              </a:lnSpc>
+              <a:buNone/>
+            </a:pPr>
+            <a:r>
+              <a:rPr lang="en-US" sz="1466" dirty="0">
+                <a:solidFill>
+                  <a:srgbClr val="2E2C26"/>
+                </a:solidFill>
+                <a:latin typeface="Inter" pitchFamily="34" charset="0"/>
+                <a:ea typeface="Inter" pitchFamily="34" charset="-122"/>
+                <a:cs typeface="Inter" pitchFamily="34" charset="-120"/>
+              </a:rPr>
+              <a:t>SHEET 02 / 06</a:t>
+            </a:r>
+            <a:endParaRPr lang="en-US" sz="1466" dirty="0"/>
+          </a:p>
+        </p:txBody>
+      </p:sp>
+      <p:sp>
+        <p:nvSpPr>
+          <p:cNvPr id="4" name="Text 2"/>
+          <p:cNvSpPr/>
+          <p:nvPr/>
+        </p:nvSpPr>
+        <p:spPr>
+          <a:xfrm>
+            <a:off x="541599" y="768747"/>
+            <a:ext cx="11105754" cy="33734"/>
+          </a:xfrm>
+          <a:prstGeom prst="rect">
+            <a:avLst/>
+          </a:prstGeom>
+          <a:solidFill>
+            <a:srgbClr val="1C1B17"/>
+          </a:solidFill>
+          <a:ln/>
+        </p:spPr>
+        <p:txBody>
+          <a:bodyPr wrap="square" rtlCol="0" anchor="ctr"/>
+          <a:lstStyle/>
+          <a:p>
+            <a:pPr indent="0" marL="0">
+              <a:buNone/>
+            </a:pPr>
+            <a:endParaRPr lang="en-US" dirty="0"/>
+          </a:p>
+        </p:txBody>
+      </p:sp>
+      <p:sp>
+        <p:nvSpPr>
+          <p:cNvPr id="5" name="Text 3"/>
+          <p:cNvSpPr/>
+          <p:nvPr/>
+        </p:nvSpPr>
+        <p:spPr>
+          <a:xfrm>
+            <a:off x="541599" y="1039416"/>
+            <a:ext cx="11327869" cy="592534"/>
+          </a:xfrm>
+          <a:prstGeom prst="rect">
+            <a:avLst/>
+          </a:prstGeom>
+          <a:noFill/>
+          <a:ln/>
+        </p:spPr>
+        <p:txBody>
+          <a:bodyPr wrap="square" lIns="0" tIns="0" rIns="0" bIns="0" rtlCol="0" anchor="t"/>
+          <a:lstStyle/>
+          <a:p>
+            <a:pPr algn="l" indent="0" marL="0">
+              <a:lnSpc>
+                <a:spcPts val="4666"/>
+              </a:lnSpc>
+              <a:buNone/>
+            </a:pPr>
+            <a:r>
+              <a:rPr lang="en-US" sz="3733" b="1" dirty="0">
+                <a:solidFill>
+                  <a:srgbClr val="1C1B17"/>
+                </a:solidFill>
+                <a:latin typeface="Playfair Display" pitchFamily="34" charset="0"/>
+                <a:ea typeface="Playfair Display" pitchFamily="34" charset="-122"/>
+                <a:cs typeface="Playfair Display" pitchFamily="34" charset="-120"/>
+              </a:rPr>
+              <a:t>What a review is for, and what it gets used for</a:t>
+            </a:r>
+            <a:endParaRPr lang="en-US" sz="3733" dirty="0"/>
+          </a:p>
+        </p:txBody>
+      </p:sp>
+      <p:sp>
+        <p:nvSpPr>
+          <p:cNvPr id="6" name="Text 4"/>
+          <p:cNvSpPr/>
+          <p:nvPr/>
+        </p:nvSpPr>
+        <p:spPr>
+          <a:xfrm>
+            <a:off x="541599" y="1801217"/>
+            <a:ext cx="11105754" cy="8334"/>
+          </a:xfrm>
+          <a:prstGeom prst="rect">
+            <a:avLst/>
+          </a:prstGeom>
+          <a:solidFill>
+            <a:srgbClr val="1C1B17"/>
+          </a:solidFill>
+          <a:ln/>
+        </p:spPr>
+        <p:txBody>
+          <a:bodyPr wrap="square" rtlCol="0" anchor="ctr"/>
+          <a:lstStyle/>
+          <a:p>
+            <a:pPr indent="0" marL="0">
+              <a:buNone/>
+            </a:pPr>
+            <a:endParaRPr lang="en-US" dirty="0"/>
+          </a:p>
+        </p:txBody>
+      </p:sp>
+      <p:sp>
+        <p:nvSpPr>
+          <p:cNvPr id="7" name="Text 5"/>
+          <p:cNvSpPr/>
+          <p:nvPr/>
+        </p:nvSpPr>
+        <p:spPr>
+          <a:xfrm>
+            <a:off x="541599" y="1978819"/>
+            <a:ext cx="3402003" cy="260747"/>
+          </a:xfrm>
+          <a:prstGeom prst="rect">
+            <a:avLst/>
+          </a:prstGeom>
+          <a:noFill/>
+          <a:ln/>
+        </p:spPr>
+        <p:txBody>
+          <a:bodyPr wrap="square" lIns="0" tIns="0" rIns="0" bIns="0" rtlCol="0" anchor="t"/>
+          <a:lstStyle/>
+          <a:p>
+            <a:pPr algn="l" indent="0" marL="0">
+              <a:lnSpc>
+                <a:spcPts val="2053"/>
+              </a:lnSpc>
+              <a:buNone/>
+            </a:pPr>
+            <a:r>
+              <a:rPr lang="en-US" sz="1466" dirty="0">
+                <a:solidFill>
+                  <a:srgbClr val="A8231B"/>
+                </a:solidFill>
+                <a:latin typeface="Inter" pitchFamily="34" charset="0"/>
+                <a:ea typeface="Inter" pitchFamily="34" charset="-122"/>
+                <a:cs typeface="Inter" pitchFamily="34" charset="-120"/>
+              </a:rPr>
+              <a:t>WHAT IT IS FOR</a:t>
+            </a:r>
+            <a:endParaRPr lang="en-US" sz="1466" dirty="0"/>
+          </a:p>
+        </p:txBody>
+      </p:sp>
+      <p:sp>
+        <p:nvSpPr>
+          <p:cNvPr id="8" name="Text 6"/>
+          <p:cNvSpPr/>
+          <p:nvPr/>
+        </p:nvSpPr>
+        <p:spPr>
+          <a:xfrm>
+            <a:off x="541599" y="2341166"/>
+            <a:ext cx="3402003" cy="704255"/>
+          </a:xfrm>
+          <a:prstGeom prst="rect">
+            <a:avLst/>
+          </a:prstGeom>
+          <a:noFill/>
+          <a:ln/>
+        </p:spPr>
+        <p:txBody>
+          <a:bodyPr wrap="square" lIns="0" tIns="0" rIns="0" bIns="0" rtlCol="0" anchor="t"/>
+          <a:lstStyle/>
+          <a:p>
+            <a:pPr algn="l" indent="0" marL="0">
+              <a:lnSpc>
+                <a:spcPts val="2773"/>
+              </a:lnSpc>
+              <a:spcBef>
+                <a:spcPts val="800"/>
+              </a:spcBef>
+              <a:buNone/>
+            </a:pPr>
+            <a:r>
+              <a:rPr lang="en-US" sz="2133" b="1" dirty="0">
+                <a:solidFill>
+                  <a:srgbClr val="1C1B17"/>
+                </a:solidFill>
+                <a:latin typeface="Playfair Display" pitchFamily="34" charset="0"/>
+                <a:ea typeface="Playfair Display" pitchFamily="34" charset="-122"/>
+                <a:cs typeface="Playfair Display" pitchFamily="34" charset="-120"/>
+              </a:rPr>
+              <a:t>Changing the system</a:t>
+            </a:r>
+            <a:endParaRPr lang="en-US" sz="2133" dirty="0"/>
+          </a:p>
+        </p:txBody>
+      </p:sp>
+      <p:sp>
+        <p:nvSpPr>
+          <p:cNvPr id="9" name="Text 7"/>
+          <p:cNvSpPr/>
+          <p:nvPr/>
+        </p:nvSpPr>
+        <p:spPr>
+          <a:xfrm>
+            <a:off x="541599" y="3045420"/>
+            <a:ext cx="3402003" cy="2578100"/>
+          </a:xfrm>
+          <a:prstGeom prst="rect">
+            <a:avLst/>
+          </a:prstGeom>
+          <a:noFill/>
+          <a:ln/>
+        </p:spPr>
+        <p:txBody>
+          <a:bodyPr wrap="square" lIns="0" tIns="0" rIns="0" bIns="0" rtlCol="0" anchor="t"/>
+          <a:lstStyle/>
+          <a:p>
+            <a:pPr algn="l" indent="0" marL="0">
+              <a:lnSpc>
+                <a:spcPts val="2900"/>
+              </a:lnSpc>
+              <a:buNone/>
+            </a:pPr>
+            <a:r>
+              <a:rPr lang="en-US" sz="2000" dirty="0">
+                <a:solidFill>
+                  <a:srgbClr val="2E2C26"/>
+                </a:solidFill>
+                <a:latin typeface="Noto Serif" pitchFamily="34" charset="0"/>
+                <a:ea typeface="Noto Serif" pitchFamily="34" charset="-122"/>
+                <a:cs typeface="Noto Serif" pitchFamily="34" charset="-120"/>
+              </a:rPr>
+              <a:t>A review earns its hour by changing the thing that failed — a guard,</a:t>
+            </a:r>
+            <a:endParaRPr lang="en-US" sz="2000" dirty="0"/>
+          </a:p>
+          <a:p>
+            <a:pPr algn="l" indent="0" marL="0">
+              <a:lnSpc>
+                <a:spcPts val="2900"/>
+              </a:lnSpc>
+              <a:buNone/>
+            </a:pPr>
+            <a:r>
+              <a:rPr lang="en-US" sz="2000" dirty="0">
+                <a:solidFill>
+                  <a:srgbClr val="2E2C26"/>
+                </a:solidFill>
+                <a:latin typeface="Noto Serif" pitchFamily="34" charset="0"/>
+                <a:ea typeface="Noto Serif" pitchFamily="34" charset="-122"/>
+                <a:cs typeface="Noto Serif" pitchFamily="34" charset="-120"/>
+              </a:rPr>
+              <a:t>      a default, a removed foot-gun. If nothing outside the document changes, the hour bought</a:t>
+            </a:r>
+            <a:endParaRPr lang="en-US" sz="2000" dirty="0"/>
+          </a:p>
+          <a:p>
+            <a:pPr algn="l" indent="0" marL="0">
+              <a:lnSpc>
+                <a:spcPts val="2900"/>
+              </a:lnSpc>
+              <a:buNone/>
+            </a:pPr>
+            <a:r>
+              <a:rPr lang="en-US" sz="2000" dirty="0">
+                <a:solidFill>
+                  <a:srgbClr val="2E2C26"/>
+                </a:solidFill>
+                <a:latin typeface="Noto Serif" pitchFamily="34" charset="0"/>
+                <a:ea typeface="Noto Serif" pitchFamily="34" charset="-122"/>
+                <a:cs typeface="Noto Serif" pitchFamily="34" charset="-120"/>
+              </a:rPr>
+              <a:t>      a document.</a:t>
+            </a:r>
+            <a:endParaRPr lang="en-US" sz="2000" dirty="0"/>
+          </a:p>
+        </p:txBody>
+      </p:sp>
+      <p:sp>
+        <p:nvSpPr>
+          <p:cNvPr id="10" name="Text 8"/>
+          <p:cNvSpPr/>
+          <p:nvPr/>
+        </p:nvSpPr>
+        <p:spPr>
+          <a:xfrm>
+            <a:off x="4147696" y="1978819"/>
+            <a:ext cx="8332" cy="3780433"/>
+          </a:xfrm>
+          <a:prstGeom prst="rect">
+            <a:avLst/>
+          </a:prstGeom>
+          <a:solidFill>
+            <a:srgbClr val="1C1B17"/>
+          </a:solidFill>
+          <a:ln/>
+        </p:spPr>
+        <p:txBody>
+          <a:bodyPr wrap="square" rtlCol="0" anchor="ctr"/>
+          <a:lstStyle/>
+          <a:p>
+            <a:pPr indent="0" marL="0">
+              <a:buNone/>
+            </a:pPr>
+            <a:endParaRPr lang="en-US" dirty="0"/>
+          </a:p>
+        </p:txBody>
+      </p:sp>
+      <p:sp>
+        <p:nvSpPr>
+          <p:cNvPr id="11" name="Text 9"/>
+          <p:cNvSpPr/>
+          <p:nvPr/>
+        </p:nvSpPr>
+        <p:spPr>
+          <a:xfrm>
+            <a:off x="4426827" y="1978819"/>
+            <a:ext cx="3402003" cy="260747"/>
+          </a:xfrm>
+          <a:prstGeom prst="rect">
+            <a:avLst/>
+          </a:prstGeom>
+          <a:noFill/>
+          <a:ln/>
+        </p:spPr>
+        <p:txBody>
+          <a:bodyPr wrap="square" lIns="0" tIns="0" rIns="0" bIns="0" rtlCol="0" anchor="t"/>
+          <a:lstStyle/>
+          <a:p>
+            <a:pPr algn="l" indent="0" marL="0">
+              <a:lnSpc>
+                <a:spcPts val="2053"/>
+              </a:lnSpc>
+              <a:buNone/>
+            </a:pPr>
+            <a:r>
+              <a:rPr lang="en-US" sz="1466" dirty="0">
+                <a:solidFill>
+                  <a:srgbClr val="2E2C26"/>
+                </a:solidFill>
+                <a:latin typeface="Inter" pitchFamily="34" charset="0"/>
+                <a:ea typeface="Inter" pitchFamily="34" charset="-122"/>
+                <a:cs typeface="Inter" pitchFamily="34" charset="-120"/>
+              </a:rPr>
+              <a:t>WHAT IT GETS USED FOR</a:t>
+            </a:r>
+            <a:endParaRPr lang="en-US" sz="1466" dirty="0"/>
+          </a:p>
+        </p:txBody>
+      </p:sp>
+      <p:sp>
+        <p:nvSpPr>
+          <p:cNvPr id="12" name="Text 10"/>
+          <p:cNvSpPr/>
+          <p:nvPr/>
+        </p:nvSpPr>
+        <p:spPr>
+          <a:xfrm>
+            <a:off x="4426827" y="2341166"/>
+            <a:ext cx="3402003" cy="704255"/>
+          </a:xfrm>
+          <a:prstGeom prst="rect">
+            <a:avLst/>
+          </a:prstGeom>
+          <a:noFill/>
+          <a:ln/>
+        </p:spPr>
+        <p:txBody>
+          <a:bodyPr wrap="square" lIns="0" tIns="0" rIns="0" bIns="0" rtlCol="0" anchor="t"/>
+          <a:lstStyle/>
+          <a:p>
+            <a:pPr algn="l" indent="0" marL="0">
+              <a:lnSpc>
+                <a:spcPts val="2773"/>
+              </a:lnSpc>
+              <a:spcBef>
+                <a:spcPts val="800"/>
+              </a:spcBef>
+              <a:buNone/>
+            </a:pPr>
+            <a:r>
+              <a:rPr lang="en-US" sz="2133" b="1" dirty="0">
+                <a:solidFill>
+                  <a:srgbClr val="1C1B17"/>
+                </a:solidFill>
+                <a:latin typeface="Playfair Display" pitchFamily="34" charset="0"/>
+                <a:ea typeface="Playfair Display" pitchFamily="34" charset="-122"/>
+                <a:cs typeface="Playfair Display" pitchFamily="34" charset="-120"/>
+              </a:rPr>
+              <a:t>Settling whether one person was careless</a:t>
+            </a:r>
+            <a:endParaRPr lang="en-US" sz="2133" dirty="0"/>
+          </a:p>
+        </p:txBody>
+      </p:sp>
+      <p:sp>
+        <p:nvSpPr>
+          <p:cNvPr id="13" name="Text 11"/>
+          <p:cNvSpPr/>
+          <p:nvPr/>
+        </p:nvSpPr>
+        <p:spPr>
+          <a:xfrm>
+            <a:off x="4426827" y="3045420"/>
+            <a:ext cx="3402003" cy="2578100"/>
+          </a:xfrm>
+          <a:prstGeom prst="rect">
+            <a:avLst/>
+          </a:prstGeom>
+          <a:noFill/>
+          <a:ln/>
+        </p:spPr>
+        <p:txBody>
+          <a:bodyPr wrap="square" lIns="0" tIns="0" rIns="0" bIns="0" rtlCol="0" anchor="t"/>
+          <a:lstStyle/>
+          <a:p>
+            <a:pPr algn="l" indent="0" marL="0">
+              <a:lnSpc>
+                <a:spcPts val="2900"/>
+              </a:lnSpc>
+              <a:buNone/>
+            </a:pPr>
+            <a:r>
+              <a:rPr lang="en-US" sz="2000" dirty="0">
+                <a:solidFill>
+                  <a:srgbClr val="2E2C26"/>
+                </a:solidFill>
+                <a:latin typeface="Noto Serif" pitchFamily="34" charset="0"/>
+                <a:ea typeface="Noto Serif" pitchFamily="34" charset="-122"/>
+                <a:cs typeface="Noto Serif" pitchFamily="34" charset="-120"/>
+              </a:rPr>
+              <a:t>The room can also answer a cheaper question, and closing it closes the</a:t>
+            </a:r>
+            <a:endParaRPr lang="en-US" sz="2000" dirty="0"/>
+          </a:p>
+          <a:p>
+            <a:pPr algn="l" indent="0" marL="0">
+              <a:lnSpc>
+                <a:spcPts val="2900"/>
+              </a:lnSpc>
+              <a:buNone/>
+            </a:pPr>
+            <a:r>
+              <a:rPr lang="en-US" sz="2000" dirty="0">
+                <a:solidFill>
+                  <a:srgbClr val="2E2C26"/>
+                </a:solidFill>
+                <a:latin typeface="Noto Serif" pitchFamily="34" charset="0"/>
+                <a:ea typeface="Noto Serif" pitchFamily="34" charset="-122"/>
+                <a:cs typeface="Noto Serif" pitchFamily="34" charset="-120"/>
+              </a:rPr>
+              <a:t>      ticket. It ends the search at the first human in the chain, which is never where the</a:t>
+            </a:r>
+            <a:endParaRPr lang="en-US" sz="2000" dirty="0"/>
+          </a:p>
+          <a:p>
+            <a:pPr algn="l" indent="0" marL="0">
+              <a:lnSpc>
+                <a:spcPts val="2900"/>
+              </a:lnSpc>
+              <a:buNone/>
+            </a:pPr>
+            <a:r>
+              <a:rPr lang="en-US" sz="2000" dirty="0">
+                <a:solidFill>
+                  <a:srgbClr val="2E2C26"/>
+                </a:solidFill>
+                <a:latin typeface="Noto Serif" pitchFamily="34" charset="0"/>
+                <a:ea typeface="Noto Serif" pitchFamily="34" charset="-122"/>
+                <a:cs typeface="Noto Serif" pitchFamily="34" charset="-120"/>
+              </a:rPr>
+              <a:t>      chain ends.</a:t>
+            </a:r>
+            <a:endParaRPr lang="en-US" sz="2000" dirty="0"/>
+          </a:p>
+        </p:txBody>
+      </p:sp>
+      <p:sp>
+        <p:nvSpPr>
+          <p:cNvPr id="14" name="Text 12"/>
+          <p:cNvSpPr/>
+          <p:nvPr/>
+        </p:nvSpPr>
+        <p:spPr>
+          <a:xfrm>
+            <a:off x="8032924" y="1978819"/>
+            <a:ext cx="8332" cy="3780433"/>
+          </a:xfrm>
+          <a:prstGeom prst="rect">
+            <a:avLst/>
+          </a:prstGeom>
+          <a:solidFill>
+            <a:srgbClr val="1C1B17"/>
+          </a:solidFill>
+          <a:ln/>
+        </p:spPr>
+        <p:txBody>
+          <a:bodyPr wrap="square" rtlCol="0" anchor="ctr"/>
+          <a:lstStyle/>
+          <a:p>
+            <a:pPr indent="0" marL="0">
+              <a:buNone/>
+            </a:pPr>
+            <a:endParaRPr lang="en-US" dirty="0"/>
+          </a:p>
+        </p:txBody>
+      </p:sp>
+      <p:sp>
+        <p:nvSpPr>
+          <p:cNvPr id="15" name="Text 13"/>
+          <p:cNvSpPr/>
+          <p:nvPr/>
+        </p:nvSpPr>
+        <p:spPr>
+          <a:xfrm>
+            <a:off x="8312056" y="1978819"/>
+            <a:ext cx="3402003" cy="260747"/>
+          </a:xfrm>
+          <a:prstGeom prst="rect">
+            <a:avLst/>
+          </a:prstGeom>
+          <a:noFill/>
+          <a:ln/>
+        </p:spPr>
+        <p:txBody>
+          <a:bodyPr wrap="square" lIns="0" tIns="0" rIns="0" bIns="0" rtlCol="0" anchor="t"/>
+          <a:lstStyle/>
+          <a:p>
+            <a:pPr algn="l" indent="0" marL="0">
+              <a:lnSpc>
+                <a:spcPts val="2053"/>
+              </a:lnSpc>
+              <a:buNone/>
+            </a:pPr>
+            <a:r>
+              <a:rPr lang="en-US" sz="1466" dirty="0">
+                <a:solidFill>
+                  <a:srgbClr val="2E2C26"/>
+                </a:solidFill>
+                <a:latin typeface="Inter" pitchFamily="34" charset="0"/>
+                <a:ea typeface="Inter" pitchFamily="34" charset="-122"/>
+                <a:cs typeface="Inter" pitchFamily="34" charset="-120"/>
+              </a:rPr>
+              <a:t>HOW TO TELL THEM APART</a:t>
+            </a:r>
+            <a:endParaRPr lang="en-US" sz="1466" dirty="0"/>
+          </a:p>
+        </p:txBody>
+      </p:sp>
+      <p:sp>
+        <p:nvSpPr>
+          <p:cNvPr id="16" name="Text 14"/>
+          <p:cNvSpPr/>
+          <p:nvPr/>
+        </p:nvSpPr>
+        <p:spPr>
+          <a:xfrm>
+            <a:off x="8312056" y="2341166"/>
+            <a:ext cx="3402003" cy="704255"/>
+          </a:xfrm>
+          <a:prstGeom prst="rect">
+            <a:avLst/>
+          </a:prstGeom>
+          <a:noFill/>
+          <a:ln/>
+        </p:spPr>
+        <p:txBody>
+          <a:bodyPr wrap="square" lIns="0" tIns="0" rIns="0" bIns="0" rtlCol="0" anchor="t"/>
+          <a:lstStyle/>
+          <a:p>
+            <a:pPr algn="l" indent="0" marL="0">
+              <a:lnSpc>
+                <a:spcPts val="2773"/>
+              </a:lnSpc>
+              <a:spcBef>
+                <a:spcPts val="800"/>
+              </a:spcBef>
+              <a:buNone/>
+            </a:pPr>
+            <a:r>
+              <a:rPr lang="en-US" sz="2133" b="1" dirty="0">
+                <a:solidFill>
+                  <a:srgbClr val="1C1B17"/>
+                </a:solidFill>
+                <a:latin typeface="Playfair Display" pitchFamily="34" charset="0"/>
+                <a:ea typeface="Playfair Display" pitchFamily="34" charset="-122"/>
+                <a:cs typeface="Playfair Display" pitchFamily="34" charset="-120"/>
+              </a:rPr>
+              <a:t>Read the last paragraph</a:t>
+            </a:r>
+            <a:endParaRPr lang="en-US" sz="2133" dirty="0"/>
+          </a:p>
+        </p:txBody>
+      </p:sp>
+      <p:sp>
+        <p:nvSpPr>
+          <p:cNvPr id="17" name="Text 15"/>
+          <p:cNvSpPr/>
+          <p:nvPr/>
+        </p:nvSpPr>
+        <p:spPr>
+          <a:xfrm>
+            <a:off x="8312056" y="3045420"/>
+            <a:ext cx="3402003" cy="2578100"/>
+          </a:xfrm>
+          <a:prstGeom prst="rect">
+            <a:avLst/>
+          </a:prstGeom>
+          <a:noFill/>
+          <a:ln/>
+        </p:spPr>
+        <p:txBody>
+          <a:bodyPr wrap="square" lIns="0" tIns="0" rIns="0" bIns="0" rtlCol="0" anchor="t"/>
+          <a:lstStyle/>
+          <a:p>
+            <a:pPr algn="l" indent="0" marL="0">
+              <a:lnSpc>
+                <a:spcPts val="2900"/>
+              </a:lnSpc>
+              <a:buNone/>
+            </a:pPr>
+            <a:r>
+              <a:rPr lang="en-US" sz="2000" dirty="0">
+                <a:solidFill>
+                  <a:srgbClr val="2E2C26"/>
+                </a:solidFill>
+                <a:latin typeface="Noto Serif" pitchFamily="34" charset="0"/>
+                <a:ea typeface="Noto Serif" pitchFamily="34" charset="-122"/>
+                <a:cs typeface="Noto Serif" pitchFamily="34" charset="-120"/>
+              </a:rPr>
+              <a:t>One review ends in work the system will carry out. The other ends in an</a:t>
+            </a:r>
+            <a:endParaRPr lang="en-US" sz="2000" dirty="0"/>
+          </a:p>
+          <a:p>
+            <a:pPr algn="l" indent="0" marL="0">
+              <a:lnSpc>
+                <a:spcPts val="2900"/>
+              </a:lnSpc>
+              <a:buNone/>
+            </a:pPr>
+            <a:r>
+              <a:rPr lang="en-US" sz="2000" dirty="0">
+                <a:solidFill>
+                  <a:srgbClr val="2E2C26"/>
+                </a:solidFill>
+                <a:latin typeface="Noto Serif" pitchFamily="34" charset="0"/>
+                <a:ea typeface="Noto Serif" pitchFamily="34" charset="-122"/>
+                <a:cs typeface="Noto Serif" pitchFamily="34" charset="-120"/>
+              </a:rPr>
+              <a:t>      assurance that someone now knows better. That is not a control; it leaves with the</a:t>
+            </a:r>
+            <a:endParaRPr lang="en-US" sz="2000" dirty="0"/>
+          </a:p>
+          <a:p>
+            <a:pPr algn="l" indent="0" marL="0">
+              <a:lnSpc>
+                <a:spcPts val="2900"/>
+              </a:lnSpc>
+              <a:buNone/>
+            </a:pPr>
+            <a:r>
+              <a:rPr lang="en-US" sz="2000" dirty="0">
+                <a:solidFill>
+                  <a:srgbClr val="2E2C26"/>
+                </a:solidFill>
+                <a:latin typeface="Noto Serif" pitchFamily="34" charset="0"/>
+                <a:ea typeface="Noto Serif" pitchFamily="34" charset="-122"/>
+                <a:cs typeface="Noto Serif" pitchFamily="34" charset="-120"/>
+              </a:rPr>
+              <a:t>      person.</a:t>
+            </a:r>
+            <a:endParaRPr lang="en-US" sz="2000" dirty="0"/>
+          </a:p>
+        </p:txBody>
+      </p:sp>
+      <p:sp>
+        <p:nvSpPr>
+          <p:cNvPr id="18" name="Text 16"/>
+          <p:cNvSpPr/>
+          <p:nvPr/>
+        </p:nvSpPr>
+        <p:spPr>
+          <a:xfrm>
+            <a:off x="541599" y="5962452"/>
+            <a:ext cx="11105754" cy="8334"/>
+          </a:xfrm>
+          <a:prstGeom prst="rect">
+            <a:avLst/>
+          </a:prstGeom>
+          <a:solidFill>
+            <a:srgbClr val="1C1B17"/>
+          </a:solidFill>
+          <a:ln/>
+        </p:spPr>
+        <p:txBody>
+          <a:bodyPr wrap="square" rtlCol="0" anchor="ctr"/>
+          <a:lstStyle/>
+          <a:p>
+            <a:pPr indent="0" marL="0">
+              <a:buNone/>
+            </a:pPr>
+            <a:endParaRPr lang="en-US" dirty="0"/>
+          </a:p>
+        </p:txBody>
+      </p:sp>
+      <p:sp>
+        <p:nvSpPr>
+          <p:cNvPr id="19" name="Text 17"/>
+          <p:cNvSpPr/>
+          <p:nvPr/>
+        </p:nvSpPr>
+        <p:spPr>
+          <a:xfrm>
+            <a:off x="541599" y="6089253"/>
+            <a:ext cx="8140970" cy="260747"/>
+          </a:xfrm>
+          <a:prstGeom prst="rect">
+            <a:avLst/>
+          </a:prstGeom>
+          <a:noFill/>
+          <a:ln/>
+        </p:spPr>
+        <p:txBody>
+          <a:bodyPr wrap="square" lIns="0" tIns="0" rIns="0" bIns="0" rtlCol="0" anchor="t"/>
+          <a:lstStyle/>
+          <a:p>
+            <a:pPr algn="l" indent="0" marL="0">
+              <a:lnSpc>
+                <a:spcPts val="2053"/>
+              </a:lnSpc>
+              <a:buNone/>
+            </a:pPr>
+            <a:r>
+              <a:rPr lang="en-US" sz="1466" dirty="0">
+                <a:solidFill>
+                  <a:srgbClr val="2E2C26"/>
+                </a:solidFill>
+                <a:latin typeface="Inter" pitchFamily="34" charset="0"/>
+                <a:ea typeface="Inter" pitchFamily="34" charset="-122"/>
+                <a:cs typeface="Inter" pitchFamily="34" charset="-120"/>
+              </a:rPr>
+              <a:t>SOURCE — NONE. EVERY CLAIM HERE IS MECHANICAL, NOT MEASURED.</a:t>
+            </a:r>
+            <a:endParaRPr lang="en-US" sz="1466" dirty="0"/>
+          </a:p>
+        </p:txBody>
+      </p:sp>
+      <p:sp>
+        <p:nvSpPr>
+          <p:cNvPr id="20" name="Text 18"/>
+          <p:cNvSpPr/>
+          <p:nvPr/>
+        </p:nvSpPr>
+        <p:spPr>
+          <a:xfrm>
+            <a:off x="9598006" y="6089253"/>
+            <a:ext cx="2090334" cy="260747"/>
+          </a:xfrm>
+          <a:prstGeom prst="rect">
+            <a:avLst/>
+          </a:prstGeom>
+          <a:noFill/>
+          <a:ln/>
+        </p:spPr>
+        <p:txBody>
+          <a:bodyPr wrap="square" lIns="0" tIns="0" rIns="0" bIns="0" rtlCol="0" anchor="t"/>
+          <a:lstStyle/>
+          <a:p>
+            <a:pPr algn="l" indent="0" marL="0">
+              <a:lnSpc>
+                <a:spcPts val="2053"/>
+              </a:lnSpc>
+              <a:buNone/>
+            </a:pPr>
+            <a:r>
+              <a:rPr lang="en-US" sz="1466" dirty="0">
+                <a:solidFill>
+                  <a:srgbClr val="2E2C26"/>
+                </a:solidFill>
+                <a:latin typeface="Inter" pitchFamily="34" charset="0"/>
+                <a:ea typeface="Inter" pitchFamily="34" charset="-122"/>
+                <a:cs typeface="Inter" pitchFamily="34" charset="-120"/>
+              </a:rPr>
+              <a:t>POSTMORTEM · 02</a:t>
+            </a:r>
+            <a:endParaRPr lang="en-US" sz="1466" dirty="0"/>
+          </a:p>
+        </p:txBody>
+      </p:sp>
     </p:spTree>
   </p:cSld>
   <p:clrMapOvr>
@@ -1397,6 +2935,13 @@
 <file path=ppt/slides/slide3.xml><?xml version="1.0" encoding="utf-8"?>
 <p:sld xmlns:a="http://schemas.openxmlformats.org/drawingml/2006/main" xmlns:r="http://schemas.openxmlformats.org/officeDocument/2006/relationships" xmlns:p="http://schemas.openxmlformats.org/presentationml/2006/main">
   <p:cSld name="Slide 3">
+    <p:bg>
+      <p:bgPr>
+        <a:solidFill>
+          <a:srgbClr val="F4F1E8"/>
+        </a:solidFill>
+      </p:bgPr>
+    </p:bg>
     <p:spTree>
       <p:nvGrpSpPr>
         <p:cNvPr id="1" name=""/>
@@ -1411,30 +2956,873 @@
           <a:chExt cx="0" cy="0"/>
         </a:xfrm>
       </p:grpSpPr>
-      <p:pic>
-        <p:nvPicPr>
-          <p:cNvPr id="2" name="Image 0" descr="/tmp/slide-1787840545875-17iskzyjsxu.png">    </p:cNvPr>
-          <p:cNvPicPr>
-            <a:picLocks noChangeAspect="1"/>
-          </p:cNvPicPr>
-          <p:nvPr/>
-        </p:nvPicPr>
-        <p:blipFill>
-          <a:blip r:embed="rId1"/>
-          <a:stretch>
-            <a:fillRect/>
-          </a:stretch>
-        </p:blipFill>
-        <p:spPr>
-          <a:xfrm>
-            <a:off x="0" y="0"/>
-            <a:ext cx="12188952" cy="6858000"/>
-          </a:xfrm>
-          <a:prstGeom prst="rect">
-            <a:avLst/>
-          </a:prstGeom>
-        </p:spPr>
-      </p:pic>
+      <p:sp>
+        <p:nvSpPr>
+          <p:cNvPr id="2" name="Text 0"/>
+          <p:cNvSpPr/>
+          <p:nvPr/>
+        </p:nvSpPr>
+        <p:spPr>
+          <a:xfrm>
+            <a:off x="541599" y="406400"/>
+            <a:ext cx="5305158" cy="260747"/>
+          </a:xfrm>
+          <a:prstGeom prst="rect">
+            <a:avLst/>
+          </a:prstGeom>
+          <a:noFill/>
+          <a:ln/>
+        </p:spPr>
+        <p:txBody>
+          <a:bodyPr wrap="square" lIns="0" tIns="0" rIns="0" bIns="0" rtlCol="0" anchor="t"/>
+          <a:lstStyle/>
+          <a:p>
+            <a:pPr algn="l" indent="0" marL="0">
+              <a:lnSpc>
+                <a:spcPts val="2053"/>
+              </a:lnSpc>
+              <a:buNone/>
+            </a:pPr>
+            <a:r>
+              <a:rPr lang="en-US" sz="1466" dirty="0">
+                <a:solidFill>
+                  <a:srgbClr val="2E2C26"/>
+                </a:solidFill>
+                <a:latin typeface="Inter" pitchFamily="34" charset="0"/>
+                <a:ea typeface="Inter" pitchFamily="34" charset="-122"/>
+                <a:cs typeface="Inter" pitchFamily="34" charset="-120"/>
+              </a:rPr>
+              <a:t>BLAMELESS REVIEW · PLATFORM ENGINEERING</a:t>
+            </a:r>
+            <a:endParaRPr lang="en-US" sz="1466" dirty="0"/>
+          </a:p>
+        </p:txBody>
+      </p:sp>
+      <p:sp>
+        <p:nvSpPr>
+          <p:cNvPr id="3" name="Text 1"/>
+          <p:cNvSpPr/>
+          <p:nvPr/>
+        </p:nvSpPr>
+        <p:spPr>
+          <a:xfrm>
+            <a:off x="10074335" y="406400"/>
+            <a:ext cx="1604478" cy="260747"/>
+          </a:xfrm>
+          <a:prstGeom prst="rect">
+            <a:avLst/>
+          </a:prstGeom>
+          <a:noFill/>
+          <a:ln/>
+        </p:spPr>
+        <p:txBody>
+          <a:bodyPr wrap="square" lIns="0" tIns="0" rIns="0" bIns="0" rtlCol="0" anchor="t"/>
+          <a:lstStyle/>
+          <a:p>
+            <a:pPr algn="l" indent="0" marL="0">
+              <a:lnSpc>
+                <a:spcPts val="2053"/>
+              </a:lnSpc>
+              <a:buNone/>
+            </a:pPr>
+            <a:r>
+              <a:rPr lang="en-US" sz="1466" dirty="0">
+                <a:solidFill>
+                  <a:srgbClr val="2E2C26"/>
+                </a:solidFill>
+                <a:latin typeface="Inter" pitchFamily="34" charset="0"/>
+                <a:ea typeface="Inter" pitchFamily="34" charset="-122"/>
+                <a:cs typeface="Inter" pitchFamily="34" charset="-120"/>
+              </a:rPr>
+              <a:t>SHEET 03 / 06</a:t>
+            </a:r>
+            <a:endParaRPr lang="en-US" sz="1466" dirty="0"/>
+          </a:p>
+        </p:txBody>
+      </p:sp>
+      <p:sp>
+        <p:nvSpPr>
+          <p:cNvPr id="4" name="Text 2"/>
+          <p:cNvSpPr/>
+          <p:nvPr/>
+        </p:nvSpPr>
+        <p:spPr>
+          <a:xfrm>
+            <a:off x="541599" y="768747"/>
+            <a:ext cx="11105754" cy="33734"/>
+          </a:xfrm>
+          <a:prstGeom prst="rect">
+            <a:avLst/>
+          </a:prstGeom>
+          <a:solidFill>
+            <a:srgbClr val="1C1B17"/>
+          </a:solidFill>
+          <a:ln/>
+        </p:spPr>
+        <p:txBody>
+          <a:bodyPr wrap="square" rtlCol="0" anchor="ctr"/>
+          <a:lstStyle/>
+          <a:p>
+            <a:pPr indent="0" marL="0">
+              <a:buNone/>
+            </a:pPr>
+            <a:endParaRPr lang="en-US" dirty="0"/>
+          </a:p>
+        </p:txBody>
+      </p:sp>
+      <p:sp>
+        <p:nvSpPr>
+          <p:cNvPr id="5" name="Text 3"/>
+          <p:cNvSpPr/>
+          <p:nvPr/>
+        </p:nvSpPr>
+        <p:spPr>
+          <a:xfrm>
+            <a:off x="541599" y="1039416"/>
+            <a:ext cx="11327869" cy="592534"/>
+          </a:xfrm>
+          <a:prstGeom prst="rect">
+            <a:avLst/>
+          </a:prstGeom>
+          <a:noFill/>
+          <a:ln/>
+        </p:spPr>
+        <p:txBody>
+          <a:bodyPr wrap="square" lIns="0" tIns="0" rIns="0" bIns="0" rtlCol="0" anchor="t"/>
+          <a:lstStyle/>
+          <a:p>
+            <a:pPr algn="l" indent="0" marL="0">
+              <a:lnSpc>
+                <a:spcPts val="4666"/>
+              </a:lnSpc>
+              <a:buNone/>
+            </a:pPr>
+            <a:r>
+              <a:rPr lang="en-US" sz="3733" b="1" dirty="0">
+                <a:solidFill>
+                  <a:srgbClr val="1C1B17"/>
+                </a:solidFill>
+                <a:latin typeface="Playfair Display" pitchFamily="34" charset="0"/>
+                <a:ea typeface="Playfair Display" pitchFamily="34" charset="-122"/>
+                <a:cs typeface="Playfair Display" pitchFamily="34" charset="-120"/>
+              </a:rPr>
+              <a:t>Three concessions the word actually asks for</a:t>
+            </a:r>
+            <a:endParaRPr lang="en-US" sz="3733" dirty="0"/>
+          </a:p>
+        </p:txBody>
+      </p:sp>
+      <p:sp>
+        <p:nvSpPr>
+          <p:cNvPr id="6" name="Text 4"/>
+          <p:cNvSpPr/>
+          <p:nvPr/>
+        </p:nvSpPr>
+        <p:spPr>
+          <a:xfrm>
+            <a:off x="541599" y="1801217"/>
+            <a:ext cx="11105754" cy="8334"/>
+          </a:xfrm>
+          <a:prstGeom prst="rect">
+            <a:avLst/>
+          </a:prstGeom>
+          <a:solidFill>
+            <a:srgbClr val="1C1B17"/>
+          </a:solidFill>
+          <a:ln/>
+        </p:spPr>
+        <p:txBody>
+          <a:bodyPr wrap="square" rtlCol="0" anchor="ctr"/>
+          <a:lstStyle/>
+          <a:p>
+            <a:pPr indent="0" marL="0">
+              <a:buNone/>
+            </a:pPr>
+            <a:endParaRPr lang="en-US" dirty="0"/>
+          </a:p>
+        </p:txBody>
+      </p:sp>
+      <p:sp>
+        <p:nvSpPr>
+          <p:cNvPr id="7" name="Text 5"/>
+          <p:cNvSpPr/>
+          <p:nvPr/>
+        </p:nvSpPr>
+        <p:spPr>
+          <a:xfrm>
+            <a:off x="541599" y="1978819"/>
+            <a:ext cx="3402003" cy="260747"/>
+          </a:xfrm>
+          <a:prstGeom prst="rect">
+            <a:avLst/>
+          </a:prstGeom>
+          <a:noFill/>
+          <a:ln/>
+        </p:spPr>
+        <p:txBody>
+          <a:bodyPr wrap="square" lIns="0" tIns="0" rIns="0" bIns="0" rtlCol="0" anchor="t"/>
+          <a:lstStyle/>
+          <a:p>
+            <a:pPr algn="l" indent="0" marL="0">
+              <a:lnSpc>
+                <a:spcPts val="2053"/>
+              </a:lnSpc>
+              <a:buNone/>
+            </a:pPr>
+            <a:r>
+              <a:rPr lang="en-US" sz="1466" dirty="0">
+                <a:solidFill>
+                  <a:srgbClr val="A8231B"/>
+                </a:solidFill>
+                <a:latin typeface="Inter" pitchFamily="34" charset="0"/>
+                <a:ea typeface="Inter" pitchFamily="34" charset="-122"/>
+                <a:cs typeface="Inter" pitchFamily="34" charset="-120"/>
+              </a:rPr>
+              <a:t>CONCESSION ONE</a:t>
+            </a:r>
+            <a:endParaRPr lang="en-US" sz="1466" dirty="0"/>
+          </a:p>
+        </p:txBody>
+      </p:sp>
+      <p:sp>
+        <p:nvSpPr>
+          <p:cNvPr id="8" name="Text 6"/>
+          <p:cNvSpPr/>
+          <p:nvPr/>
+        </p:nvSpPr>
+        <p:spPr>
+          <a:xfrm>
+            <a:off x="541599" y="2341166"/>
+            <a:ext cx="3402003" cy="704255"/>
+          </a:xfrm>
+          <a:prstGeom prst="rect">
+            <a:avLst/>
+          </a:prstGeom>
+          <a:noFill/>
+          <a:ln/>
+        </p:spPr>
+        <p:txBody>
+          <a:bodyPr wrap="square" lIns="0" tIns="0" rIns="0" bIns="0" rtlCol="0" anchor="t"/>
+          <a:lstStyle/>
+          <a:p>
+            <a:pPr algn="l" indent="0" marL="0">
+              <a:lnSpc>
+                <a:spcPts val="2773"/>
+              </a:lnSpc>
+              <a:spcBef>
+                <a:spcPts val="800"/>
+              </a:spcBef>
+              <a:buNone/>
+            </a:pPr>
+            <a:r>
+              <a:rPr lang="en-US" sz="2133" b="1" dirty="0">
+                <a:solidFill>
+                  <a:srgbClr val="1C1B17"/>
+                </a:solidFill>
+                <a:latin typeface="Playfair Display" pitchFamily="34" charset="0"/>
+                <a:ea typeface="Playfair Display" pitchFamily="34" charset="-122"/>
+                <a:cs typeface="Playfair Display" pitchFamily="34" charset="-120"/>
+              </a:rPr>
+              <a:t>No names in the cause field</a:t>
+            </a:r>
+            <a:endParaRPr lang="en-US" sz="2133" dirty="0"/>
+          </a:p>
+        </p:txBody>
+      </p:sp>
+      <p:sp>
+        <p:nvSpPr>
+          <p:cNvPr id="9" name="Text 7"/>
+          <p:cNvSpPr/>
+          <p:nvPr/>
+        </p:nvSpPr>
+        <p:spPr>
+          <a:xfrm>
+            <a:off x="541599" y="3045420"/>
+            <a:ext cx="3402003" cy="2578100"/>
+          </a:xfrm>
+          <a:prstGeom prst="rect">
+            <a:avLst/>
+          </a:prstGeom>
+          <a:noFill/>
+          <a:ln/>
+        </p:spPr>
+        <p:txBody>
+          <a:bodyPr wrap="square" lIns="0" tIns="0" rIns="0" bIns="0" rtlCol="0" anchor="t"/>
+          <a:lstStyle/>
+          <a:p>
+            <a:pPr algn="l" indent="0" marL="0">
+              <a:lnSpc>
+                <a:spcPts val="2900"/>
+              </a:lnSpc>
+              <a:buNone/>
+            </a:pPr>
+            <a:r>
+              <a:rPr lang="en-US" sz="2000" dirty="0">
+                <a:solidFill>
+                  <a:srgbClr val="2E2C26"/>
+                </a:solidFill>
+                <a:latin typeface="Noto Serif" pitchFamily="34" charset="0"/>
+                <a:ea typeface="Noto Serif" pitchFamily="34" charset="-122"/>
+                <a:cs typeface="Noto Serif" pitchFamily="34" charset="-120"/>
+              </a:rPr>
+              <a:t>A name is not a mechanism. “Ran the wrong command” names</a:t>
+            </a:r>
+            <a:endParaRPr lang="en-US" sz="2000" dirty="0"/>
+          </a:p>
+          <a:p>
+            <a:pPr algn="l" indent="0" marL="0">
+              <a:lnSpc>
+                <a:spcPts val="2900"/>
+              </a:lnSpc>
+              <a:buNone/>
+            </a:pPr>
+            <a:r>
+              <a:rPr lang="en-US" sz="2000" dirty="0">
+                <a:solidFill>
+                  <a:srgbClr val="2E2C26"/>
+                </a:solidFill>
+                <a:latin typeface="Noto Serif" pitchFamily="34" charset="0"/>
+                <a:ea typeface="Noto Serif" pitchFamily="34" charset="-122"/>
+                <a:cs typeface="Noto Serif" pitchFamily="34" charset="-120"/>
+              </a:rPr>
+              <a:t>      where the system allowed it. The field takes conditions: what was reachable, what was</a:t>
+            </a:r>
+            <a:endParaRPr lang="en-US" sz="2000" dirty="0"/>
+          </a:p>
+          <a:p>
+            <a:pPr algn="l" indent="0" marL="0">
+              <a:lnSpc>
+                <a:spcPts val="2900"/>
+              </a:lnSpc>
+              <a:buNone/>
+            </a:pPr>
+            <a:r>
+              <a:rPr lang="en-US" sz="2000" dirty="0">
+                <a:solidFill>
+                  <a:srgbClr val="2E2C26"/>
+                </a:solidFill>
+                <a:latin typeface="Noto Serif" pitchFamily="34" charset="0"/>
+                <a:ea typeface="Noto Serif" pitchFamily="34" charset="-122"/>
+                <a:cs typeface="Noto Serif" pitchFamily="34" charset="-120"/>
+              </a:rPr>
+              <a:t>      open.</a:t>
+            </a:r>
+            <a:endParaRPr lang="en-US" sz="2000" dirty="0"/>
+          </a:p>
+        </p:txBody>
+      </p:sp>
+      <p:sp>
+        <p:nvSpPr>
+          <p:cNvPr id="10" name="Text 8"/>
+          <p:cNvSpPr/>
+          <p:nvPr/>
+        </p:nvSpPr>
+        <p:spPr>
+          <a:xfrm>
+            <a:off x="4147696" y="1978819"/>
+            <a:ext cx="8332" cy="3780433"/>
+          </a:xfrm>
+          <a:prstGeom prst="rect">
+            <a:avLst/>
+          </a:prstGeom>
+          <a:solidFill>
+            <a:srgbClr val="1C1B17"/>
+          </a:solidFill>
+          <a:ln/>
+        </p:spPr>
+        <p:txBody>
+          <a:bodyPr wrap="square" rtlCol="0" anchor="ctr"/>
+          <a:lstStyle/>
+          <a:p>
+            <a:pPr indent="0" marL="0">
+              <a:buNone/>
+            </a:pPr>
+            <a:endParaRPr lang="en-US" dirty="0"/>
+          </a:p>
+        </p:txBody>
+      </p:sp>
+      <p:sp>
+        <p:nvSpPr>
+          <p:cNvPr id="11" name="Text 9"/>
+          <p:cNvSpPr/>
+          <p:nvPr/>
+        </p:nvSpPr>
+        <p:spPr>
+          <a:xfrm>
+            <a:off x="4426827" y="1978819"/>
+            <a:ext cx="3402003" cy="260747"/>
+          </a:xfrm>
+          <a:prstGeom prst="rect">
+            <a:avLst/>
+          </a:prstGeom>
+          <a:noFill/>
+          <a:ln/>
+        </p:spPr>
+        <p:txBody>
+          <a:bodyPr wrap="square" lIns="0" tIns="0" rIns="0" bIns="0" rtlCol="0" anchor="t"/>
+          <a:lstStyle/>
+          <a:p>
+            <a:pPr algn="l" indent="0" marL="0">
+              <a:lnSpc>
+                <a:spcPts val="2053"/>
+              </a:lnSpc>
+              <a:buNone/>
+            </a:pPr>
+            <a:r>
+              <a:rPr lang="en-US" sz="1466" dirty="0">
+                <a:solidFill>
+                  <a:srgbClr val="2E2C26"/>
+                </a:solidFill>
+                <a:latin typeface="Inter" pitchFamily="34" charset="0"/>
+                <a:ea typeface="Inter" pitchFamily="34" charset="-122"/>
+                <a:cs typeface="Inter" pitchFamily="34" charset="-120"/>
+              </a:rPr>
+              <a:t>CONCESSION TWO</a:t>
+            </a:r>
+            <a:endParaRPr lang="en-US" sz="1466" dirty="0"/>
+          </a:p>
+        </p:txBody>
+      </p:sp>
+      <p:sp>
+        <p:nvSpPr>
+          <p:cNvPr id="12" name="Text 10"/>
+          <p:cNvSpPr/>
+          <p:nvPr/>
+        </p:nvSpPr>
+        <p:spPr>
+          <a:xfrm>
+            <a:off x="4426827" y="2341166"/>
+            <a:ext cx="3402003" cy="704255"/>
+          </a:xfrm>
+          <a:prstGeom prst="rect">
+            <a:avLst/>
+          </a:prstGeom>
+          <a:noFill/>
+          <a:ln/>
+        </p:spPr>
+        <p:txBody>
+          <a:bodyPr wrap="square" lIns="0" tIns="0" rIns="0" bIns="0" rtlCol="0" anchor="t"/>
+          <a:lstStyle/>
+          <a:p>
+            <a:pPr algn="l" indent="0" marL="0">
+              <a:lnSpc>
+                <a:spcPts val="2773"/>
+              </a:lnSpc>
+              <a:spcBef>
+                <a:spcPts val="800"/>
+              </a:spcBef>
+              <a:buNone/>
+            </a:pPr>
+            <a:r>
+              <a:rPr lang="en-US" sz="2133" b="1" dirty="0">
+                <a:solidFill>
+                  <a:srgbClr val="1C1B17"/>
+                </a:solidFill>
+                <a:latin typeface="Playfair Display" pitchFamily="34" charset="0"/>
+                <a:ea typeface="Playfair Display" pitchFamily="34" charset="-122"/>
+                <a:cs typeface="Playfair Display" pitchFamily="34" charset="-120"/>
+              </a:rPr>
+              <a:t>An owner and a date</a:t>
+            </a:r>
+            <a:endParaRPr lang="en-US" sz="2133" dirty="0"/>
+          </a:p>
+        </p:txBody>
+      </p:sp>
+      <p:sp>
+        <p:nvSpPr>
+          <p:cNvPr id="13" name="Text 11"/>
+          <p:cNvSpPr/>
+          <p:nvPr/>
+        </p:nvSpPr>
+        <p:spPr>
+          <a:xfrm>
+            <a:off x="4426827" y="3045420"/>
+            <a:ext cx="3402003" cy="2578100"/>
+          </a:xfrm>
+          <a:prstGeom prst="rect">
+            <a:avLst/>
+          </a:prstGeom>
+          <a:noFill/>
+          <a:ln/>
+        </p:spPr>
+        <p:txBody>
+          <a:bodyPr wrap="square" lIns="0" tIns="0" rIns="0" bIns="0" rtlCol="0" anchor="t"/>
+          <a:lstStyle/>
+          <a:p>
+            <a:pPr algn="l" indent="0" marL="0">
+              <a:lnSpc>
+                <a:spcPts val="2900"/>
+              </a:lnSpc>
+              <a:buNone/>
+            </a:pPr>
+            <a:r>
+              <a:rPr lang="en-US" sz="2000" dirty="0">
+                <a:solidFill>
+                  <a:srgbClr val="2E2C26"/>
+                </a:solidFill>
+                <a:latin typeface="Noto Serif" pitchFamily="34" charset="0"/>
+                <a:ea typeface="Noto Serif" pitchFamily="34" charset="-122"/>
+                <a:cs typeface="Noto Serif" pitchFamily="34" charset="-120"/>
+              </a:rPr>
+              <a:t>One person, not a team; a calendar date, not a quarter. When a team owns</a:t>
+            </a:r>
+            <a:endParaRPr lang="en-US" sz="2000" dirty="0"/>
+          </a:p>
+          <a:p>
+            <a:pPr algn="l" indent="0" marL="0">
+              <a:lnSpc>
+                <a:spcPts val="2900"/>
+              </a:lnSpc>
+              <a:buNone/>
+            </a:pPr>
+            <a:r>
+              <a:rPr lang="en-US" sz="2000" dirty="0">
+                <a:solidFill>
+                  <a:srgbClr val="2E2C26"/>
+                </a:solidFill>
+                <a:latin typeface="Noto Serif" pitchFamily="34" charset="0"/>
+                <a:ea typeface="Noto Serif" pitchFamily="34" charset="-122"/>
+                <a:cs typeface="Noto Serif" pitchFamily="34" charset="-120"/>
+              </a:rPr>
+              <a:t>      it, nobody is late, because nobody was ever due. Without both, it is a wish, not a</a:t>
+            </a:r>
+            <a:endParaRPr lang="en-US" sz="2000" dirty="0"/>
+          </a:p>
+          <a:p>
+            <a:pPr algn="l" indent="0" marL="0">
+              <a:lnSpc>
+                <a:spcPts val="2900"/>
+              </a:lnSpc>
+              <a:buNone/>
+            </a:pPr>
+            <a:r>
+              <a:rPr lang="en-US" sz="2000" dirty="0">
+                <a:solidFill>
+                  <a:srgbClr val="2E2C26"/>
+                </a:solidFill>
+                <a:latin typeface="Noto Serif" pitchFamily="34" charset="0"/>
+                <a:ea typeface="Noto Serif" pitchFamily="34" charset="-122"/>
+                <a:cs typeface="Noto Serif" pitchFamily="34" charset="-120"/>
+              </a:rPr>
+              <a:t>      plan.</a:t>
+            </a:r>
+            <a:endParaRPr lang="en-US" sz="2000" dirty="0"/>
+          </a:p>
+        </p:txBody>
+      </p:sp>
+      <p:sp>
+        <p:nvSpPr>
+          <p:cNvPr id="14" name="Text 12"/>
+          <p:cNvSpPr/>
+          <p:nvPr/>
+        </p:nvSpPr>
+        <p:spPr>
+          <a:xfrm>
+            <a:off x="8032924" y="1978819"/>
+            <a:ext cx="8332" cy="3780433"/>
+          </a:xfrm>
+          <a:prstGeom prst="rect">
+            <a:avLst/>
+          </a:prstGeom>
+          <a:solidFill>
+            <a:srgbClr val="1C1B17"/>
+          </a:solidFill>
+          <a:ln/>
+        </p:spPr>
+        <p:txBody>
+          <a:bodyPr wrap="square" rtlCol="0" anchor="ctr"/>
+          <a:lstStyle/>
+          <a:p>
+            <a:pPr indent="0" marL="0">
+              <a:buNone/>
+            </a:pPr>
+            <a:endParaRPr lang="en-US" dirty="0"/>
+          </a:p>
+        </p:txBody>
+      </p:sp>
+      <p:sp>
+        <p:nvSpPr>
+          <p:cNvPr id="15" name="Text 13"/>
+          <p:cNvSpPr/>
+          <p:nvPr/>
+        </p:nvSpPr>
+        <p:spPr>
+          <a:xfrm>
+            <a:off x="8312056" y="1978819"/>
+            <a:ext cx="3402003" cy="260747"/>
+          </a:xfrm>
+          <a:prstGeom prst="rect">
+            <a:avLst/>
+          </a:prstGeom>
+          <a:noFill/>
+          <a:ln/>
+        </p:spPr>
+        <p:txBody>
+          <a:bodyPr wrap="square" lIns="0" tIns="0" rIns="0" bIns="0" rtlCol="0" anchor="t"/>
+          <a:lstStyle/>
+          <a:p>
+            <a:pPr algn="l" indent="0" marL="0">
+              <a:lnSpc>
+                <a:spcPts val="2053"/>
+              </a:lnSpc>
+              <a:buNone/>
+            </a:pPr>
+            <a:r>
+              <a:rPr lang="en-US" sz="1466" dirty="0">
+                <a:solidFill>
+                  <a:srgbClr val="2E2C26"/>
+                </a:solidFill>
+                <a:latin typeface="Inter" pitchFamily="34" charset="0"/>
+                <a:ea typeface="Inter" pitchFamily="34" charset="-122"/>
+                <a:cs typeface="Inter" pitchFamily="34" charset="-120"/>
+              </a:rPr>
+              <a:t>CONCESSION THREE</a:t>
+            </a:r>
+            <a:endParaRPr lang="en-US" sz="1466" dirty="0"/>
+          </a:p>
+        </p:txBody>
+      </p:sp>
+      <p:sp>
+        <p:nvSpPr>
+          <p:cNvPr id="16" name="Text 14"/>
+          <p:cNvSpPr/>
+          <p:nvPr/>
+        </p:nvSpPr>
+        <p:spPr>
+          <a:xfrm>
+            <a:off x="8312056" y="2341166"/>
+            <a:ext cx="3402003" cy="704255"/>
+          </a:xfrm>
+          <a:prstGeom prst="rect">
+            <a:avLst/>
+          </a:prstGeom>
+          <a:noFill/>
+          <a:ln/>
+        </p:spPr>
+        <p:txBody>
+          <a:bodyPr wrap="square" lIns="0" tIns="0" rIns="0" bIns="0" rtlCol="0" anchor="t"/>
+          <a:lstStyle/>
+          <a:p>
+            <a:pPr algn="l" indent="0" marL="0">
+              <a:lnSpc>
+                <a:spcPts val="2773"/>
+              </a:lnSpc>
+              <a:spcBef>
+                <a:spcPts val="800"/>
+              </a:spcBef>
+              <a:buNone/>
+            </a:pPr>
+            <a:r>
+              <a:rPr lang="en-US" sz="2133" b="1" dirty="0">
+                <a:solidFill>
+                  <a:srgbClr val="1C1B17"/>
+                </a:solidFill>
+                <a:latin typeface="Playfair Display" pitchFamily="34" charset="0"/>
+                <a:ea typeface="Playfair Display" pitchFamily="34" charset="-122"/>
+                <a:cs typeface="Playfair Display" pitchFamily="34" charset="-120"/>
+              </a:rPr>
+              <a:t>A repeat is a new incident</a:t>
+            </a:r>
+            <a:endParaRPr lang="en-US" sz="2133" dirty="0"/>
+          </a:p>
+        </p:txBody>
+      </p:sp>
+      <p:sp>
+        <p:nvSpPr>
+          <p:cNvPr id="17" name="Text 15"/>
+          <p:cNvSpPr/>
+          <p:nvPr/>
+        </p:nvSpPr>
+        <p:spPr>
+          <a:xfrm>
+            <a:off x="8312056" y="3045420"/>
+            <a:ext cx="3402003" cy="2578100"/>
+          </a:xfrm>
+          <a:prstGeom prst="rect">
+            <a:avLst/>
+          </a:prstGeom>
+          <a:noFill/>
+          <a:ln/>
+        </p:spPr>
+        <p:txBody>
+          <a:bodyPr wrap="square" lIns="0" tIns="0" rIns="0" bIns="0" rtlCol="0" anchor="t"/>
+          <a:lstStyle/>
+          <a:p>
+            <a:pPr algn="l" indent="0" marL="0">
+              <a:lnSpc>
+                <a:spcPts val="2900"/>
+              </a:lnSpc>
+              <a:buNone/>
+            </a:pPr>
+            <a:r>
+              <a:rPr lang="en-US" sz="2000" dirty="0">
+                <a:solidFill>
+                  <a:srgbClr val="2E2C26"/>
+                </a:solidFill>
+                <a:latin typeface="Noto Serif" pitchFamily="34" charset="0"/>
+                <a:ea typeface="Noto Serif" pitchFamily="34" charset="-122"/>
+                <a:cs typeface="Noto Serif" pitchFamily="34" charset="-120"/>
+              </a:rPr>
+              <a:t>If the same failure returns and nobody reopened the record, it is not the</a:t>
+            </a:r>
+            <a:endParaRPr lang="en-US" sz="2000" dirty="0"/>
+          </a:p>
+          <a:p>
+            <a:pPr algn="l" indent="0" marL="0">
+              <a:lnSpc>
+                <a:spcPts val="2900"/>
+              </a:lnSpc>
+              <a:buNone/>
+            </a:pPr>
+            <a:r>
+              <a:rPr lang="en-US" sz="2000" dirty="0">
+                <a:solidFill>
+                  <a:srgbClr val="2E2C26"/>
+                </a:solidFill>
+                <a:latin typeface="Noto Serif" pitchFamily="34" charset="0"/>
+                <a:ea typeface="Noto Serif" pitchFamily="34" charset="-122"/>
+                <a:cs typeface="Noto Serif" pitchFamily="34" charset="-120"/>
+              </a:rPr>
+              <a:t>      old one again. It is evidence the first fix never landed: new review, new owner, new</a:t>
+            </a:r>
+            <a:endParaRPr lang="en-US" sz="2000" dirty="0"/>
+          </a:p>
+          <a:p>
+            <a:pPr algn="l" indent="0" marL="0">
+              <a:lnSpc>
+                <a:spcPts val="2900"/>
+              </a:lnSpc>
+              <a:buNone/>
+            </a:pPr>
+            <a:r>
+              <a:rPr lang="en-US" sz="2000" dirty="0">
+                <a:solidFill>
+                  <a:srgbClr val="2E2C26"/>
+                </a:solidFill>
+                <a:latin typeface="Noto Serif" pitchFamily="34" charset="0"/>
+                <a:ea typeface="Noto Serif" pitchFamily="34" charset="-122"/>
+                <a:cs typeface="Noto Serif" pitchFamily="34" charset="-120"/>
+              </a:rPr>
+              <a:t>      date.</a:t>
+            </a:r>
+            <a:endParaRPr lang="en-US" sz="2000" dirty="0"/>
+          </a:p>
+        </p:txBody>
+      </p:sp>
+      <p:sp>
+        <p:nvSpPr>
+          <p:cNvPr id="18" name="Text 16"/>
+          <p:cNvSpPr/>
+          <p:nvPr/>
+        </p:nvSpPr>
+        <p:spPr>
+          <a:xfrm>
+            <a:off x="541599" y="5962452"/>
+            <a:ext cx="11105754" cy="8334"/>
+          </a:xfrm>
+          <a:prstGeom prst="rect">
+            <a:avLst/>
+          </a:prstGeom>
+          <a:solidFill>
+            <a:srgbClr val="1C1B17"/>
+          </a:solidFill>
+          <a:ln/>
+        </p:spPr>
+        <p:txBody>
+          <a:bodyPr wrap="square" rtlCol="0" anchor="ctr"/>
+          <a:lstStyle/>
+          <a:p>
+            <a:pPr indent="0" marL="0">
+              <a:buNone/>
+            </a:pPr>
+            <a:endParaRPr lang="en-US" dirty="0"/>
+          </a:p>
+        </p:txBody>
+      </p:sp>
+      <p:sp>
+        <p:nvSpPr>
+          <p:cNvPr id="19" name="Text 17"/>
+          <p:cNvSpPr/>
+          <p:nvPr/>
+        </p:nvSpPr>
+        <p:spPr>
+          <a:xfrm>
+            <a:off x="541599" y="6089253"/>
+            <a:ext cx="8140970" cy="260747"/>
+          </a:xfrm>
+          <a:prstGeom prst="rect">
+            <a:avLst/>
+          </a:prstGeom>
+          <a:noFill/>
+          <a:ln/>
+        </p:spPr>
+        <p:txBody>
+          <a:bodyPr wrap="square" lIns="0" tIns="0" rIns="0" bIns="0" rtlCol="0" anchor="t"/>
+          <a:lstStyle/>
+          <a:p>
+            <a:pPr algn="l" indent="0" marL="0">
+              <a:lnSpc>
+                <a:spcPts val="2053"/>
+              </a:lnSpc>
+              <a:buNone/>
+            </a:pPr>
+            <a:r>
+              <a:rPr lang="en-US" sz="1466" dirty="0">
+                <a:solidFill>
+                  <a:srgbClr val="2E2C26"/>
+                </a:solidFill>
+                <a:latin typeface="Inter" pitchFamily="34" charset="0"/>
+                <a:ea typeface="Inter" pitchFamily="34" charset="-122"/>
+                <a:cs typeface="Inter" pitchFamily="34" charset="-120"/>
+              </a:rPr>
+              <a:t>SOURCE — NONE. EVERY CLAIM HERE IS MECHANICAL, NOT MEASURED.</a:t>
+            </a:r>
+            <a:endParaRPr lang="en-US" sz="1466" dirty="0"/>
+          </a:p>
+        </p:txBody>
+      </p:sp>
+      <p:sp>
+        <p:nvSpPr>
+          <p:cNvPr id="20" name="Text 18"/>
+          <p:cNvSpPr/>
+          <p:nvPr/>
+        </p:nvSpPr>
+        <p:spPr>
+          <a:xfrm>
+            <a:off x="9598006" y="6089253"/>
+            <a:ext cx="2090334" cy="260747"/>
+          </a:xfrm>
+          <a:prstGeom prst="rect">
+            <a:avLst/>
+          </a:prstGeom>
+          <a:noFill/>
+          <a:ln/>
+        </p:spPr>
+        <p:txBody>
+          <a:bodyPr wrap="square" lIns="0" tIns="0" rIns="0" bIns="0" rtlCol="0" anchor="t"/>
+          <a:lstStyle/>
+          <a:p>
+            <a:pPr algn="l" indent="0" marL="0">
+              <a:lnSpc>
+                <a:spcPts val="2053"/>
+              </a:lnSpc>
+              <a:buNone/>
+            </a:pPr>
+            <a:r>
+              <a:rPr lang="en-US" sz="1466" dirty="0">
+                <a:solidFill>
+                  <a:srgbClr val="2E2C26"/>
+                </a:solidFill>
+                <a:latin typeface="Inter" pitchFamily="34" charset="0"/>
+                <a:ea typeface="Inter" pitchFamily="34" charset="-122"/>
+                <a:cs typeface="Inter" pitchFamily="34" charset="-120"/>
+              </a:rPr>
+              <a:t>POSTMORTEM · 03</a:t>
+            </a:r>
+            <a:endParaRPr lang="en-US" sz="1466" dirty="0"/>
+          </a:p>
+        </p:txBody>
+      </p:sp>
     </p:spTree>
   </p:cSld>
   <p:clrMapOvr>
@@ -1446,6 +3834,13 @@
 <file path=ppt/slides/slide4.xml><?xml version="1.0" encoding="utf-8"?>
 <p:sld xmlns:a="http://schemas.openxmlformats.org/drawingml/2006/main" xmlns:r="http://schemas.openxmlformats.org/officeDocument/2006/relationships" xmlns:p="http://schemas.openxmlformats.org/presentationml/2006/main">
   <p:cSld name="Slide 4">
+    <p:bg>
+      <p:bgPr>
+        <a:solidFill>
+          <a:srgbClr val="F4F1E8"/>
+        </a:solidFill>
+      </p:bgPr>
+    </p:bg>
     <p:spTree>
       <p:nvGrpSpPr>
         <p:cNvPr id="1" name=""/>
@@ -1460,30 +3855,933 @@
           <a:chExt cx="0" cy="0"/>
         </a:xfrm>
       </p:grpSpPr>
-      <p:pic>
-        <p:nvPicPr>
-          <p:cNvPr id="2" name="Image 0" descr="/tmp/slide-1787840546167-041htw67e0i9.png">    </p:cNvPr>
-          <p:cNvPicPr>
-            <a:picLocks noChangeAspect="1"/>
-          </p:cNvPicPr>
-          <p:nvPr/>
-        </p:nvPicPr>
-        <p:blipFill>
-          <a:blip r:embed="rId1"/>
-          <a:stretch>
-            <a:fillRect/>
-          </a:stretch>
-        </p:blipFill>
-        <p:spPr>
-          <a:xfrm>
-            <a:off x="0" y="0"/>
-            <a:ext cx="12188952" cy="6858000"/>
-          </a:xfrm>
-          <a:prstGeom prst="rect">
-            <a:avLst/>
-          </a:prstGeom>
-        </p:spPr>
-      </p:pic>
+      <p:sp>
+        <p:nvSpPr>
+          <p:cNvPr id="2" name="Text 0"/>
+          <p:cNvSpPr/>
+          <p:nvPr/>
+        </p:nvSpPr>
+        <p:spPr>
+          <a:xfrm>
+            <a:off x="541599" y="406400"/>
+            <a:ext cx="5305158" cy="260747"/>
+          </a:xfrm>
+          <a:prstGeom prst="rect">
+            <a:avLst/>
+          </a:prstGeom>
+          <a:noFill/>
+          <a:ln/>
+        </p:spPr>
+        <p:txBody>
+          <a:bodyPr wrap="square" lIns="0" tIns="0" rIns="0" bIns="0" rtlCol="0" anchor="t"/>
+          <a:lstStyle/>
+          <a:p>
+            <a:pPr algn="l" indent="0" marL="0">
+              <a:lnSpc>
+                <a:spcPts val="2053"/>
+              </a:lnSpc>
+              <a:buNone/>
+            </a:pPr>
+            <a:r>
+              <a:rPr lang="en-US" sz="1466" dirty="0">
+                <a:solidFill>
+                  <a:srgbClr val="2E2C26"/>
+                </a:solidFill>
+                <a:latin typeface="Inter" pitchFamily="34" charset="0"/>
+                <a:ea typeface="Inter" pitchFamily="34" charset="-122"/>
+                <a:cs typeface="Inter" pitchFamily="34" charset="-120"/>
+              </a:rPr>
+              <a:t>BLAMELESS REVIEW · PLATFORM ENGINEERING</a:t>
+            </a:r>
+            <a:endParaRPr lang="en-US" sz="1466" dirty="0"/>
+          </a:p>
+        </p:txBody>
+      </p:sp>
+      <p:sp>
+        <p:nvSpPr>
+          <p:cNvPr id="3" name="Text 1"/>
+          <p:cNvSpPr/>
+          <p:nvPr/>
+        </p:nvSpPr>
+        <p:spPr>
+          <a:xfrm>
+            <a:off x="10061639" y="406400"/>
+            <a:ext cx="1617429" cy="260747"/>
+          </a:xfrm>
+          <a:prstGeom prst="rect">
+            <a:avLst/>
+          </a:prstGeom>
+          <a:noFill/>
+          <a:ln/>
+        </p:spPr>
+        <p:txBody>
+          <a:bodyPr wrap="square" lIns="0" tIns="0" rIns="0" bIns="0" rtlCol="0" anchor="t"/>
+          <a:lstStyle/>
+          <a:p>
+            <a:pPr algn="l" indent="0" marL="0">
+              <a:lnSpc>
+                <a:spcPts val="2053"/>
+              </a:lnSpc>
+              <a:buNone/>
+            </a:pPr>
+            <a:r>
+              <a:rPr lang="en-US" sz="1466" dirty="0">
+                <a:solidFill>
+                  <a:srgbClr val="2E2C26"/>
+                </a:solidFill>
+                <a:latin typeface="Inter" pitchFamily="34" charset="0"/>
+                <a:ea typeface="Inter" pitchFamily="34" charset="-122"/>
+                <a:cs typeface="Inter" pitchFamily="34" charset="-120"/>
+              </a:rPr>
+              <a:t>SHEET 04 / 06</a:t>
+            </a:r>
+            <a:endParaRPr lang="en-US" sz="1466" dirty="0"/>
+          </a:p>
+        </p:txBody>
+      </p:sp>
+      <p:sp>
+        <p:nvSpPr>
+          <p:cNvPr id="4" name="Text 2"/>
+          <p:cNvSpPr/>
+          <p:nvPr/>
+        </p:nvSpPr>
+        <p:spPr>
+          <a:xfrm>
+            <a:off x="541599" y="768747"/>
+            <a:ext cx="11105754" cy="33734"/>
+          </a:xfrm>
+          <a:prstGeom prst="rect">
+            <a:avLst/>
+          </a:prstGeom>
+          <a:solidFill>
+            <a:srgbClr val="1C1B17"/>
+          </a:solidFill>
+          <a:ln/>
+        </p:spPr>
+        <p:txBody>
+          <a:bodyPr wrap="square" rtlCol="0" anchor="ctr"/>
+          <a:lstStyle/>
+          <a:p>
+            <a:pPr indent="0" marL="0">
+              <a:buNone/>
+            </a:pPr>
+            <a:endParaRPr lang="en-US" dirty="0"/>
+          </a:p>
+        </p:txBody>
+      </p:sp>
+      <p:sp>
+        <p:nvSpPr>
+          <p:cNvPr id="5" name="Text 3"/>
+          <p:cNvSpPr/>
+          <p:nvPr/>
+        </p:nvSpPr>
+        <p:spPr>
+          <a:xfrm>
+            <a:off x="541599" y="1039416"/>
+            <a:ext cx="11327869" cy="592534"/>
+          </a:xfrm>
+          <a:prstGeom prst="rect">
+            <a:avLst/>
+          </a:prstGeom>
+          <a:noFill/>
+          <a:ln/>
+        </p:spPr>
+        <p:txBody>
+          <a:bodyPr wrap="square" lIns="0" tIns="0" rIns="0" bIns="0" rtlCol="0" anchor="t"/>
+          <a:lstStyle/>
+          <a:p>
+            <a:pPr algn="l" indent="0" marL="0">
+              <a:lnSpc>
+                <a:spcPts val="4666"/>
+              </a:lnSpc>
+              <a:buNone/>
+            </a:pPr>
+            <a:r>
+              <a:rPr lang="en-US" sz="3733" b="1" dirty="0">
+                <a:solidFill>
+                  <a:srgbClr val="1C1B17"/>
+                </a:solidFill>
+                <a:latin typeface="Playfair Display" pitchFamily="34" charset="0"/>
+                <a:ea typeface="Playfair Display" pitchFamily="34" charset="-122"/>
+                <a:cs typeface="Playfair Display" pitchFamily="34" charset="-120"/>
+              </a:rPr>
+              <a:t>What makes people tell the truth in one</a:t>
+            </a:r>
+            <a:endParaRPr lang="en-US" sz="3733" dirty="0"/>
+          </a:p>
+        </p:txBody>
+      </p:sp>
+      <p:sp>
+        <p:nvSpPr>
+          <p:cNvPr id="6" name="Text 4"/>
+          <p:cNvSpPr/>
+          <p:nvPr/>
+        </p:nvSpPr>
+        <p:spPr>
+          <a:xfrm>
+            <a:off x="541599" y="1801217"/>
+            <a:ext cx="11105754" cy="8334"/>
+          </a:xfrm>
+          <a:prstGeom prst="rect">
+            <a:avLst/>
+          </a:prstGeom>
+          <a:solidFill>
+            <a:srgbClr val="1C1B17"/>
+          </a:solidFill>
+          <a:ln/>
+        </p:spPr>
+        <p:txBody>
+          <a:bodyPr wrap="square" rtlCol="0" anchor="ctr"/>
+          <a:lstStyle/>
+          <a:p>
+            <a:pPr indent="0" marL="0">
+              <a:buNone/>
+            </a:pPr>
+            <a:endParaRPr lang="en-US" dirty="0"/>
+          </a:p>
+        </p:txBody>
+      </p:sp>
+      <p:sp>
+        <p:nvSpPr>
+          <p:cNvPr id="7" name="Text 5"/>
+          <p:cNvSpPr/>
+          <p:nvPr/>
+        </p:nvSpPr>
+        <p:spPr>
+          <a:xfrm>
+            <a:off x="541599" y="1978819"/>
+            <a:ext cx="4306735" cy="260747"/>
+          </a:xfrm>
+          <a:prstGeom prst="rect">
+            <a:avLst/>
+          </a:prstGeom>
+          <a:noFill/>
+          <a:ln/>
+        </p:spPr>
+        <p:txBody>
+          <a:bodyPr wrap="square" lIns="0" tIns="0" rIns="0" bIns="0" rtlCol="0" anchor="t"/>
+          <a:lstStyle/>
+          <a:p>
+            <a:pPr algn="l" indent="0" marL="0">
+              <a:lnSpc>
+                <a:spcPts val="2053"/>
+              </a:lnSpc>
+              <a:buNone/>
+            </a:pPr>
+            <a:r>
+              <a:rPr lang="en-US" sz="1466" dirty="0">
+                <a:solidFill>
+                  <a:srgbClr val="A8231B"/>
+                </a:solidFill>
+                <a:latin typeface="Inter" pitchFamily="34" charset="0"/>
+                <a:ea typeface="Inter" pitchFamily="34" charset="-122"/>
+                <a:cs typeface="Inter" pitchFamily="34" charset="-120"/>
+              </a:rPr>
+              <a:t>WHAT THE ROOM IS DECIDING</a:t>
+            </a:r>
+            <a:endParaRPr lang="en-US" sz="1466" dirty="0"/>
+          </a:p>
+        </p:txBody>
+      </p:sp>
+      <p:sp>
+        <p:nvSpPr>
+          <p:cNvPr id="8" name="Text 6"/>
+          <p:cNvSpPr/>
+          <p:nvPr/>
+        </p:nvSpPr>
+        <p:spPr>
+          <a:xfrm>
+            <a:off x="541599" y="2341166"/>
+            <a:ext cx="4306735" cy="704255"/>
+          </a:xfrm>
+          <a:prstGeom prst="rect">
+            <a:avLst/>
+          </a:prstGeom>
+          <a:noFill/>
+          <a:ln/>
+        </p:spPr>
+        <p:txBody>
+          <a:bodyPr wrap="square" lIns="0" tIns="0" rIns="0" bIns="0" rtlCol="0" anchor="t"/>
+          <a:lstStyle/>
+          <a:p>
+            <a:pPr algn="l" indent="0" marL="0">
+              <a:lnSpc>
+                <a:spcPts val="2773"/>
+              </a:lnSpc>
+              <a:spcBef>
+                <a:spcPts val="800"/>
+              </a:spcBef>
+              <a:buNone/>
+            </a:pPr>
+            <a:r>
+              <a:rPr lang="en-US" sz="2133" b="1" dirty="0">
+                <a:solidFill>
+                  <a:srgbClr val="1C1B17"/>
+                </a:solidFill>
+                <a:latin typeface="Playfair Display" pitchFamily="34" charset="0"/>
+                <a:ea typeface="Playfair Display" pitchFamily="34" charset="-122"/>
+                <a:cs typeface="Playfair Display" pitchFamily="34" charset="-120"/>
+              </a:rPr>
+              <a:t>Every account is a bet</a:t>
+            </a:r>
+            <a:endParaRPr lang="en-US" sz="2133" dirty="0"/>
+          </a:p>
+        </p:txBody>
+      </p:sp>
+      <p:sp>
+        <p:nvSpPr>
+          <p:cNvPr id="9" name="Text 7"/>
+          <p:cNvSpPr/>
+          <p:nvPr/>
+        </p:nvSpPr>
+        <p:spPr>
+          <a:xfrm>
+            <a:off x="541599" y="3045420"/>
+            <a:ext cx="4306735" cy="2578100"/>
+          </a:xfrm>
+          <a:prstGeom prst="rect">
+            <a:avLst/>
+          </a:prstGeom>
+          <a:noFill/>
+          <a:ln/>
+        </p:spPr>
+        <p:txBody>
+          <a:bodyPr wrap="square" lIns="0" tIns="0" rIns="0" bIns="0" rtlCol="0" anchor="t"/>
+          <a:lstStyle/>
+          <a:p>
+            <a:pPr algn="l" indent="0" marL="0">
+              <a:lnSpc>
+                <a:spcPts val="2900"/>
+              </a:lnSpc>
+              <a:buNone/>
+            </a:pPr>
+            <a:r>
+              <a:rPr lang="en-US" sz="2000" dirty="0">
+                <a:solidFill>
+                  <a:srgbClr val="2E2C26"/>
+                </a:solidFill>
+                <a:latin typeface="Noto Serif" pitchFamily="34" charset="0"/>
+                <a:ea typeface="Noto Serif" pitchFamily="34" charset="-122"/>
+                <a:cs typeface="Noto Serif" pitchFamily="34" charset="-120"/>
+              </a:rPr>
+              <a:t>The person who knows what happened is also the person with the most to</a:t>
+            </a:r>
+            <a:endParaRPr lang="en-US" sz="2000" dirty="0"/>
+          </a:p>
+          <a:p>
+            <a:pPr algn="l" indent="0" marL="0">
+              <a:lnSpc>
+                <a:spcPts val="2900"/>
+              </a:lnSpc>
+              <a:buNone/>
+            </a:pPr>
+            <a:r>
+              <a:rPr lang="en-US" sz="2000" dirty="0">
+                <a:solidFill>
+                  <a:srgbClr val="2E2C26"/>
+                </a:solidFill>
+                <a:latin typeface="Noto Serif" pitchFamily="34" charset="0"/>
+                <a:ea typeface="Noto Serif" pitchFamily="34" charset="-122"/>
+                <a:cs typeface="Noto Serif" pitchFamily="34" charset="-120"/>
+              </a:rPr>
+              <a:t>      lose by saying it. They are estimating what the transcript gets used for later, and the</a:t>
+            </a:r>
+            <a:endParaRPr lang="en-US" sz="2000" dirty="0"/>
+          </a:p>
+          <a:p>
+            <a:pPr algn="l" indent="0" marL="0">
+              <a:lnSpc>
+                <a:spcPts val="2900"/>
+              </a:lnSpc>
+              <a:buNone/>
+            </a:pPr>
+            <a:r>
+              <a:rPr lang="en-US" sz="2000" dirty="0">
+                <a:solidFill>
+                  <a:srgbClr val="2E2C26"/>
+                </a:solidFill>
+                <a:latin typeface="Noto Serif" pitchFamily="34" charset="0"/>
+                <a:ea typeface="Noto Serif" pitchFamily="34" charset="-122"/>
+                <a:cs typeface="Noto Serif" pitchFamily="34" charset="-120"/>
+              </a:rPr>
+              <a:t>      estimate is usually right. Change the estimate, not the tone.</a:t>
+            </a:r>
+            <a:endParaRPr lang="en-US" sz="2000" dirty="0"/>
+          </a:p>
+        </p:txBody>
+      </p:sp>
+      <p:sp>
+        <p:nvSpPr>
+          <p:cNvPr id="10" name="Text 8"/>
+          <p:cNvSpPr/>
+          <p:nvPr/>
+        </p:nvSpPr>
+        <p:spPr>
+          <a:xfrm>
+            <a:off x="5034688" y="1978819"/>
+            <a:ext cx="8332" cy="3780433"/>
+          </a:xfrm>
+          <a:prstGeom prst="rect">
+            <a:avLst/>
+          </a:prstGeom>
+          <a:solidFill>
+            <a:srgbClr val="1C1B17"/>
+          </a:solidFill>
+          <a:ln/>
+        </p:spPr>
+        <p:txBody>
+          <a:bodyPr wrap="square" rtlCol="0" anchor="ctr"/>
+          <a:lstStyle/>
+          <a:p>
+            <a:pPr indent="0" marL="0">
+              <a:buNone/>
+            </a:pPr>
+            <a:endParaRPr lang="en-US" dirty="0"/>
+          </a:p>
+        </p:txBody>
+      </p:sp>
+      <p:sp>
+        <p:nvSpPr>
+          <p:cNvPr id="11" name="Text 9"/>
+          <p:cNvSpPr/>
+          <p:nvPr/>
+        </p:nvSpPr>
+        <p:spPr>
+          <a:xfrm>
+            <a:off x="5313820" y="1978819"/>
+            <a:ext cx="6460204" cy="260747"/>
+          </a:xfrm>
+          <a:prstGeom prst="rect">
+            <a:avLst/>
+          </a:prstGeom>
+          <a:noFill/>
+          <a:ln/>
+        </p:spPr>
+        <p:txBody>
+          <a:bodyPr wrap="square" lIns="0" tIns="0" rIns="0" bIns="0" rtlCol="0" anchor="t"/>
+          <a:lstStyle/>
+          <a:p>
+            <a:pPr algn="l" indent="0" marL="0">
+              <a:lnSpc>
+                <a:spcPts val="2053"/>
+              </a:lnSpc>
+              <a:buNone/>
+            </a:pPr>
+            <a:r>
+              <a:rPr lang="en-US" sz="1466" dirty="0">
+                <a:solidFill>
+                  <a:srgbClr val="2E2C26"/>
+                </a:solidFill>
+                <a:latin typeface="Inter" pitchFamily="34" charset="0"/>
+                <a:ea typeface="Inter" pitchFamily="34" charset="-122"/>
+                <a:cs typeface="Inter" pitchFamily="34" charset="-120"/>
+              </a:rPr>
+              <a:t>FOUR CONDITIONS, NONE OF THEM TONE</a:t>
+            </a:r>
+            <a:endParaRPr lang="en-US" sz="1466" dirty="0"/>
+          </a:p>
+        </p:txBody>
+      </p:sp>
+      <p:sp>
+        <p:nvSpPr>
+          <p:cNvPr id="12" name="Text 10"/>
+          <p:cNvSpPr/>
+          <p:nvPr/>
+        </p:nvSpPr>
+        <p:spPr>
+          <a:xfrm>
+            <a:off x="5313820" y="2374900"/>
+            <a:ext cx="6333533" cy="3341687"/>
+          </a:xfrm>
+          <a:prstGeom prst="rect">
+            <a:avLst/>
+          </a:prstGeom>
+          <a:noFill/>
+          <a:ln/>
+        </p:spPr>
+        <p:txBody>
+          <a:bodyPr wrap="square" lIns="0" tIns="0" rIns="0" bIns="0" rtlCol="0" anchor="t"/>
+          <a:lstStyle/>
+          <a:p>
+            <a:pPr algn="l" marL="342900" indent="-342900">
+              <a:buSzPct val="100000"/>
+              <a:buChar char="•"/>
+            </a:pPr>
+            <a:r>
+              <a:rPr lang="en-US" sz="1866" b="1" dirty="0">
+                <a:solidFill>
+                  <a:srgbClr val="1C1B17"/>
+                </a:solidFill>
+                <a:latin typeface="Noto Serif" pitchFamily="34" charset="0"/>
+                <a:ea typeface="Noto Serif" pitchFamily="34" charset="-122"/>
+                <a:cs typeface="Noto Serif" pitchFamily="34" charset="-120"/>
+              </a:rPr>
+              <a:t>It is not evidence.</a:t>
+            </a:r>
+            <a:pPr algn="l" indent="0" marL="0">
+              <a:buNone/>
+            </a:pPr>
+            <a:r>
+              <a:rPr lang="en-US" sz="1600" dirty="0">
+                <a:solidFill>
+                  <a:srgbClr val="2E2C26"/>
+                </a:solidFill>
+                <a:latin typeface="Noto Serif" pitchFamily="34" charset="0"/>
+                <a:ea typeface="Noto Serif" pitchFamily="34" charset="-122"/>
+                <a:cs typeface="Noto Serif" pitchFamily="34" charset="-120"/>
+              </a:rPr>
+              <a:t> Nothing said here reaches a performance file or a promotion packet.</a:t>
+            </a:r>
+            <a:endParaRPr lang="en-US" sz="1600" dirty="0"/>
+          </a:p>
+          <a:p>
+            <a:pPr algn="l" marL="342900" indent="-342900">
+              <a:buSzPct val="100000"/>
+              <a:buChar char="•"/>
+            </a:pPr>
+            <a:r>
+              <a:rPr lang="en-US" sz="1866" b="1" dirty="0">
+                <a:solidFill>
+                  <a:srgbClr val="1C1B17"/>
+                </a:solidFill>
+                <a:latin typeface="Noto Serif" pitchFamily="34" charset="0"/>
+                <a:ea typeface="Noto Serif" pitchFamily="34" charset="-122"/>
+                <a:cs typeface="Noto Serif" pitchFamily="34" charset="-120"/>
+              </a:rPr>
+              <a:t>Not knowing is sayable.</a:t>
+            </a:r>
+            <a:pPr algn="l" indent="0" marL="0">
+              <a:buNone/>
+            </a:pPr>
+            <a:r>
+              <a:rPr lang="en-US" sz="1600" dirty="0">
+                <a:solidFill>
+                  <a:srgbClr val="2E2C26"/>
+                </a:solidFill>
+                <a:latin typeface="Noto Serif" pitchFamily="34" charset="0"/>
+                <a:ea typeface="Noto Serif" pitchFamily="34" charset="-122"/>
+                <a:cs typeface="Noto Serif" pitchFamily="34" charset="-120"/>
+              </a:rPr>
+              <a:t> “I did not know that flag existed” has to cost nothing to say.</a:t>
+            </a:r>
+            <a:endParaRPr lang="en-US" sz="1600" dirty="0"/>
+          </a:p>
+          <a:p>
+            <a:pPr algn="l" marL="342900" indent="-342900">
+              <a:buSzPct val="100000"/>
+              <a:buChar char="•"/>
+            </a:pPr>
+            <a:r>
+              <a:rPr lang="en-US" sz="1866" b="1" dirty="0">
+                <a:solidFill>
+                  <a:srgbClr val="1C1B17"/>
+                </a:solidFill>
+                <a:latin typeface="Noto Serif" pitchFamily="34" charset="0"/>
+                <a:ea typeface="Noto Serif" pitchFamily="34" charset="-122"/>
+                <a:cs typeface="Noto Serif" pitchFamily="34" charset="-120"/>
+              </a:rPr>
+              <a:t>Timeline before conclusion.</a:t>
+            </a:r>
+            <a:pPr algn="l" indent="0" marL="0">
+              <a:buNone/>
+            </a:pPr>
+            <a:r>
+              <a:rPr lang="en-US" sz="1600" dirty="0">
+                <a:solidFill>
+                  <a:srgbClr val="2E2C26"/>
+                </a:solidFill>
+                <a:latin typeface="Noto Serif" pitchFamily="34" charset="0"/>
+                <a:ea typeface="Noto Serif" pitchFamily="34" charset="-122"/>
+                <a:cs typeface="Noto Serif" pitchFamily="34" charset="-120"/>
+              </a:rPr>
+              <a:t> Order the facts first, or the room reverse-engineers a culprit.</a:t>
+            </a:r>
+            <a:endParaRPr lang="en-US" sz="1600" dirty="0"/>
+          </a:p>
+          <a:p>
+            <a:pPr algn="l" marL="342900" indent="-342900">
+              <a:buSzPct val="100000"/>
+              <a:buChar char="•"/>
+            </a:pPr>
+            <a:r>
+              <a:rPr lang="en-US" sz="1866" b="1" dirty="0">
+                <a:solidFill>
+                  <a:srgbClr val="1C1B17"/>
+                </a:solidFill>
+                <a:latin typeface="Noto Serif" pitchFamily="34" charset="0"/>
+                <a:ea typeface="Noto Serif" pitchFamily="34" charset="-122"/>
+                <a:cs typeface="Noto Serif" pitchFamily="34" charset="-120"/>
+              </a:rPr>
+              <a:t>The closest person reads it.</a:t>
+            </a:r>
+            <a:pPr algn="l" indent="0" marL="0">
+              <a:buNone/>
+            </a:pPr>
+            <a:r>
+              <a:rPr lang="en-US" sz="1600" dirty="0">
+                <a:solidFill>
+                  <a:srgbClr val="2E2C26"/>
+                </a:solidFill>
+                <a:latin typeface="Noto Serif" pitchFamily="34" charset="0"/>
+                <a:ea typeface="Noto Serif" pitchFamily="34" charset="-122"/>
+                <a:cs typeface="Noto Serif" pitchFamily="34" charset="-120"/>
+              </a:rPr>
+              <a:t> Whoever was at the keyboard writes it, or signs it before filing.</a:t>
+            </a:r>
+            <a:endParaRPr lang="en-US" sz="1600" dirty="0"/>
+          </a:p>
+        </p:txBody>
+      </p:sp>
+      <p:sp>
+        <p:nvSpPr>
+          <p:cNvPr id="13" name="Text 11"/>
+          <p:cNvSpPr/>
+          <p:nvPr/>
+        </p:nvSpPr>
+        <p:spPr>
+          <a:xfrm>
+            <a:off x="5313820" y="2455267"/>
+            <a:ext cx="6460204" cy="687388"/>
+          </a:xfrm>
+          <a:prstGeom prst="rect">
+            <a:avLst/>
+          </a:prstGeom>
+          <a:noFill/>
+          <a:ln/>
+        </p:spPr>
+        <p:txBody>
+          <a:bodyPr wrap="square" lIns="0" tIns="0" rIns="0" bIns="0" rtlCol="0" anchor="t"/>
+          <a:lstStyle/>
+          <a:p>
+            <a:pPr algn="l" indent="0" marL="0">
+              <a:lnSpc>
+                <a:spcPts val="2706"/>
+              </a:lnSpc>
+              <a:buNone/>
+            </a:pPr>
+            <a:r>
+              <a:rPr lang="en-US" sz="1866" b="1" dirty="0">
+                <a:solidFill>
+                  <a:srgbClr val="1C1B17"/>
+                </a:solidFill>
+                <a:latin typeface="Noto Serif" pitchFamily="34" charset="0"/>
+                <a:ea typeface="Noto Serif" pitchFamily="34" charset="-122"/>
+                <a:cs typeface="Noto Serif" pitchFamily="34" charset="-120"/>
+              </a:rPr>
+              <a:t>It is not evidence.</a:t>
+            </a:r>
+            <a:pPr algn="l" indent="0" marL="0">
+              <a:lnSpc>
+                <a:spcPts val="2706"/>
+              </a:lnSpc>
+              <a:buNone/>
+            </a:pPr>
+            <a:r>
+              <a:rPr lang="en-US" sz="1866" dirty="0">
+                <a:solidFill>
+                  <a:srgbClr val="2E2C26"/>
+                </a:solidFill>
+                <a:latin typeface="Noto Serif" pitchFamily="34" charset="0"/>
+                <a:ea typeface="Noto Serif" pitchFamily="34" charset="-122"/>
+                <a:cs typeface="Noto Serif" pitchFamily="34" charset="-120"/>
+              </a:rPr>
+              <a:t> Nothing said here reaches a performance file or a promotion packet.</a:t>
+            </a:r>
+            <a:endParaRPr lang="en-US" sz="1866" dirty="0"/>
+          </a:p>
+        </p:txBody>
+      </p:sp>
+      <p:sp>
+        <p:nvSpPr>
+          <p:cNvPr id="14" name="Text 12"/>
+          <p:cNvSpPr/>
+          <p:nvPr/>
+        </p:nvSpPr>
+        <p:spPr>
+          <a:xfrm>
+            <a:off x="5313820" y="3290689"/>
+            <a:ext cx="6460204" cy="687388"/>
+          </a:xfrm>
+          <a:prstGeom prst="rect">
+            <a:avLst/>
+          </a:prstGeom>
+          <a:noFill/>
+          <a:ln/>
+        </p:spPr>
+        <p:txBody>
+          <a:bodyPr wrap="square" lIns="0" tIns="0" rIns="0" bIns="0" rtlCol="0" anchor="t"/>
+          <a:lstStyle/>
+          <a:p>
+            <a:pPr algn="l" indent="0" marL="0">
+              <a:lnSpc>
+                <a:spcPts val="2706"/>
+              </a:lnSpc>
+              <a:buNone/>
+            </a:pPr>
+            <a:r>
+              <a:rPr lang="en-US" sz="1866" b="1" dirty="0">
+                <a:solidFill>
+                  <a:srgbClr val="1C1B17"/>
+                </a:solidFill>
+                <a:latin typeface="Noto Serif" pitchFamily="34" charset="0"/>
+                <a:ea typeface="Noto Serif" pitchFamily="34" charset="-122"/>
+                <a:cs typeface="Noto Serif" pitchFamily="34" charset="-120"/>
+              </a:rPr>
+              <a:t>Not knowing is sayable.</a:t>
+            </a:r>
+            <a:pPr algn="l" indent="0" marL="0">
+              <a:lnSpc>
+                <a:spcPts val="2706"/>
+              </a:lnSpc>
+              <a:buNone/>
+            </a:pPr>
+            <a:r>
+              <a:rPr lang="en-US" sz="1866" dirty="0">
+                <a:solidFill>
+                  <a:srgbClr val="2E2C26"/>
+                </a:solidFill>
+                <a:latin typeface="Noto Serif" pitchFamily="34" charset="0"/>
+                <a:ea typeface="Noto Serif" pitchFamily="34" charset="-122"/>
+                <a:cs typeface="Noto Serif" pitchFamily="34" charset="-120"/>
+              </a:rPr>
+              <a:t> “I did not know that flag existed” has to cost nothing to say.</a:t>
+            </a:r>
+            <a:endParaRPr lang="en-US" sz="1866" dirty="0"/>
+          </a:p>
+        </p:txBody>
+      </p:sp>
+      <p:sp>
+        <p:nvSpPr>
+          <p:cNvPr id="15" name="Text 13"/>
+          <p:cNvSpPr/>
+          <p:nvPr/>
+        </p:nvSpPr>
+        <p:spPr>
+          <a:xfrm>
+            <a:off x="5313820" y="4126111"/>
+            <a:ext cx="6460204" cy="687388"/>
+          </a:xfrm>
+          <a:prstGeom prst="rect">
+            <a:avLst/>
+          </a:prstGeom>
+          <a:noFill/>
+          <a:ln/>
+        </p:spPr>
+        <p:txBody>
+          <a:bodyPr wrap="square" lIns="0" tIns="0" rIns="0" bIns="0" rtlCol="0" anchor="t"/>
+          <a:lstStyle/>
+          <a:p>
+            <a:pPr algn="l" indent="0" marL="0">
+              <a:lnSpc>
+                <a:spcPts val="2706"/>
+              </a:lnSpc>
+              <a:buNone/>
+            </a:pPr>
+            <a:r>
+              <a:rPr lang="en-US" sz="1866" b="1" dirty="0">
+                <a:solidFill>
+                  <a:srgbClr val="1C1B17"/>
+                </a:solidFill>
+                <a:latin typeface="Noto Serif" pitchFamily="34" charset="0"/>
+                <a:ea typeface="Noto Serif" pitchFamily="34" charset="-122"/>
+                <a:cs typeface="Noto Serif" pitchFamily="34" charset="-120"/>
+              </a:rPr>
+              <a:t>Timeline before conclusion.</a:t>
+            </a:r>
+            <a:pPr algn="l" indent="0" marL="0">
+              <a:lnSpc>
+                <a:spcPts val="2706"/>
+              </a:lnSpc>
+              <a:buNone/>
+            </a:pPr>
+            <a:r>
+              <a:rPr lang="en-US" sz="1866" dirty="0">
+                <a:solidFill>
+                  <a:srgbClr val="2E2C26"/>
+                </a:solidFill>
+                <a:latin typeface="Noto Serif" pitchFamily="34" charset="0"/>
+                <a:ea typeface="Noto Serif" pitchFamily="34" charset="-122"/>
+                <a:cs typeface="Noto Serif" pitchFamily="34" charset="-120"/>
+              </a:rPr>
+              <a:t> Order the facts first, or the room reverse-engineers a culprit.</a:t>
+            </a:r>
+            <a:endParaRPr lang="en-US" sz="1866" dirty="0"/>
+          </a:p>
+        </p:txBody>
+      </p:sp>
+      <p:sp>
+        <p:nvSpPr>
+          <p:cNvPr id="16" name="Text 14"/>
+          <p:cNvSpPr/>
+          <p:nvPr/>
+        </p:nvSpPr>
+        <p:spPr>
+          <a:xfrm>
+            <a:off x="5313820" y="4961533"/>
+            <a:ext cx="6460204" cy="687388"/>
+          </a:xfrm>
+          <a:prstGeom prst="rect">
+            <a:avLst/>
+          </a:prstGeom>
+          <a:noFill/>
+          <a:ln/>
+        </p:spPr>
+        <p:txBody>
+          <a:bodyPr wrap="square" lIns="0" tIns="0" rIns="0" bIns="0" rtlCol="0" anchor="t"/>
+          <a:lstStyle/>
+          <a:p>
+            <a:pPr algn="l" indent="0" marL="0">
+              <a:lnSpc>
+                <a:spcPts val="2706"/>
+              </a:lnSpc>
+              <a:buNone/>
+            </a:pPr>
+            <a:r>
+              <a:rPr lang="en-US" sz="1866" b="1" dirty="0">
+                <a:solidFill>
+                  <a:srgbClr val="1C1B17"/>
+                </a:solidFill>
+                <a:latin typeface="Noto Serif" pitchFamily="34" charset="0"/>
+                <a:ea typeface="Noto Serif" pitchFamily="34" charset="-122"/>
+                <a:cs typeface="Noto Serif" pitchFamily="34" charset="-120"/>
+              </a:rPr>
+              <a:t>The closest person reads it.</a:t>
+            </a:r>
+            <a:pPr algn="l" indent="0" marL="0">
+              <a:lnSpc>
+                <a:spcPts val="2706"/>
+              </a:lnSpc>
+              <a:buNone/>
+            </a:pPr>
+            <a:r>
+              <a:rPr lang="en-US" sz="1866" dirty="0">
+                <a:solidFill>
+                  <a:srgbClr val="2E2C26"/>
+                </a:solidFill>
+                <a:latin typeface="Noto Serif" pitchFamily="34" charset="0"/>
+                <a:ea typeface="Noto Serif" pitchFamily="34" charset="-122"/>
+                <a:cs typeface="Noto Serif" pitchFamily="34" charset="-120"/>
+              </a:rPr>
+              <a:t> Whoever was at the keyboard writes it, or signs it before filing.</a:t>
+            </a:r>
+            <a:endParaRPr lang="en-US" sz="1866" dirty="0"/>
+          </a:p>
+        </p:txBody>
+      </p:sp>
+      <p:sp>
+        <p:nvSpPr>
+          <p:cNvPr id="17" name="Text 15"/>
+          <p:cNvSpPr/>
+          <p:nvPr/>
+        </p:nvSpPr>
+        <p:spPr>
+          <a:xfrm>
+            <a:off x="541599" y="5962452"/>
+            <a:ext cx="11105754" cy="8334"/>
+          </a:xfrm>
+          <a:prstGeom prst="rect">
+            <a:avLst/>
+          </a:prstGeom>
+          <a:solidFill>
+            <a:srgbClr val="1C1B17"/>
+          </a:solidFill>
+          <a:ln/>
+        </p:spPr>
+        <p:txBody>
+          <a:bodyPr wrap="square" rtlCol="0" anchor="ctr"/>
+          <a:lstStyle/>
+          <a:p>
+            <a:pPr indent="0" marL="0">
+              <a:buNone/>
+            </a:pPr>
+            <a:endParaRPr lang="en-US" dirty="0"/>
+          </a:p>
+        </p:txBody>
+      </p:sp>
+      <p:sp>
+        <p:nvSpPr>
+          <p:cNvPr id="18" name="Text 16"/>
+          <p:cNvSpPr/>
+          <p:nvPr/>
+        </p:nvSpPr>
+        <p:spPr>
+          <a:xfrm>
+            <a:off x="541599" y="6089253"/>
+            <a:ext cx="8140970" cy="260747"/>
+          </a:xfrm>
+          <a:prstGeom prst="rect">
+            <a:avLst/>
+          </a:prstGeom>
+          <a:noFill/>
+          <a:ln/>
+        </p:spPr>
+        <p:txBody>
+          <a:bodyPr wrap="square" lIns="0" tIns="0" rIns="0" bIns="0" rtlCol="0" anchor="t"/>
+          <a:lstStyle/>
+          <a:p>
+            <a:pPr algn="l" indent="0" marL="0">
+              <a:lnSpc>
+                <a:spcPts val="2053"/>
+              </a:lnSpc>
+              <a:buNone/>
+            </a:pPr>
+            <a:r>
+              <a:rPr lang="en-US" sz="1466" dirty="0">
+                <a:solidFill>
+                  <a:srgbClr val="2E2C26"/>
+                </a:solidFill>
+                <a:latin typeface="Inter" pitchFamily="34" charset="0"/>
+                <a:ea typeface="Inter" pitchFamily="34" charset="-122"/>
+                <a:cs typeface="Inter" pitchFamily="34" charset="-120"/>
+              </a:rPr>
+              <a:t>SOURCE — NONE. EVERY CLAIM HERE IS MECHANICAL, NOT MEASURED.</a:t>
+            </a:r>
+            <a:endParaRPr lang="en-US" sz="1466" dirty="0"/>
+          </a:p>
+        </p:txBody>
+      </p:sp>
+      <p:sp>
+        <p:nvSpPr>
+          <p:cNvPr id="19" name="Text 17"/>
+          <p:cNvSpPr/>
+          <p:nvPr/>
+        </p:nvSpPr>
+        <p:spPr>
+          <a:xfrm>
+            <a:off x="9585309" y="6089253"/>
+            <a:ext cx="2103285" cy="260747"/>
+          </a:xfrm>
+          <a:prstGeom prst="rect">
+            <a:avLst/>
+          </a:prstGeom>
+          <a:noFill/>
+          <a:ln/>
+        </p:spPr>
+        <p:txBody>
+          <a:bodyPr wrap="square" lIns="0" tIns="0" rIns="0" bIns="0" rtlCol="0" anchor="t"/>
+          <a:lstStyle/>
+          <a:p>
+            <a:pPr algn="l" indent="0" marL="0">
+              <a:lnSpc>
+                <a:spcPts val="2053"/>
+              </a:lnSpc>
+              <a:buNone/>
+            </a:pPr>
+            <a:r>
+              <a:rPr lang="en-US" sz="1466" dirty="0">
+                <a:solidFill>
+                  <a:srgbClr val="2E2C26"/>
+                </a:solidFill>
+                <a:latin typeface="Inter" pitchFamily="34" charset="0"/>
+                <a:ea typeface="Inter" pitchFamily="34" charset="-122"/>
+                <a:cs typeface="Inter" pitchFamily="34" charset="-120"/>
+              </a:rPr>
+              <a:t>POSTMORTEM · 04</a:t>
+            </a:r>
+            <a:endParaRPr lang="en-US" sz="1466" dirty="0"/>
+          </a:p>
+        </p:txBody>
+      </p:sp>
     </p:spTree>
   </p:cSld>
   <p:clrMapOvr>
@@ -1495,6 +4793,13 @@
 <file path=ppt/slides/slide5.xml><?xml version="1.0" encoding="utf-8"?>
 <p:sld xmlns:a="http://schemas.openxmlformats.org/drawingml/2006/main" xmlns:r="http://schemas.openxmlformats.org/officeDocument/2006/relationships" xmlns:p="http://schemas.openxmlformats.org/presentationml/2006/main">
   <p:cSld name="Slide 5">
+    <p:bg>
+      <p:bgPr>
+        <a:solidFill>
+          <a:srgbClr val="F4F1E8"/>
+        </a:solidFill>
+      </p:bgPr>
+    </p:bg>
     <p:spTree>
       <p:nvGrpSpPr>
         <p:cNvPr id="1" name=""/>
@@ -1509,30 +4814,842 @@
           <a:chExt cx="0" cy="0"/>
         </a:xfrm>
       </p:grpSpPr>
-      <p:pic>
-        <p:nvPicPr>
-          <p:cNvPr id="2" name="Image 0" descr="/tmp/slide-1787840546437-811jqo6zome.png">    </p:cNvPr>
-          <p:cNvPicPr>
-            <a:picLocks noChangeAspect="1"/>
-          </p:cNvPicPr>
-          <p:nvPr/>
-        </p:nvPicPr>
-        <p:blipFill>
-          <a:blip r:embed="rId1"/>
-          <a:stretch>
-            <a:fillRect/>
-          </a:stretch>
-        </p:blipFill>
-        <p:spPr>
-          <a:xfrm>
-            <a:off x="0" y="0"/>
-            <a:ext cx="12188952" cy="6858000"/>
-          </a:xfrm>
-          <a:prstGeom prst="rect">
-            <a:avLst/>
-          </a:prstGeom>
-        </p:spPr>
-      </p:pic>
+      <p:sp>
+        <p:nvSpPr>
+          <p:cNvPr id="2" name="Text 0"/>
+          <p:cNvSpPr/>
+          <p:nvPr/>
+        </p:nvSpPr>
+        <p:spPr>
+          <a:xfrm>
+            <a:off x="541599" y="406400"/>
+            <a:ext cx="5305158" cy="260747"/>
+          </a:xfrm>
+          <a:prstGeom prst="rect">
+            <a:avLst/>
+          </a:prstGeom>
+          <a:noFill/>
+          <a:ln/>
+        </p:spPr>
+        <p:txBody>
+          <a:bodyPr wrap="square" lIns="0" tIns="0" rIns="0" bIns="0" rtlCol="0" anchor="t"/>
+          <a:lstStyle/>
+          <a:p>
+            <a:pPr algn="l" indent="0" marL="0">
+              <a:lnSpc>
+                <a:spcPts val="2053"/>
+              </a:lnSpc>
+              <a:buNone/>
+            </a:pPr>
+            <a:r>
+              <a:rPr lang="en-US" sz="1466" dirty="0">
+                <a:solidFill>
+                  <a:srgbClr val="2E2C26"/>
+                </a:solidFill>
+                <a:latin typeface="Inter" pitchFamily="34" charset="0"/>
+                <a:ea typeface="Inter" pitchFamily="34" charset="-122"/>
+                <a:cs typeface="Inter" pitchFamily="34" charset="-120"/>
+              </a:rPr>
+              <a:t>BLAMELESS REVIEW · PLATFORM ENGINEERING</a:t>
+            </a:r>
+            <a:endParaRPr lang="en-US" sz="1466" dirty="0"/>
+          </a:p>
+        </p:txBody>
+      </p:sp>
+      <p:sp>
+        <p:nvSpPr>
+          <p:cNvPr id="3" name="Text 1"/>
+          <p:cNvSpPr/>
+          <p:nvPr/>
+        </p:nvSpPr>
+        <p:spPr>
+          <a:xfrm>
+            <a:off x="10074335" y="406400"/>
+            <a:ext cx="1604478" cy="260747"/>
+          </a:xfrm>
+          <a:prstGeom prst="rect">
+            <a:avLst/>
+          </a:prstGeom>
+          <a:noFill/>
+          <a:ln/>
+        </p:spPr>
+        <p:txBody>
+          <a:bodyPr wrap="square" lIns="0" tIns="0" rIns="0" bIns="0" rtlCol="0" anchor="t"/>
+          <a:lstStyle/>
+          <a:p>
+            <a:pPr algn="l" indent="0" marL="0">
+              <a:lnSpc>
+                <a:spcPts val="2053"/>
+              </a:lnSpc>
+              <a:buNone/>
+            </a:pPr>
+            <a:r>
+              <a:rPr lang="en-US" sz="1466" dirty="0">
+                <a:solidFill>
+                  <a:srgbClr val="2E2C26"/>
+                </a:solidFill>
+                <a:latin typeface="Inter" pitchFamily="34" charset="0"/>
+                <a:ea typeface="Inter" pitchFamily="34" charset="-122"/>
+                <a:cs typeface="Inter" pitchFamily="34" charset="-120"/>
+              </a:rPr>
+              <a:t>SHEET 05 / 06</a:t>
+            </a:r>
+            <a:endParaRPr lang="en-US" sz="1466" dirty="0"/>
+          </a:p>
+        </p:txBody>
+      </p:sp>
+      <p:sp>
+        <p:nvSpPr>
+          <p:cNvPr id="4" name="Text 2"/>
+          <p:cNvSpPr/>
+          <p:nvPr/>
+        </p:nvSpPr>
+        <p:spPr>
+          <a:xfrm>
+            <a:off x="541599" y="768747"/>
+            <a:ext cx="11105754" cy="33734"/>
+          </a:xfrm>
+          <a:prstGeom prst="rect">
+            <a:avLst/>
+          </a:prstGeom>
+          <a:solidFill>
+            <a:srgbClr val="1C1B17"/>
+          </a:solidFill>
+          <a:ln/>
+        </p:spPr>
+        <p:txBody>
+          <a:bodyPr wrap="square" rtlCol="0" anchor="ctr"/>
+          <a:lstStyle/>
+          <a:p>
+            <a:pPr indent="0" marL="0">
+              <a:buNone/>
+            </a:pPr>
+            <a:endParaRPr lang="en-US" dirty="0"/>
+          </a:p>
+        </p:txBody>
+      </p:sp>
+      <p:sp>
+        <p:nvSpPr>
+          <p:cNvPr id="5" name="Text 3"/>
+          <p:cNvSpPr/>
+          <p:nvPr/>
+        </p:nvSpPr>
+        <p:spPr>
+          <a:xfrm>
+            <a:off x="541599" y="1039416"/>
+            <a:ext cx="11327869" cy="592534"/>
+          </a:xfrm>
+          <a:prstGeom prst="rect">
+            <a:avLst/>
+          </a:prstGeom>
+          <a:noFill/>
+          <a:ln/>
+        </p:spPr>
+        <p:txBody>
+          <a:bodyPr wrap="square" lIns="0" tIns="0" rIns="0" bIns="0" rtlCol="0" anchor="t"/>
+          <a:lstStyle/>
+          <a:p>
+            <a:pPr algn="l" indent="0" marL="0">
+              <a:lnSpc>
+                <a:spcPts val="4666"/>
+              </a:lnSpc>
+              <a:buNone/>
+            </a:pPr>
+            <a:r>
+              <a:rPr lang="en-US" sz="3733" b="1" dirty="0">
+                <a:solidFill>
+                  <a:srgbClr val="1C1B17"/>
+                </a:solidFill>
+                <a:latin typeface="Playfair Display" pitchFamily="34" charset="0"/>
+                <a:ea typeface="Playfair Display" pitchFamily="34" charset="-122"/>
+                <a:cs typeface="Playfair Display" pitchFamily="34" charset="-120"/>
+              </a:rPr>
+              <a:t>Keeping the word, dropping the bill</a:t>
+            </a:r>
+            <a:endParaRPr lang="en-US" sz="3733" dirty="0"/>
+          </a:p>
+        </p:txBody>
+      </p:sp>
+      <p:sp>
+        <p:nvSpPr>
+          <p:cNvPr id="6" name="Text 4"/>
+          <p:cNvSpPr/>
+          <p:nvPr/>
+        </p:nvSpPr>
+        <p:spPr>
+          <a:xfrm>
+            <a:off x="541599" y="1801217"/>
+            <a:ext cx="11105754" cy="8334"/>
+          </a:xfrm>
+          <a:prstGeom prst="rect">
+            <a:avLst/>
+          </a:prstGeom>
+          <a:solidFill>
+            <a:srgbClr val="1C1B17"/>
+          </a:solidFill>
+          <a:ln/>
+        </p:spPr>
+        <p:txBody>
+          <a:bodyPr wrap="square" rtlCol="0" anchor="ctr"/>
+          <a:lstStyle/>
+          <a:p>
+            <a:pPr indent="0" marL="0">
+              <a:buNone/>
+            </a:pPr>
+            <a:endParaRPr lang="en-US" dirty="0"/>
+          </a:p>
+        </p:txBody>
+      </p:sp>
+      <p:sp>
+        <p:nvSpPr>
+          <p:cNvPr id="7" name="Text 5"/>
+          <p:cNvSpPr/>
+          <p:nvPr/>
+        </p:nvSpPr>
+        <p:spPr>
+          <a:xfrm>
+            <a:off x="541599" y="1978819"/>
+            <a:ext cx="4486225" cy="260747"/>
+          </a:xfrm>
+          <a:prstGeom prst="rect">
+            <a:avLst/>
+          </a:prstGeom>
+          <a:noFill/>
+          <a:ln/>
+        </p:spPr>
+        <p:txBody>
+          <a:bodyPr wrap="square" lIns="0" tIns="0" rIns="0" bIns="0" rtlCol="0" anchor="t"/>
+          <a:lstStyle/>
+          <a:p>
+            <a:pPr algn="l" indent="0" marL="0">
+              <a:lnSpc>
+                <a:spcPts val="2053"/>
+              </a:lnSpc>
+              <a:buNone/>
+            </a:pPr>
+            <a:r>
+              <a:rPr lang="en-US" sz="1466" dirty="0">
+                <a:solidFill>
+                  <a:srgbClr val="A8231B"/>
+                </a:solidFill>
+                <a:latin typeface="Inter" pitchFamily="34" charset="0"/>
+                <a:ea typeface="Inter" pitchFamily="34" charset="-122"/>
+                <a:cs typeface="Inter" pitchFamily="34" charset="-120"/>
+              </a:rPr>
+              <a:t>WHERE IT GOES QUIETLY</a:t>
+            </a:r>
+            <a:endParaRPr lang="en-US" sz="1466" dirty="0"/>
+          </a:p>
+        </p:txBody>
+      </p:sp>
+      <p:sp>
+        <p:nvSpPr>
+          <p:cNvPr id="8" name="Text 6"/>
+          <p:cNvSpPr/>
+          <p:nvPr/>
+        </p:nvSpPr>
+        <p:spPr>
+          <a:xfrm>
+            <a:off x="541599" y="2341166"/>
+            <a:ext cx="4486225" cy="704255"/>
+          </a:xfrm>
+          <a:prstGeom prst="rect">
+            <a:avLst/>
+          </a:prstGeom>
+          <a:noFill/>
+          <a:ln/>
+        </p:spPr>
+        <p:txBody>
+          <a:bodyPr wrap="square" lIns="0" tIns="0" rIns="0" bIns="0" rtlCol="0" anchor="t"/>
+          <a:lstStyle/>
+          <a:p>
+            <a:pPr algn="l" indent="0" marL="0">
+              <a:lnSpc>
+                <a:spcPts val="2773"/>
+              </a:lnSpc>
+              <a:spcBef>
+                <a:spcPts val="800"/>
+              </a:spcBef>
+              <a:buNone/>
+            </a:pPr>
+            <a:r>
+              <a:rPr lang="en-US" sz="2133" b="1" dirty="0">
+                <a:solidFill>
+                  <a:srgbClr val="1C1B17"/>
+                </a:solidFill>
+                <a:latin typeface="Playfair Display" pitchFamily="34" charset="0"/>
+                <a:ea typeface="Playfair Display" pitchFamily="34" charset="-122"/>
+                <a:cs typeface="Playfair Display" pitchFamily="34" charset="-120"/>
+              </a:rPr>
+              <a:t>Saying it is free</a:t>
+            </a:r>
+            <a:endParaRPr lang="en-US" sz="2133" dirty="0"/>
+          </a:p>
+        </p:txBody>
+      </p:sp>
+      <p:sp>
+        <p:nvSpPr>
+          <p:cNvPr id="9" name="Text 7"/>
+          <p:cNvSpPr/>
+          <p:nvPr/>
+        </p:nvSpPr>
+        <p:spPr>
+          <a:xfrm>
+            <a:off x="541599" y="3045420"/>
+            <a:ext cx="4486225" cy="2578100"/>
+          </a:xfrm>
+          <a:prstGeom prst="rect">
+            <a:avLst/>
+          </a:prstGeom>
+          <a:noFill/>
+          <a:ln/>
+        </p:spPr>
+        <p:txBody>
+          <a:bodyPr wrap="square" lIns="0" tIns="0" rIns="0" bIns="0" rtlCol="0" anchor="t"/>
+          <a:lstStyle/>
+          <a:p>
+            <a:pPr algn="l" indent="0" marL="0">
+              <a:lnSpc>
+                <a:spcPts val="2900"/>
+              </a:lnSpc>
+              <a:buNone/>
+            </a:pPr>
+            <a:r>
+              <a:rPr lang="en-US" sz="2000" dirty="0">
+                <a:solidFill>
+                  <a:srgbClr val="2E2C26"/>
+                </a:solidFill>
+                <a:latin typeface="Noto Serif" pitchFamily="34" charset="0"/>
+                <a:ea typeface="Noto Serif" pitchFamily="34" charset="-122"/>
+                <a:cs typeface="Noto Serif" pitchFamily="34" charset="-120"/>
+              </a:rPr>
+              <a:t>The word survives because saying it costs nothing. The concessions are</a:t>
+            </a:r>
+            <a:endParaRPr lang="en-US" sz="2000" dirty="0"/>
+          </a:p>
+          <a:p>
+            <a:pPr algn="l" indent="0" marL="0">
+              <a:lnSpc>
+                <a:spcPts val="2900"/>
+              </a:lnSpc>
+              <a:buNone/>
+            </a:pPr>
+            <a:r>
+              <a:rPr lang="en-US" sz="2000" dirty="0">
+                <a:solidFill>
+                  <a:srgbClr val="2E2C26"/>
+                </a:solidFill>
+                <a:latin typeface="Noto Serif" pitchFamily="34" charset="0"/>
+                <a:ea typeface="Noto Serif" pitchFamily="34" charset="-122"/>
+                <a:cs typeface="Noto Serif" pitchFamily="34" charset="-120"/>
+              </a:rPr>
+              <a:t>      not free, so the concessions are what gets dropped — quietly, one meeting at a</a:t>
+            </a:r>
+            <a:endParaRPr lang="en-US" sz="2000" dirty="0"/>
+          </a:p>
+          <a:p>
+            <a:pPr algn="l" indent="0" marL="0">
+              <a:lnSpc>
+                <a:spcPts val="2900"/>
+              </a:lnSpc>
+              <a:buNone/>
+            </a:pPr>
+            <a:r>
+              <a:rPr lang="en-US" sz="2000" dirty="0">
+                <a:solidFill>
+                  <a:srgbClr val="2E2C26"/>
+                </a:solidFill>
+                <a:latin typeface="Noto Serif" pitchFamily="34" charset="0"/>
+                <a:ea typeface="Noto Serif" pitchFamily="34" charset="-122"/>
+                <a:cs typeface="Noto Serif" pitchFamily="34" charset="-120"/>
+              </a:rPr>
+              <a:t>      time. Nobody decides to drop them; they are simply never paid.</a:t>
+            </a:r>
+            <a:endParaRPr lang="en-US" sz="2000" dirty="0"/>
+          </a:p>
+        </p:txBody>
+      </p:sp>
+      <p:sp>
+        <p:nvSpPr>
+          <p:cNvPr id="10" name="Text 8"/>
+          <p:cNvSpPr/>
+          <p:nvPr/>
+        </p:nvSpPr>
+        <p:spPr>
+          <a:xfrm>
+            <a:off x="5210658" y="1978819"/>
+            <a:ext cx="8332" cy="3863181"/>
+          </a:xfrm>
+          <a:prstGeom prst="rect">
+            <a:avLst/>
+          </a:prstGeom>
+          <a:solidFill>
+            <a:srgbClr val="1C1B17"/>
+          </a:solidFill>
+          <a:ln/>
+        </p:spPr>
+        <p:txBody>
+          <a:bodyPr wrap="square" rtlCol="0" anchor="ctr"/>
+          <a:lstStyle/>
+          <a:p>
+            <a:pPr indent="0" marL="0">
+              <a:buNone/>
+            </a:pPr>
+            <a:endParaRPr lang="en-US" dirty="0"/>
+          </a:p>
+        </p:txBody>
+      </p:sp>
+      <p:sp>
+        <p:nvSpPr>
+          <p:cNvPr id="11" name="Text 9"/>
+          <p:cNvSpPr/>
+          <p:nvPr/>
+        </p:nvSpPr>
+        <p:spPr>
+          <a:xfrm>
+            <a:off x="5489790" y="1978819"/>
+            <a:ext cx="6280715" cy="260747"/>
+          </a:xfrm>
+          <a:prstGeom prst="rect">
+            <a:avLst/>
+          </a:prstGeom>
+          <a:noFill/>
+          <a:ln/>
+        </p:spPr>
+        <p:txBody>
+          <a:bodyPr wrap="square" lIns="0" tIns="0" rIns="0" bIns="0" rtlCol="0" anchor="t"/>
+          <a:lstStyle/>
+          <a:p>
+            <a:pPr algn="l" indent="0" marL="0">
+              <a:lnSpc>
+                <a:spcPts val="2053"/>
+              </a:lnSpc>
+              <a:buNone/>
+            </a:pPr>
+            <a:r>
+              <a:rPr lang="en-US" sz="1466" dirty="0">
+                <a:solidFill>
+                  <a:srgbClr val="2E2C26"/>
+                </a:solidFill>
+                <a:latin typeface="Inter" pitchFamily="34" charset="0"/>
+                <a:ea typeface="Inter" pitchFamily="34" charset="-122"/>
+                <a:cs typeface="Inter" pitchFamily="34" charset="-120"/>
+              </a:rPr>
+              <a:t>READ YOUR LAST REVIEW FOR THESE</a:t>
+            </a:r>
+            <a:endParaRPr lang="en-US" sz="1466" dirty="0"/>
+          </a:p>
+        </p:txBody>
+      </p:sp>
+      <p:sp>
+        <p:nvSpPr>
+          <p:cNvPr id="12" name="Text 10"/>
+          <p:cNvSpPr/>
+          <p:nvPr/>
+        </p:nvSpPr>
+        <p:spPr>
+          <a:xfrm>
+            <a:off x="5489790" y="2374900"/>
+            <a:ext cx="6157563" cy="3467100"/>
+          </a:xfrm>
+          <a:prstGeom prst="rect">
+            <a:avLst/>
+          </a:prstGeom>
+          <a:noFill/>
+          <a:ln/>
+        </p:spPr>
+        <p:txBody>
+          <a:bodyPr wrap="square" lIns="0" tIns="0" rIns="0" bIns="0" rtlCol="0" anchor="t"/>
+          <a:lstStyle/>
+          <a:p>
+            <a:pPr algn="l" marL="342900" indent="-342900">
+              <a:buSzPct val="100000"/>
+              <a:buChar char="•"/>
+            </a:pPr>
+            <a:r>
+              <a:rPr lang="en-US" sz="2000" b="1" dirty="0">
+                <a:solidFill>
+                  <a:srgbClr val="1C1B17"/>
+                </a:solidFill>
+                <a:latin typeface="Noto Serif" pitchFamily="34" charset="0"/>
+                <a:ea typeface="Noto Serif" pitchFamily="34" charset="-122"/>
+                <a:cs typeface="Noto Serif" pitchFamily="34" charset="-120"/>
+              </a:rPr>
+              <a:t>The cause field says “human error.”</a:t>
+            </a:r>
+            <a:pPr algn="l" indent="0" marL="0">
+              <a:buNone/>
+            </a:pPr>
+            <a:r>
+              <a:rPr lang="en-US" sz="1600" dirty="0">
+                <a:solidFill>
+                  <a:srgbClr val="2E2C26"/>
+                </a:solidFill>
+                <a:latin typeface="Noto Serif" pitchFamily="34" charset="0"/>
+                <a:ea typeface="Noto Serif" pitchFamily="34" charset="-122"/>
+                <a:cs typeface="Noto Serif" pitchFamily="34" charset="-120"/>
+              </a:rPr>
+              <a:t> The search stopped at the first person it found.</a:t>
+            </a:r>
+            <a:endParaRPr lang="en-US" sz="1600" dirty="0"/>
+          </a:p>
+          <a:p>
+            <a:pPr algn="l" marL="342900" indent="-342900">
+              <a:buSzPct val="100000"/>
+              <a:buChar char="•"/>
+            </a:pPr>
+            <a:r>
+              <a:rPr lang="en-US" sz="2000" b="1" dirty="0">
+                <a:solidFill>
+                  <a:srgbClr val="1C1B17"/>
+                </a:solidFill>
+                <a:latin typeface="Noto Serif" pitchFamily="34" charset="0"/>
+                <a:ea typeface="Noto Serif" pitchFamily="34" charset="-122"/>
+                <a:cs typeface="Noto Serif" pitchFamily="34" charset="-120"/>
+              </a:rPr>
+              <a:t>Action items are owned by a team.</a:t>
+            </a:r>
+            <a:pPr algn="l" indent="0" marL="0">
+              <a:buNone/>
+            </a:pPr>
+            <a:r>
+              <a:rPr lang="en-US" sz="1600" dirty="0">
+                <a:solidFill>
+                  <a:srgbClr val="2E2C26"/>
+                </a:solidFill>
+                <a:latin typeface="Noto Serif" pitchFamily="34" charset="0"/>
+                <a:ea typeface="Noto Serif" pitchFamily="34" charset="-122"/>
+                <a:cs typeface="Noto Serif" pitchFamily="34" charset="-120"/>
+              </a:rPr>
+              <a:t> Nobody is late, because nobody was ever due.</a:t>
+            </a:r>
+            <a:endParaRPr lang="en-US" sz="1600" dirty="0"/>
+          </a:p>
+          <a:p>
+            <a:pPr algn="l" marL="342900" indent="-342900">
+              <a:buSzPct val="100000"/>
+              <a:buChar char="•"/>
+            </a:pPr>
+            <a:r>
+              <a:rPr lang="en-US" sz="2000" b="1" dirty="0">
+                <a:solidFill>
+                  <a:srgbClr val="1C1B17"/>
+                </a:solidFill>
+                <a:latin typeface="Noto Serif" pitchFamily="34" charset="0"/>
+                <a:ea typeface="Noto Serif" pitchFamily="34" charset="-122"/>
+                <a:cs typeface="Noto Serif" pitchFamily="34" charset="-120"/>
+              </a:rPr>
+              <a:t>The same failure is filed twice.</a:t>
+            </a:r>
+            <a:pPr algn="l" indent="0" marL="0">
+              <a:buNone/>
+            </a:pPr>
+            <a:r>
+              <a:rPr lang="en-US" sz="1600" dirty="0">
+                <a:solidFill>
+                  <a:srgbClr val="2E2C26"/>
+                </a:solidFill>
+                <a:latin typeface="Noto Serif" pitchFamily="34" charset="0"/>
+                <a:ea typeface="Noto Serif" pitchFamily="34" charset="-122"/>
+                <a:cs typeface="Noto Serif" pitchFamily="34" charset="-120"/>
+              </a:rPr>
+              <a:t> Two titles, one condition nobody fixed.</a:t>
+            </a:r>
+            <a:endParaRPr lang="en-US" sz="1600" dirty="0"/>
+          </a:p>
+        </p:txBody>
+      </p:sp>
+      <p:sp>
+        <p:nvSpPr>
+          <p:cNvPr id="13" name="Text 11"/>
+          <p:cNvSpPr/>
+          <p:nvPr/>
+        </p:nvSpPr>
+        <p:spPr>
+          <a:xfrm>
+            <a:off x="5489790" y="2590800"/>
+            <a:ext cx="6280715" cy="736600"/>
+          </a:xfrm>
+          <a:prstGeom prst="rect">
+            <a:avLst/>
+          </a:prstGeom>
+          <a:noFill/>
+          <a:ln/>
+        </p:spPr>
+        <p:txBody>
+          <a:bodyPr wrap="square" lIns="0" tIns="0" rIns="0" bIns="0" rtlCol="0" anchor="t"/>
+          <a:lstStyle/>
+          <a:p>
+            <a:pPr algn="l" indent="0" marL="0">
+              <a:lnSpc>
+                <a:spcPts val="2900"/>
+              </a:lnSpc>
+              <a:buNone/>
+            </a:pPr>
+            <a:r>
+              <a:rPr lang="en-US" sz="2000" b="1" dirty="0">
+                <a:solidFill>
+                  <a:srgbClr val="1C1B17"/>
+                </a:solidFill>
+                <a:latin typeface="Noto Serif" pitchFamily="34" charset="0"/>
+                <a:ea typeface="Noto Serif" pitchFamily="34" charset="-122"/>
+                <a:cs typeface="Noto Serif" pitchFamily="34" charset="-120"/>
+              </a:rPr>
+              <a:t>The cause field says “human error.”</a:t>
+            </a:r>
+            <a:pPr algn="l" indent="0" marL="0">
+              <a:lnSpc>
+                <a:spcPts val="2900"/>
+              </a:lnSpc>
+              <a:buNone/>
+            </a:pPr>
+            <a:r>
+              <a:rPr lang="en-US" sz="2000" dirty="0">
+                <a:solidFill>
+                  <a:srgbClr val="2E2C26"/>
+                </a:solidFill>
+                <a:latin typeface="Noto Serif" pitchFamily="34" charset="0"/>
+                <a:ea typeface="Noto Serif" pitchFamily="34" charset="-122"/>
+                <a:cs typeface="Noto Serif" pitchFamily="34" charset="-120"/>
+              </a:rPr>
+              <a:t> The search stopped at the first person it found.</a:t>
+            </a:r>
+            <a:endParaRPr lang="en-US" sz="2000" dirty="0"/>
+          </a:p>
+        </p:txBody>
+      </p:sp>
+      <p:sp>
+        <p:nvSpPr>
+          <p:cNvPr id="14" name="Text 12"/>
+          <p:cNvSpPr/>
+          <p:nvPr/>
+        </p:nvSpPr>
+        <p:spPr>
+          <a:xfrm>
+            <a:off x="5489790" y="3746500"/>
+            <a:ext cx="6280715" cy="736600"/>
+          </a:xfrm>
+          <a:prstGeom prst="rect">
+            <a:avLst/>
+          </a:prstGeom>
+          <a:noFill/>
+          <a:ln/>
+        </p:spPr>
+        <p:txBody>
+          <a:bodyPr wrap="square" lIns="0" tIns="0" rIns="0" bIns="0" rtlCol="0" anchor="t"/>
+          <a:lstStyle/>
+          <a:p>
+            <a:pPr algn="l" indent="0" marL="0">
+              <a:lnSpc>
+                <a:spcPts val="2900"/>
+              </a:lnSpc>
+              <a:buNone/>
+            </a:pPr>
+            <a:r>
+              <a:rPr lang="en-US" sz="2000" b="1" dirty="0">
+                <a:solidFill>
+                  <a:srgbClr val="1C1B17"/>
+                </a:solidFill>
+                <a:latin typeface="Noto Serif" pitchFamily="34" charset="0"/>
+                <a:ea typeface="Noto Serif" pitchFamily="34" charset="-122"/>
+                <a:cs typeface="Noto Serif" pitchFamily="34" charset="-120"/>
+              </a:rPr>
+              <a:t>Action items are owned by a team.</a:t>
+            </a:r>
+            <a:pPr algn="l" indent="0" marL="0">
+              <a:lnSpc>
+                <a:spcPts val="2900"/>
+              </a:lnSpc>
+              <a:buNone/>
+            </a:pPr>
+            <a:r>
+              <a:rPr lang="en-US" sz="2000" dirty="0">
+                <a:solidFill>
+                  <a:srgbClr val="2E2C26"/>
+                </a:solidFill>
+                <a:latin typeface="Noto Serif" pitchFamily="34" charset="0"/>
+                <a:ea typeface="Noto Serif" pitchFamily="34" charset="-122"/>
+                <a:cs typeface="Noto Serif" pitchFamily="34" charset="-120"/>
+              </a:rPr>
+              <a:t> Nobody is late, because nobody was ever due.</a:t>
+            </a:r>
+            <a:endParaRPr lang="en-US" sz="2000" dirty="0"/>
+          </a:p>
+        </p:txBody>
+      </p:sp>
+      <p:sp>
+        <p:nvSpPr>
+          <p:cNvPr id="15" name="Text 13"/>
+          <p:cNvSpPr/>
+          <p:nvPr/>
+        </p:nvSpPr>
+        <p:spPr>
+          <a:xfrm>
+            <a:off x="5489790" y="4902200"/>
+            <a:ext cx="6280715" cy="736600"/>
+          </a:xfrm>
+          <a:prstGeom prst="rect">
+            <a:avLst/>
+          </a:prstGeom>
+          <a:noFill/>
+          <a:ln/>
+        </p:spPr>
+        <p:txBody>
+          <a:bodyPr wrap="square" lIns="0" tIns="0" rIns="0" bIns="0" rtlCol="0" anchor="t"/>
+          <a:lstStyle/>
+          <a:p>
+            <a:pPr algn="l" indent="0" marL="0">
+              <a:lnSpc>
+                <a:spcPts val="2900"/>
+              </a:lnSpc>
+              <a:buNone/>
+            </a:pPr>
+            <a:r>
+              <a:rPr lang="en-US" sz="2000" b="1" dirty="0">
+                <a:solidFill>
+                  <a:srgbClr val="1C1B17"/>
+                </a:solidFill>
+                <a:latin typeface="Noto Serif" pitchFamily="34" charset="0"/>
+                <a:ea typeface="Noto Serif" pitchFamily="34" charset="-122"/>
+                <a:cs typeface="Noto Serif" pitchFamily="34" charset="-120"/>
+              </a:rPr>
+              <a:t>The same failure is filed twice.</a:t>
+            </a:r>
+            <a:pPr algn="l" indent="0" marL="0">
+              <a:lnSpc>
+                <a:spcPts val="2900"/>
+              </a:lnSpc>
+              <a:buNone/>
+            </a:pPr>
+            <a:r>
+              <a:rPr lang="en-US" sz="2000" dirty="0">
+                <a:solidFill>
+                  <a:srgbClr val="2E2C26"/>
+                </a:solidFill>
+                <a:latin typeface="Noto Serif" pitchFamily="34" charset="0"/>
+                <a:ea typeface="Noto Serif" pitchFamily="34" charset="-122"/>
+                <a:cs typeface="Noto Serif" pitchFamily="34" charset="-120"/>
+              </a:rPr>
+              <a:t> Two titles, one condition nobody fixed.</a:t>
+            </a:r>
+            <a:endParaRPr lang="en-US" sz="2000" dirty="0"/>
+          </a:p>
+        </p:txBody>
+      </p:sp>
+      <p:sp>
+        <p:nvSpPr>
+          <p:cNvPr id="16" name="Text 14"/>
+          <p:cNvSpPr/>
+          <p:nvPr/>
+        </p:nvSpPr>
+        <p:spPr>
+          <a:xfrm>
+            <a:off x="541599" y="5962452"/>
+            <a:ext cx="11105754" cy="8334"/>
+          </a:xfrm>
+          <a:prstGeom prst="rect">
+            <a:avLst/>
+          </a:prstGeom>
+          <a:solidFill>
+            <a:srgbClr val="1C1B17"/>
+          </a:solidFill>
+          <a:ln/>
+        </p:spPr>
+        <p:txBody>
+          <a:bodyPr wrap="square" rtlCol="0" anchor="ctr"/>
+          <a:lstStyle/>
+          <a:p>
+            <a:pPr indent="0" marL="0">
+              <a:buNone/>
+            </a:pPr>
+            <a:endParaRPr lang="en-US" dirty="0"/>
+          </a:p>
+        </p:txBody>
+      </p:sp>
+      <p:sp>
+        <p:nvSpPr>
+          <p:cNvPr id="17" name="Text 15"/>
+          <p:cNvSpPr/>
+          <p:nvPr/>
+        </p:nvSpPr>
+        <p:spPr>
+          <a:xfrm>
+            <a:off x="541599" y="6089253"/>
+            <a:ext cx="8140970" cy="260747"/>
+          </a:xfrm>
+          <a:prstGeom prst="rect">
+            <a:avLst/>
+          </a:prstGeom>
+          <a:noFill/>
+          <a:ln/>
+        </p:spPr>
+        <p:txBody>
+          <a:bodyPr wrap="square" lIns="0" tIns="0" rIns="0" bIns="0" rtlCol="0" anchor="t"/>
+          <a:lstStyle/>
+          <a:p>
+            <a:pPr algn="l" indent="0" marL="0">
+              <a:lnSpc>
+                <a:spcPts val="2053"/>
+              </a:lnSpc>
+              <a:buNone/>
+            </a:pPr>
+            <a:r>
+              <a:rPr lang="en-US" sz="1466" dirty="0">
+                <a:solidFill>
+                  <a:srgbClr val="2E2C26"/>
+                </a:solidFill>
+                <a:latin typeface="Inter" pitchFamily="34" charset="0"/>
+                <a:ea typeface="Inter" pitchFamily="34" charset="-122"/>
+                <a:cs typeface="Inter" pitchFamily="34" charset="-120"/>
+              </a:rPr>
+              <a:t>SOURCE — NONE. EVERY CLAIM HERE IS MECHANICAL, NOT MEASURED.</a:t>
+            </a:r>
+            <a:endParaRPr lang="en-US" sz="1466" dirty="0"/>
+          </a:p>
+        </p:txBody>
+      </p:sp>
+      <p:sp>
+        <p:nvSpPr>
+          <p:cNvPr id="18" name="Text 16"/>
+          <p:cNvSpPr/>
+          <p:nvPr/>
+        </p:nvSpPr>
+        <p:spPr>
+          <a:xfrm>
+            <a:off x="9598006" y="6089253"/>
+            <a:ext cx="2090334" cy="260747"/>
+          </a:xfrm>
+          <a:prstGeom prst="rect">
+            <a:avLst/>
+          </a:prstGeom>
+          <a:noFill/>
+          <a:ln/>
+        </p:spPr>
+        <p:txBody>
+          <a:bodyPr wrap="square" lIns="0" tIns="0" rIns="0" bIns="0" rtlCol="0" anchor="t"/>
+          <a:lstStyle/>
+          <a:p>
+            <a:pPr algn="l" indent="0" marL="0">
+              <a:lnSpc>
+                <a:spcPts val="2053"/>
+              </a:lnSpc>
+              <a:buNone/>
+            </a:pPr>
+            <a:r>
+              <a:rPr lang="en-US" sz="1466" dirty="0">
+                <a:solidFill>
+                  <a:srgbClr val="2E2C26"/>
+                </a:solidFill>
+                <a:latin typeface="Inter" pitchFamily="34" charset="0"/>
+                <a:ea typeface="Inter" pitchFamily="34" charset="-122"/>
+                <a:cs typeface="Inter" pitchFamily="34" charset="-120"/>
+              </a:rPr>
+              <a:t>POSTMORTEM · 05</a:t>
+            </a:r>
+            <a:endParaRPr lang="en-US" sz="1466" dirty="0"/>
+          </a:p>
+        </p:txBody>
+      </p:sp>
     </p:spTree>
   </p:cSld>
   <p:clrMapOvr>
@@ -1544,6 +5661,13 @@
 <file path=ppt/slides/slide6.xml><?xml version="1.0" encoding="utf-8"?>
 <p:sld xmlns:a="http://schemas.openxmlformats.org/drawingml/2006/main" xmlns:r="http://schemas.openxmlformats.org/officeDocument/2006/relationships" xmlns:p="http://schemas.openxmlformats.org/presentationml/2006/main">
   <p:cSld name="Slide 6">
+    <p:bg>
+      <p:bgPr>
+        <a:solidFill>
+          <a:srgbClr val="F4F1E8"/>
+        </a:solidFill>
+      </p:bgPr>
+    </p:bg>
     <p:spTree>
       <p:nvGrpSpPr>
         <p:cNvPr id="1" name=""/>
@@ -1558,30 +5682,888 @@
           <a:chExt cx="0" cy="0"/>
         </a:xfrm>
       </p:grpSpPr>
-      <p:pic>
-        <p:nvPicPr>
-          <p:cNvPr id="2" name="Image 0" descr="/tmp/slide-1787840546708-prlglsgh98.png">    </p:cNvPr>
-          <p:cNvPicPr>
-            <a:picLocks noChangeAspect="1"/>
-          </p:cNvPicPr>
-          <p:nvPr/>
-        </p:nvPicPr>
-        <p:blipFill>
-          <a:blip r:embed="rId1"/>
-          <a:stretch>
-            <a:fillRect/>
-          </a:stretch>
-        </p:blipFill>
-        <p:spPr>
-          <a:xfrm>
-            <a:off x="0" y="0"/>
-            <a:ext cx="12188952" cy="6858000"/>
-          </a:xfrm>
-          <a:prstGeom prst="rect">
-            <a:avLst/>
-          </a:prstGeom>
-        </p:spPr>
-      </p:pic>
+      <p:sp>
+        <p:nvSpPr>
+          <p:cNvPr id="2" name="Text 0"/>
+          <p:cNvSpPr/>
+          <p:nvPr/>
+        </p:nvSpPr>
+        <p:spPr>
+          <a:xfrm>
+            <a:off x="541599" y="406400"/>
+            <a:ext cx="5305158" cy="260747"/>
+          </a:xfrm>
+          <a:prstGeom prst="rect">
+            <a:avLst/>
+          </a:prstGeom>
+          <a:noFill/>
+          <a:ln/>
+        </p:spPr>
+        <p:txBody>
+          <a:bodyPr wrap="square" lIns="0" tIns="0" rIns="0" bIns="0" rtlCol="0" anchor="t"/>
+          <a:lstStyle/>
+          <a:p>
+            <a:pPr algn="l" indent="0" marL="0">
+              <a:lnSpc>
+                <a:spcPts val="2053"/>
+              </a:lnSpc>
+              <a:buNone/>
+            </a:pPr>
+            <a:r>
+              <a:rPr lang="en-US" sz="1466" dirty="0">
+                <a:solidFill>
+                  <a:srgbClr val="2E2C26"/>
+                </a:solidFill>
+                <a:latin typeface="Inter" pitchFamily="34" charset="0"/>
+                <a:ea typeface="Inter" pitchFamily="34" charset="-122"/>
+                <a:cs typeface="Inter" pitchFamily="34" charset="-120"/>
+              </a:rPr>
+              <a:t>BLAMELESS REVIEW · PLATFORM ENGINEERING</a:t>
+            </a:r>
+            <a:endParaRPr lang="en-US" sz="1466" dirty="0"/>
+          </a:p>
+        </p:txBody>
+      </p:sp>
+      <p:sp>
+        <p:nvSpPr>
+          <p:cNvPr id="3" name="Text 1"/>
+          <p:cNvSpPr/>
+          <p:nvPr/>
+        </p:nvSpPr>
+        <p:spPr>
+          <a:xfrm>
+            <a:off x="10074335" y="406400"/>
+            <a:ext cx="1604478" cy="260747"/>
+          </a:xfrm>
+          <a:prstGeom prst="rect">
+            <a:avLst/>
+          </a:prstGeom>
+          <a:noFill/>
+          <a:ln/>
+        </p:spPr>
+        <p:txBody>
+          <a:bodyPr wrap="square" lIns="0" tIns="0" rIns="0" bIns="0" rtlCol="0" anchor="t"/>
+          <a:lstStyle/>
+          <a:p>
+            <a:pPr algn="l" indent="0" marL="0">
+              <a:lnSpc>
+                <a:spcPts val="2053"/>
+              </a:lnSpc>
+              <a:buNone/>
+            </a:pPr>
+            <a:r>
+              <a:rPr lang="en-US" sz="1466" dirty="0">
+                <a:solidFill>
+                  <a:srgbClr val="2E2C26"/>
+                </a:solidFill>
+                <a:latin typeface="Inter" pitchFamily="34" charset="0"/>
+                <a:ea typeface="Inter" pitchFamily="34" charset="-122"/>
+                <a:cs typeface="Inter" pitchFamily="34" charset="-120"/>
+              </a:rPr>
+              <a:t>SHEET 06 / 06</a:t>
+            </a:r>
+            <a:endParaRPr lang="en-US" sz="1466" dirty="0"/>
+          </a:p>
+        </p:txBody>
+      </p:sp>
+      <p:sp>
+        <p:nvSpPr>
+          <p:cNvPr id="4" name="Text 2"/>
+          <p:cNvSpPr/>
+          <p:nvPr/>
+        </p:nvSpPr>
+        <p:spPr>
+          <a:xfrm>
+            <a:off x="541599" y="768747"/>
+            <a:ext cx="11105754" cy="33734"/>
+          </a:xfrm>
+          <a:prstGeom prst="rect">
+            <a:avLst/>
+          </a:prstGeom>
+          <a:solidFill>
+            <a:srgbClr val="1C1B17"/>
+          </a:solidFill>
+          <a:ln/>
+        </p:spPr>
+        <p:txBody>
+          <a:bodyPr wrap="square" rtlCol="0" anchor="ctr"/>
+          <a:lstStyle/>
+          <a:p>
+            <a:pPr indent="0" marL="0">
+              <a:buNone/>
+            </a:pPr>
+            <a:endParaRPr lang="en-US" dirty="0"/>
+          </a:p>
+        </p:txBody>
+      </p:sp>
+      <p:sp>
+        <p:nvSpPr>
+          <p:cNvPr id="5" name="Text 3"/>
+          <p:cNvSpPr/>
+          <p:nvPr/>
+        </p:nvSpPr>
+        <p:spPr>
+          <a:xfrm>
+            <a:off x="541599" y="1039416"/>
+            <a:ext cx="11327869" cy="592534"/>
+          </a:xfrm>
+          <a:prstGeom prst="rect">
+            <a:avLst/>
+          </a:prstGeom>
+          <a:noFill/>
+          <a:ln/>
+        </p:spPr>
+        <p:txBody>
+          <a:bodyPr wrap="square" lIns="0" tIns="0" rIns="0" bIns="0" rtlCol="0" anchor="t"/>
+          <a:lstStyle/>
+          <a:p>
+            <a:pPr algn="l" indent="0" marL="0">
+              <a:lnSpc>
+                <a:spcPts val="4666"/>
+              </a:lnSpc>
+              <a:buNone/>
+            </a:pPr>
+            <a:r>
+              <a:rPr lang="en-US" sz="3733" b="1" dirty="0">
+                <a:solidFill>
+                  <a:srgbClr val="1C1B17"/>
+                </a:solidFill>
+                <a:latin typeface="Playfair Display" pitchFamily="34" charset="0"/>
+                <a:ea typeface="Playfair Display" pitchFamily="34" charset="-122"/>
+                <a:cs typeface="Playfair Display" pitchFamily="34" charset="-120"/>
+              </a:rPr>
+              <a:t>What we need to decide</a:t>
+            </a:r>
+            <a:endParaRPr lang="en-US" sz="3733" dirty="0"/>
+          </a:p>
+        </p:txBody>
+      </p:sp>
+      <p:sp>
+        <p:nvSpPr>
+          <p:cNvPr id="6" name="Text 4"/>
+          <p:cNvSpPr/>
+          <p:nvPr/>
+        </p:nvSpPr>
+        <p:spPr>
+          <a:xfrm>
+            <a:off x="541599" y="1801217"/>
+            <a:ext cx="11105754" cy="8334"/>
+          </a:xfrm>
+          <a:prstGeom prst="rect">
+            <a:avLst/>
+          </a:prstGeom>
+          <a:solidFill>
+            <a:srgbClr val="1C1B17"/>
+          </a:solidFill>
+          <a:ln/>
+        </p:spPr>
+        <p:txBody>
+          <a:bodyPr wrap="square" rtlCol="0" anchor="ctr"/>
+          <a:lstStyle/>
+          <a:p>
+            <a:pPr indent="0" marL="0">
+              <a:buNone/>
+            </a:pPr>
+            <a:endParaRPr lang="en-US" dirty="0"/>
+          </a:p>
+        </p:txBody>
+      </p:sp>
+      <p:sp>
+        <p:nvSpPr>
+          <p:cNvPr id="7" name="Text 5"/>
+          <p:cNvSpPr/>
+          <p:nvPr/>
+        </p:nvSpPr>
+        <p:spPr>
+          <a:xfrm>
+            <a:off x="541599" y="1978819"/>
+            <a:ext cx="3402003" cy="260747"/>
+          </a:xfrm>
+          <a:prstGeom prst="rect">
+            <a:avLst/>
+          </a:prstGeom>
+          <a:noFill/>
+          <a:ln/>
+        </p:spPr>
+        <p:txBody>
+          <a:bodyPr wrap="square" lIns="0" tIns="0" rIns="0" bIns="0" rtlCol="0" anchor="t"/>
+          <a:lstStyle/>
+          <a:p>
+            <a:pPr algn="l" indent="0" marL="0">
+              <a:lnSpc>
+                <a:spcPts val="2053"/>
+              </a:lnSpc>
+              <a:buNone/>
+            </a:pPr>
+            <a:r>
+              <a:rPr lang="en-US" sz="1466" dirty="0">
+                <a:solidFill>
+                  <a:srgbClr val="2E2C26"/>
+                </a:solidFill>
+                <a:latin typeface="Inter" pitchFamily="34" charset="0"/>
+                <a:ea typeface="Inter" pitchFamily="34" charset="-122"/>
+                <a:cs typeface="Inter" pitchFamily="34" charset="-120"/>
+              </a:rPr>
+              <a:t>DECISION ONE</a:t>
+            </a:r>
+            <a:endParaRPr lang="en-US" sz="1466" dirty="0"/>
+          </a:p>
+        </p:txBody>
+      </p:sp>
+      <p:sp>
+        <p:nvSpPr>
+          <p:cNvPr id="8" name="Text 6"/>
+          <p:cNvSpPr/>
+          <p:nvPr/>
+        </p:nvSpPr>
+        <p:spPr>
+          <a:xfrm>
+            <a:off x="541599" y="2341166"/>
+            <a:ext cx="3402003" cy="352028"/>
+          </a:xfrm>
+          <a:prstGeom prst="rect">
+            <a:avLst/>
+          </a:prstGeom>
+          <a:noFill/>
+          <a:ln/>
+        </p:spPr>
+        <p:txBody>
+          <a:bodyPr wrap="square" lIns="0" tIns="0" rIns="0" bIns="0" rtlCol="0" anchor="t"/>
+          <a:lstStyle/>
+          <a:p>
+            <a:pPr algn="l" indent="0" marL="0">
+              <a:lnSpc>
+                <a:spcPts val="2773"/>
+              </a:lnSpc>
+              <a:spcBef>
+                <a:spcPts val="800"/>
+              </a:spcBef>
+              <a:buNone/>
+            </a:pPr>
+            <a:r>
+              <a:rPr lang="en-US" sz="2133" b="1" dirty="0">
+                <a:solidFill>
+                  <a:srgbClr val="1C1B17"/>
+                </a:solidFill>
+                <a:latin typeface="Playfair Display" pitchFamily="34" charset="0"/>
+                <a:ea typeface="Playfair Display" pitchFamily="34" charset="-122"/>
+                <a:cs typeface="Playfair Display" pitchFamily="34" charset="-120"/>
+              </a:rPr>
+              <a:t>Who writes it</a:t>
+            </a:r>
+            <a:endParaRPr lang="en-US" sz="2133" dirty="0"/>
+          </a:p>
+        </p:txBody>
+      </p:sp>
+      <p:sp>
+        <p:nvSpPr>
+          <p:cNvPr id="9" name="Text 7"/>
+          <p:cNvSpPr/>
+          <p:nvPr/>
+        </p:nvSpPr>
+        <p:spPr>
+          <a:xfrm>
+            <a:off x="541599" y="2693194"/>
+            <a:ext cx="3402003" cy="2209800"/>
+          </a:xfrm>
+          <a:prstGeom prst="rect">
+            <a:avLst/>
+          </a:prstGeom>
+          <a:noFill/>
+          <a:ln/>
+        </p:spPr>
+        <p:txBody>
+          <a:bodyPr wrap="square" lIns="0" tIns="0" rIns="0" bIns="0" rtlCol="0" anchor="t"/>
+          <a:lstStyle/>
+          <a:p>
+            <a:pPr algn="l" indent="0" marL="0">
+              <a:lnSpc>
+                <a:spcPts val="2900"/>
+              </a:lnSpc>
+              <a:buNone/>
+            </a:pPr>
+            <a:r>
+              <a:rPr lang="en-US" sz="2000" dirty="0">
+                <a:solidFill>
+                  <a:srgbClr val="2E2C26"/>
+                </a:solidFill>
+                <a:latin typeface="Noto Serif" pitchFamily="34" charset="0"/>
+                <a:ea typeface="Noto Serif" pitchFamily="34" charset="-122"/>
+                <a:cs typeface="Noto Serif" pitchFamily="34" charset="-120"/>
+              </a:rPr>
+              <a:t>The person at the keyboard, the service owner, or an author who was not</a:t>
+            </a:r>
+            <a:endParaRPr lang="en-US" sz="2000" dirty="0"/>
+          </a:p>
+          <a:p>
+            <a:pPr algn="l" indent="0" marL="0">
+              <a:lnSpc>
+                <a:spcPts val="2900"/>
+              </a:lnSpc>
+              <a:buNone/>
+            </a:pPr>
+            <a:r>
+              <a:rPr lang="en-US" sz="2000" dirty="0">
+                <a:solidFill>
+                  <a:srgbClr val="2E2C26"/>
+                </a:solidFill>
+                <a:latin typeface="Noto Serif" pitchFamily="34" charset="0"/>
+                <a:ea typeface="Noto Serif" pitchFamily="34" charset="-122"/>
+                <a:cs typeface="Noto Serif" pitchFamily="34" charset="-120"/>
+              </a:rPr>
+              <a:t>      on the incident? Name the default, and name who may override it.</a:t>
+            </a:r>
+            <a:endParaRPr lang="en-US" sz="2000" dirty="0"/>
+          </a:p>
+        </p:txBody>
+      </p:sp>
+      <p:sp>
+        <p:nvSpPr>
+          <p:cNvPr id="10" name="Text 8"/>
+          <p:cNvSpPr/>
+          <p:nvPr/>
+        </p:nvSpPr>
+        <p:spPr>
+          <a:xfrm>
+            <a:off x="4147696" y="1978819"/>
+            <a:ext cx="8332" cy="2971205"/>
+          </a:xfrm>
+          <a:prstGeom prst="rect">
+            <a:avLst/>
+          </a:prstGeom>
+          <a:solidFill>
+            <a:srgbClr val="1C1B17"/>
+          </a:solidFill>
+          <a:ln/>
+        </p:spPr>
+        <p:txBody>
+          <a:bodyPr wrap="square" rtlCol="0" anchor="ctr"/>
+          <a:lstStyle/>
+          <a:p>
+            <a:pPr indent="0" marL="0">
+              <a:buNone/>
+            </a:pPr>
+            <a:endParaRPr lang="en-US" dirty="0"/>
+          </a:p>
+        </p:txBody>
+      </p:sp>
+      <p:sp>
+        <p:nvSpPr>
+          <p:cNvPr id="11" name="Text 9"/>
+          <p:cNvSpPr/>
+          <p:nvPr/>
+        </p:nvSpPr>
+        <p:spPr>
+          <a:xfrm>
+            <a:off x="4426827" y="1978819"/>
+            <a:ext cx="3402003" cy="260747"/>
+          </a:xfrm>
+          <a:prstGeom prst="rect">
+            <a:avLst/>
+          </a:prstGeom>
+          <a:noFill/>
+          <a:ln/>
+        </p:spPr>
+        <p:txBody>
+          <a:bodyPr wrap="square" lIns="0" tIns="0" rIns="0" bIns="0" rtlCol="0" anchor="t"/>
+          <a:lstStyle/>
+          <a:p>
+            <a:pPr algn="l" indent="0" marL="0">
+              <a:lnSpc>
+                <a:spcPts val="2053"/>
+              </a:lnSpc>
+              <a:buNone/>
+            </a:pPr>
+            <a:r>
+              <a:rPr lang="en-US" sz="1466" dirty="0">
+                <a:solidFill>
+                  <a:srgbClr val="2E2C26"/>
+                </a:solidFill>
+                <a:latin typeface="Inter" pitchFamily="34" charset="0"/>
+                <a:ea typeface="Inter" pitchFamily="34" charset="-122"/>
+                <a:cs typeface="Inter" pitchFamily="34" charset="-120"/>
+              </a:rPr>
+              <a:t>DECISION TWO</a:t>
+            </a:r>
+            <a:endParaRPr lang="en-US" sz="1466" dirty="0"/>
+          </a:p>
+        </p:txBody>
+      </p:sp>
+      <p:sp>
+        <p:nvSpPr>
+          <p:cNvPr id="12" name="Text 10"/>
+          <p:cNvSpPr/>
+          <p:nvPr/>
+        </p:nvSpPr>
+        <p:spPr>
+          <a:xfrm>
+            <a:off x="4426827" y="2341166"/>
+            <a:ext cx="3402003" cy="352028"/>
+          </a:xfrm>
+          <a:prstGeom prst="rect">
+            <a:avLst/>
+          </a:prstGeom>
+          <a:noFill/>
+          <a:ln/>
+        </p:spPr>
+        <p:txBody>
+          <a:bodyPr wrap="square" lIns="0" tIns="0" rIns="0" bIns="0" rtlCol="0" anchor="t"/>
+          <a:lstStyle/>
+          <a:p>
+            <a:pPr algn="l" indent="0" marL="0">
+              <a:lnSpc>
+                <a:spcPts val="2773"/>
+              </a:lnSpc>
+              <a:spcBef>
+                <a:spcPts val="800"/>
+              </a:spcBef>
+              <a:buNone/>
+            </a:pPr>
+            <a:r>
+              <a:rPr lang="en-US" sz="2133" b="1" dirty="0">
+                <a:solidFill>
+                  <a:srgbClr val="1C1B17"/>
+                </a:solidFill>
+                <a:latin typeface="Playfair Display" pitchFamily="34" charset="0"/>
+                <a:ea typeface="Playfair Display" pitchFamily="34" charset="-122"/>
+                <a:cs typeface="Playfair Display" pitchFamily="34" charset="-120"/>
+              </a:rPr>
+              <a:t>What the deadline is</a:t>
+            </a:r>
+            <a:endParaRPr lang="en-US" sz="2133" dirty="0"/>
+          </a:p>
+        </p:txBody>
+      </p:sp>
+      <p:sp>
+        <p:nvSpPr>
+          <p:cNvPr id="13" name="Text 11"/>
+          <p:cNvSpPr/>
+          <p:nvPr/>
+        </p:nvSpPr>
+        <p:spPr>
+          <a:xfrm>
+            <a:off x="4426827" y="2693194"/>
+            <a:ext cx="3402003" cy="2209800"/>
+          </a:xfrm>
+          <a:prstGeom prst="rect">
+            <a:avLst/>
+          </a:prstGeom>
+          <a:noFill/>
+          <a:ln/>
+        </p:spPr>
+        <p:txBody>
+          <a:bodyPr wrap="square" lIns="0" tIns="0" rIns="0" bIns="0" rtlCol="0" anchor="t"/>
+          <a:lstStyle/>
+          <a:p>
+            <a:pPr algn="l" indent="0" marL="0">
+              <a:lnSpc>
+                <a:spcPts val="2900"/>
+              </a:lnSpc>
+              <a:buNone/>
+            </a:pPr>
+            <a:r>
+              <a:rPr lang="en-US" sz="2000" dirty="0">
+                <a:solidFill>
+                  <a:srgbClr val="2E2C26"/>
+                </a:solidFill>
+                <a:latin typeface="Noto Serif" pitchFamily="34" charset="0"/>
+                <a:ea typeface="Noto Serif" pitchFamily="34" charset="-122"/>
+                <a:cs typeface="Noto Serif" pitchFamily="34" charset="-120"/>
+              </a:rPr>
+              <a:t>How many working days from resolution to a filed review? And who is</a:t>
+            </a:r>
+            <a:endParaRPr lang="en-US" sz="2000" dirty="0"/>
+          </a:p>
+          <a:p>
+            <a:pPr algn="l" indent="0" marL="0">
+              <a:lnSpc>
+                <a:spcPts val="2900"/>
+              </a:lnSpc>
+              <a:buNone/>
+            </a:pPr>
+            <a:r>
+              <a:rPr lang="en-US" sz="2000" dirty="0">
+                <a:solidFill>
+                  <a:srgbClr val="2E2C26"/>
+                </a:solidFill>
+                <a:latin typeface="Noto Serif" pitchFamily="34" charset="0"/>
+                <a:ea typeface="Noto Serif" pitchFamily="34" charset="-122"/>
+                <a:cs typeface="Noto Serif" pitchFamily="34" charset="-120"/>
+              </a:rPr>
+              <a:t>      allowed to say it slips, to whom, and on what record?</a:t>
+            </a:r>
+            <a:endParaRPr lang="en-US" sz="2000" dirty="0"/>
+          </a:p>
+        </p:txBody>
+      </p:sp>
+      <p:sp>
+        <p:nvSpPr>
+          <p:cNvPr id="14" name="Text 12"/>
+          <p:cNvSpPr/>
+          <p:nvPr/>
+        </p:nvSpPr>
+        <p:spPr>
+          <a:xfrm>
+            <a:off x="8032924" y="1978819"/>
+            <a:ext cx="8332" cy="2971205"/>
+          </a:xfrm>
+          <a:prstGeom prst="rect">
+            <a:avLst/>
+          </a:prstGeom>
+          <a:solidFill>
+            <a:srgbClr val="1C1B17"/>
+          </a:solidFill>
+          <a:ln/>
+        </p:spPr>
+        <p:txBody>
+          <a:bodyPr wrap="square" rtlCol="0" anchor="ctr"/>
+          <a:lstStyle/>
+          <a:p>
+            <a:pPr indent="0" marL="0">
+              <a:buNone/>
+            </a:pPr>
+            <a:endParaRPr lang="en-US" dirty="0"/>
+          </a:p>
+        </p:txBody>
+      </p:sp>
+      <p:sp>
+        <p:nvSpPr>
+          <p:cNvPr id="15" name="Text 13"/>
+          <p:cNvSpPr/>
+          <p:nvPr/>
+        </p:nvSpPr>
+        <p:spPr>
+          <a:xfrm>
+            <a:off x="8312056" y="1978819"/>
+            <a:ext cx="3402003" cy="260747"/>
+          </a:xfrm>
+          <a:prstGeom prst="rect">
+            <a:avLst/>
+          </a:prstGeom>
+          <a:noFill/>
+          <a:ln/>
+        </p:spPr>
+        <p:txBody>
+          <a:bodyPr wrap="square" lIns="0" tIns="0" rIns="0" bIns="0" rtlCol="0" anchor="t"/>
+          <a:lstStyle/>
+          <a:p>
+            <a:pPr algn="l" indent="0" marL="0">
+              <a:lnSpc>
+                <a:spcPts val="2053"/>
+              </a:lnSpc>
+              <a:buNone/>
+            </a:pPr>
+            <a:r>
+              <a:rPr lang="en-US" sz="1466" dirty="0">
+                <a:solidFill>
+                  <a:srgbClr val="2E2C26"/>
+                </a:solidFill>
+                <a:latin typeface="Inter" pitchFamily="34" charset="0"/>
+                <a:ea typeface="Inter" pitchFamily="34" charset="-122"/>
+                <a:cs typeface="Inter" pitchFamily="34" charset="-120"/>
+              </a:rPr>
+              <a:t>DECISION THREE</a:t>
+            </a:r>
+            <a:endParaRPr lang="en-US" sz="1466" dirty="0"/>
+          </a:p>
+        </p:txBody>
+      </p:sp>
+      <p:sp>
+        <p:nvSpPr>
+          <p:cNvPr id="16" name="Text 14"/>
+          <p:cNvSpPr/>
+          <p:nvPr/>
+        </p:nvSpPr>
+        <p:spPr>
+          <a:xfrm>
+            <a:off x="8312056" y="2341166"/>
+            <a:ext cx="3402003" cy="352028"/>
+          </a:xfrm>
+          <a:prstGeom prst="rect">
+            <a:avLst/>
+          </a:prstGeom>
+          <a:noFill/>
+          <a:ln/>
+        </p:spPr>
+        <p:txBody>
+          <a:bodyPr wrap="square" lIns="0" tIns="0" rIns="0" bIns="0" rtlCol="0" anchor="t"/>
+          <a:lstStyle/>
+          <a:p>
+            <a:pPr algn="l" indent="0" marL="0">
+              <a:lnSpc>
+                <a:spcPts val="2773"/>
+              </a:lnSpc>
+              <a:spcBef>
+                <a:spcPts val="800"/>
+              </a:spcBef>
+              <a:buNone/>
+            </a:pPr>
+            <a:r>
+              <a:rPr lang="en-US" sz="2133" b="1" dirty="0">
+                <a:solidFill>
+                  <a:srgbClr val="1C1B17"/>
+                </a:solidFill>
+                <a:latin typeface="Playfair Display" pitchFamily="34" charset="0"/>
+                <a:ea typeface="Playfair Display" pitchFamily="34" charset="-122"/>
+                <a:cs typeface="Playfair Display" pitchFamily="34" charset="-120"/>
+              </a:rPr>
+              <a:t>When items are not done</a:t>
+            </a:r>
+            <a:endParaRPr lang="en-US" sz="2133" dirty="0"/>
+          </a:p>
+        </p:txBody>
+      </p:sp>
+      <p:sp>
+        <p:nvSpPr>
+          <p:cNvPr id="17" name="Text 15"/>
+          <p:cNvSpPr/>
+          <p:nvPr/>
+        </p:nvSpPr>
+        <p:spPr>
+          <a:xfrm>
+            <a:off x="8312056" y="2693194"/>
+            <a:ext cx="3402003" cy="1841500"/>
+          </a:xfrm>
+          <a:prstGeom prst="rect">
+            <a:avLst/>
+          </a:prstGeom>
+          <a:noFill/>
+          <a:ln/>
+        </p:spPr>
+        <p:txBody>
+          <a:bodyPr wrap="square" lIns="0" tIns="0" rIns="0" bIns="0" rtlCol="0" anchor="t"/>
+          <a:lstStyle/>
+          <a:p>
+            <a:pPr algn="l" indent="0" marL="0">
+              <a:lnSpc>
+                <a:spcPts val="2900"/>
+              </a:lnSpc>
+              <a:buNone/>
+            </a:pPr>
+            <a:r>
+              <a:rPr lang="en-US" sz="2000" dirty="0">
+                <a:solidFill>
+                  <a:srgbClr val="2E2C26"/>
+                </a:solidFill>
+                <a:latin typeface="Noto Serif" pitchFamily="34" charset="0"/>
+                <a:ea typeface="Noto Serif" pitchFamily="34" charset="-122"/>
+                <a:cs typeface="Noto Serif" pitchFamily="34" charset="-120"/>
+              </a:rPr>
+              <a:t>What happens on the date? “Nothing” is a permitted answer.</a:t>
+            </a:r>
+            <a:endParaRPr lang="en-US" sz="2000" dirty="0"/>
+          </a:p>
+          <a:p>
+            <a:pPr algn="l" indent="0" marL="0">
+              <a:lnSpc>
+                <a:spcPts val="2900"/>
+              </a:lnSpc>
+              <a:buNone/>
+            </a:pPr>
+            <a:r>
+              <a:rPr lang="en-US" sz="2000" dirty="0">
+                <a:solidFill>
+                  <a:srgbClr val="2E2C26"/>
+                </a:solidFill>
+                <a:latin typeface="Noto Serif" pitchFamily="34" charset="0"/>
+                <a:ea typeface="Noto Serif" pitchFamily="34" charset="-122"/>
+                <a:cs typeface="Noto Serif" pitchFamily="34" charset="-120"/>
+              </a:rPr>
+              <a:t>      It only has to be the answer we chose out loud, before the date.</a:t>
+            </a:r>
+            <a:endParaRPr lang="en-US" sz="2000" dirty="0"/>
+          </a:p>
+        </p:txBody>
+      </p:sp>
+      <p:sp>
+        <p:nvSpPr>
+          <p:cNvPr id="18" name="Text 16"/>
+          <p:cNvSpPr/>
+          <p:nvPr/>
+        </p:nvSpPr>
+        <p:spPr>
+          <a:xfrm>
+            <a:off x="541599" y="5153223"/>
+            <a:ext cx="11105754" cy="33734"/>
+          </a:xfrm>
+          <a:prstGeom prst="rect">
+            <a:avLst/>
+          </a:prstGeom>
+          <a:solidFill>
+            <a:srgbClr val="A8231B"/>
+          </a:solidFill>
+          <a:ln/>
+        </p:spPr>
+        <p:txBody>
+          <a:bodyPr wrap="square" rtlCol="0" anchor="ctr"/>
+          <a:lstStyle/>
+          <a:p>
+            <a:pPr indent="0" marL="0">
+              <a:buNone/>
+            </a:pPr>
+            <a:endParaRPr lang="en-US" dirty="0"/>
+          </a:p>
+        </p:txBody>
+      </p:sp>
+      <p:sp>
+        <p:nvSpPr>
+          <p:cNvPr id="19" name="Text 17"/>
+          <p:cNvSpPr/>
+          <p:nvPr/>
+        </p:nvSpPr>
+        <p:spPr>
+          <a:xfrm>
+            <a:off x="541599" y="5356225"/>
+            <a:ext cx="11327869" cy="403027"/>
+          </a:xfrm>
+          <a:prstGeom prst="rect">
+            <a:avLst/>
+          </a:prstGeom>
+          <a:noFill/>
+          <a:ln/>
+        </p:spPr>
+        <p:txBody>
+          <a:bodyPr wrap="square" lIns="0" tIns="0" rIns="0" bIns="0" rtlCol="0" anchor="t"/>
+          <a:lstStyle/>
+          <a:p>
+            <a:pPr algn="l" indent="0" marL="0">
+              <a:lnSpc>
+                <a:spcPts val="3173"/>
+              </a:lnSpc>
+              <a:spcBef>
+                <a:spcPts val="1333"/>
+              </a:spcBef>
+              <a:buNone/>
+            </a:pPr>
+            <a:r>
+              <a:rPr lang="en-US" sz="2266" dirty="0">
+                <a:solidFill>
+                  <a:srgbClr val="1C1B17"/>
+                </a:solidFill>
+                <a:latin typeface="Playfair Display" pitchFamily="34" charset="0"/>
+                <a:ea typeface="Playfair Display" pitchFamily="34" charset="-122"/>
+                <a:cs typeface="Playfair Display" pitchFamily="34" charset="-120"/>
+              </a:rPr>
+              <a:t>Blameless costs three concessions. We pay them, or we stop using the word.</a:t>
+            </a:r>
+            <a:endParaRPr lang="en-US" sz="2266" dirty="0"/>
+          </a:p>
+        </p:txBody>
+      </p:sp>
+      <p:sp>
+        <p:nvSpPr>
+          <p:cNvPr id="20" name="Text 18"/>
+          <p:cNvSpPr/>
+          <p:nvPr/>
+        </p:nvSpPr>
+        <p:spPr>
+          <a:xfrm>
+            <a:off x="541599" y="5962452"/>
+            <a:ext cx="11105754" cy="8334"/>
+          </a:xfrm>
+          <a:prstGeom prst="rect">
+            <a:avLst/>
+          </a:prstGeom>
+          <a:solidFill>
+            <a:srgbClr val="1C1B17"/>
+          </a:solidFill>
+          <a:ln/>
+        </p:spPr>
+        <p:txBody>
+          <a:bodyPr wrap="square" rtlCol="0" anchor="ctr"/>
+          <a:lstStyle/>
+          <a:p>
+            <a:pPr indent="0" marL="0">
+              <a:buNone/>
+            </a:pPr>
+            <a:endParaRPr lang="en-US" dirty="0"/>
+          </a:p>
+        </p:txBody>
+      </p:sp>
+      <p:sp>
+        <p:nvSpPr>
+          <p:cNvPr id="21" name="Text 19"/>
+          <p:cNvSpPr/>
+          <p:nvPr/>
+        </p:nvSpPr>
+        <p:spPr>
+          <a:xfrm>
+            <a:off x="541599" y="6089253"/>
+            <a:ext cx="8140970" cy="260747"/>
+          </a:xfrm>
+          <a:prstGeom prst="rect">
+            <a:avLst/>
+          </a:prstGeom>
+          <a:noFill/>
+          <a:ln/>
+        </p:spPr>
+        <p:txBody>
+          <a:bodyPr wrap="square" lIns="0" tIns="0" rIns="0" bIns="0" rtlCol="0" anchor="t"/>
+          <a:lstStyle/>
+          <a:p>
+            <a:pPr algn="l" indent="0" marL="0">
+              <a:lnSpc>
+                <a:spcPts val="2053"/>
+              </a:lnSpc>
+              <a:buNone/>
+            </a:pPr>
+            <a:r>
+              <a:rPr lang="en-US" sz="1466" dirty="0">
+                <a:solidFill>
+                  <a:srgbClr val="2E2C26"/>
+                </a:solidFill>
+                <a:latin typeface="Inter" pitchFamily="34" charset="0"/>
+                <a:ea typeface="Inter" pitchFamily="34" charset="-122"/>
+                <a:cs typeface="Inter" pitchFamily="34" charset="-120"/>
+              </a:rPr>
+              <a:t>SOURCE — NONE. EVERY CLAIM HERE IS MECHANICAL, NOT MEASURED.</a:t>
+            </a:r>
+            <a:endParaRPr lang="en-US" sz="1466" dirty="0"/>
+          </a:p>
+        </p:txBody>
+      </p:sp>
+      <p:sp>
+        <p:nvSpPr>
+          <p:cNvPr id="22" name="Text 20"/>
+          <p:cNvSpPr/>
+          <p:nvPr/>
+        </p:nvSpPr>
+        <p:spPr>
+          <a:xfrm>
+            <a:off x="9598006" y="6089253"/>
+            <a:ext cx="2090334" cy="260747"/>
+          </a:xfrm>
+          <a:prstGeom prst="rect">
+            <a:avLst/>
+          </a:prstGeom>
+          <a:noFill/>
+          <a:ln/>
+        </p:spPr>
+        <p:txBody>
+          <a:bodyPr wrap="square" lIns="0" tIns="0" rIns="0" bIns="0" rtlCol="0" anchor="t"/>
+          <a:lstStyle/>
+          <a:p>
+            <a:pPr algn="l" indent="0" marL="0">
+              <a:lnSpc>
+                <a:spcPts val="2053"/>
+              </a:lnSpc>
+              <a:buNone/>
+            </a:pPr>
+            <a:r>
+              <a:rPr lang="en-US" sz="1466" dirty="0">
+                <a:solidFill>
+                  <a:srgbClr val="2E2C26"/>
+                </a:solidFill>
+                <a:latin typeface="Inter" pitchFamily="34" charset="0"/>
+                <a:ea typeface="Inter" pitchFamily="34" charset="-122"/>
+                <a:cs typeface="Inter" pitchFamily="34" charset="-120"/>
+              </a:rPr>
+              <a:t>POSTMORTEM · 06</a:t>
+            </a:r>
+            <a:endParaRPr lang="en-US" sz="1466" dirty="0"/>
+          </a:p>
+        </p:txBody>
+      </p:sp>
     </p:spTree>
   </p:cSld>
   <p:clrMapOvr>

--- a/decks/postmortem/postmortem.pptx
+++ b/decks/postmortem/postmortem.pptx
@@ -1338,7 +1338,7 @@
           <a:ln/>
         </p:spPr>
         <p:txBody>
-          <a:bodyPr wrap="square" lIns="0" tIns="0" rIns="0" bIns="0" rtlCol="0" anchor="t"/>
+          <a:bodyPr wrap="none" lIns="0" tIns="0" rIns="0" bIns="0" rtlCol="0" anchor="t"/>
           <a:lstStyle/>
           <a:p>
             <a:pPr algn="l" indent="0" marL="0">
@@ -1380,7 +1380,7 @@
           <a:ln/>
         </p:spPr>
         <p:txBody>
-          <a:bodyPr wrap="square" lIns="0" tIns="0" rIns="0" bIns="0" rtlCol="0" anchor="t"/>
+          <a:bodyPr wrap="none" lIns="0" tIns="0" rIns="0" bIns="0" rtlCol="0" anchor="t"/>
           <a:lstStyle/>
           <a:p>
             <a:pPr algn="l" indent="0" marL="0">
@@ -1452,7 +1452,7 @@
           <a:ln/>
         </p:spPr>
         <p:txBody>
-          <a:bodyPr wrap="square" lIns="0" tIns="0" rIns="0" bIns="0" rtlCol="0" anchor="t"/>
+          <a:bodyPr wrap="none" lIns="0" tIns="0" rIns="0" bIns="0" rtlCol="0" anchor="t"/>
           <a:lstStyle/>
           <a:p>
             <a:pPr algn="l" indent="0" marL="0">
@@ -1527,7 +1527,7 @@
           <a:ln/>
         </p:spPr>
         <p:txBody>
-          <a:bodyPr wrap="square" lIns="0" tIns="0" rIns="0" bIns="0" rtlCol="0" anchor="t"/>
+          <a:bodyPr wrap="none" lIns="0" tIns="0" rIns="0" bIns="0" rtlCol="0" anchor="t"/>
           <a:lstStyle/>
           <a:p>
             <a:pPr algn="l" indent="0" marL="0">
@@ -1569,7 +1569,7 @@
           <a:ln/>
         </p:spPr>
         <p:txBody>
-          <a:bodyPr wrap="square" lIns="0" tIns="0" rIns="0" bIns="0" rtlCol="0" anchor="t"/>
+          <a:bodyPr wrap="none" lIns="0" tIns="0" rIns="0" bIns="0" rtlCol="0" anchor="t"/>
           <a:lstStyle/>
           <a:p>
             <a:pPr algn="l" indent="0" marL="0">
@@ -1641,7 +1641,9 @@
           <a:ln/>
         </p:spPr>
         <p:txBody>
-          <a:bodyPr wrap="square" lIns="0" tIns="0" rIns="0" bIns="0" rtlCol="0" anchor="t"/>
+          <a:bodyPr wrap="square" lIns="0" tIns="0" rIns="0" bIns="0" rtlCol="0" anchor="t">
+            <a:normAutofit/>
+          </a:bodyPr>
           <a:lstStyle/>
           <a:p>
             <a:pPr algn="l" indent="0" marL="0">
@@ -1679,7 +1681,7 @@
                 <a:ea typeface="Playfair Display" pitchFamily="34" charset="-122"/>
                 <a:cs typeface="Playfair Display" pitchFamily="34" charset="-120"/>
               </a:rPr>
-              <a:t>      concessions an organisation has to make, and mostly does not. What follows is what they</a:t>
+              <a:t>concessions an organisation has to make, and mostly does not. What follows is what they</a:t>
             </a:r>
             <a:endParaRPr lang="en-US" sz="2266" dirty="0"/>
           </a:p>
@@ -1699,7 +1701,7 @@
                 <a:ea typeface="Playfair Display" pitchFamily="34" charset="-122"/>
                 <a:cs typeface="Playfair Display" pitchFamily="34" charset="-120"/>
               </a:rPr>
-              <a:t>      cost, and who has to pay.</a:t>
+              <a:t>cost, and who has to pay.</a:t>
             </a:r>
             <a:endParaRPr lang="en-US" sz="2266" dirty="0"/>
           </a:p>
@@ -1753,7 +1755,7 @@
           <a:ln/>
         </p:spPr>
         <p:txBody>
-          <a:bodyPr wrap="square" lIns="0" tIns="0" rIns="0" bIns="0" rtlCol="0" anchor="t"/>
+          <a:bodyPr wrap="none" lIns="0" tIns="0" rIns="0" bIns="0" rtlCol="0" anchor="t"/>
           <a:lstStyle/>
           <a:p>
             <a:pPr algn="l" indent="0" marL="0">
@@ -1795,7 +1797,7 @@
           <a:ln/>
         </p:spPr>
         <p:txBody>
-          <a:bodyPr wrap="square" lIns="0" tIns="0" rIns="0" bIns="0" rtlCol="0" anchor="t"/>
+          <a:bodyPr wrap="none" lIns="0" tIns="0" rIns="0" bIns="0" rtlCol="0" anchor="t"/>
           <a:lstStyle/>
           <a:p>
             <a:pPr algn="l" indent="0" marL="0">
@@ -1870,7 +1872,9 @@
           <a:ln/>
         </p:spPr>
         <p:txBody>
-          <a:bodyPr wrap="square" lIns="0" tIns="0" rIns="0" bIns="0" rtlCol="0" anchor="t"/>
+          <a:bodyPr wrap="square" lIns="0" tIns="0" rIns="0" bIns="0" rtlCol="0" anchor="t">
+            <a:normAutofit/>
+          </a:bodyPr>
           <a:lstStyle/>
           <a:p>
             <a:pPr algn="l" indent="0" marL="0">
@@ -1959,7 +1963,7 @@
           <a:ln/>
         </p:spPr>
         <p:txBody>
-          <a:bodyPr wrap="square" lIns="0" tIns="0" rIns="0" bIns="0" rtlCol="0" anchor="t"/>
+          <a:bodyPr wrap="none" lIns="0" tIns="0" rIns="0" bIns="0" rtlCol="0" anchor="t"/>
           <a:lstStyle/>
           <a:p>
             <a:pPr algn="l" indent="0" marL="0">
@@ -2001,7 +2005,7 @@
           <a:ln/>
         </p:spPr>
         <p:txBody>
-          <a:bodyPr wrap="square" lIns="0" tIns="0" rIns="0" bIns="0" rtlCol="0" anchor="t"/>
+          <a:bodyPr wrap="none" lIns="0" tIns="0" rIns="0" bIns="0" rtlCol="0" anchor="t"/>
           <a:lstStyle/>
           <a:p>
             <a:pPr algn="l" indent="0" marL="0">
@@ -2075,7 +2079,7 @@
           <a:ln/>
         </p:spPr>
         <p:txBody>
-          <a:bodyPr wrap="square" lIns="0" tIns="0" rIns="0" bIns="0" rtlCol="0" anchor="t"/>
+          <a:bodyPr wrap="none" lIns="0" tIns="0" rIns="0" bIns="0" rtlCol="0" anchor="t"/>
           <a:lstStyle/>
           <a:p>
             <a:pPr algn="l" indent="0" marL="0">
@@ -2117,7 +2121,7 @@
           <a:ln/>
         </p:spPr>
         <p:txBody>
-          <a:bodyPr wrap="square" lIns="0" tIns="0" rIns="0" bIns="0" rtlCol="0" anchor="t"/>
+          <a:bodyPr wrap="none" lIns="0" tIns="0" rIns="0" bIns="0" rtlCol="0" anchor="t"/>
           <a:lstStyle/>
           <a:p>
             <a:pPr algn="l" indent="0" marL="0">
@@ -2189,7 +2193,7 @@
           <a:ln/>
         </p:spPr>
         <p:txBody>
-          <a:bodyPr wrap="square" lIns="0" tIns="0" rIns="0" bIns="0" rtlCol="0" anchor="t"/>
+          <a:bodyPr wrap="none" lIns="0" tIns="0" rIns="0" bIns="0" rtlCol="0" anchor="t"/>
           <a:lstStyle/>
           <a:p>
             <a:pPr algn="l" indent="0" marL="0">
@@ -2261,7 +2265,7 @@
           <a:ln/>
         </p:spPr>
         <p:txBody>
-          <a:bodyPr wrap="square" lIns="0" tIns="0" rIns="0" bIns="0" rtlCol="0" anchor="t"/>
+          <a:bodyPr wrap="none" lIns="0" tIns="0" rIns="0" bIns="0" rtlCol="0" anchor="t"/>
           <a:lstStyle/>
           <a:p>
             <a:pPr algn="l" indent="0" marL="0">
@@ -2348,7 +2352,9 @@
           <a:ln/>
         </p:spPr>
         <p:txBody>
-          <a:bodyPr wrap="square" lIns="0" tIns="0" rIns="0" bIns="0" rtlCol="0" anchor="t"/>
+          <a:bodyPr wrap="square" lIns="0" tIns="0" rIns="0" bIns="0" rtlCol="0" anchor="t">
+            <a:normAutofit/>
+          </a:bodyPr>
           <a:lstStyle/>
           <a:p>
             <a:pPr algn="l" indent="0" marL="0">
@@ -2386,7 +2392,7 @@
                 <a:ea typeface="Noto Serif" pitchFamily="34" charset="-122"/>
                 <a:cs typeface="Noto Serif" pitchFamily="34" charset="-120"/>
               </a:rPr>
-              <a:t>      a default, a removed foot-gun. If nothing outside the document changes, the hour bought</a:t>
+              <a:t>a default, a removed foot-gun. If nothing outside the document changes, the hour bought</a:t>
             </a:r>
             <a:endParaRPr lang="en-US" sz="2000" dirty="0"/>
           </a:p>
@@ -2406,7 +2412,7 @@
                 <a:ea typeface="Noto Serif" pitchFamily="34" charset="-122"/>
                 <a:cs typeface="Noto Serif" pitchFamily="34" charset="-120"/>
               </a:rPr>
-              <a:t>      a document.</a:t>
+              <a:t>a document.</a:t>
             </a:r>
             <a:endParaRPr lang="en-US" sz="2000" dirty="0"/>
           </a:p>
@@ -2460,7 +2466,7 @@
           <a:ln/>
         </p:spPr>
         <p:txBody>
-          <a:bodyPr wrap="square" lIns="0" tIns="0" rIns="0" bIns="0" rtlCol="0" anchor="t"/>
+          <a:bodyPr wrap="none" lIns="0" tIns="0" rIns="0" bIns="0" rtlCol="0" anchor="t"/>
           <a:lstStyle/>
           <a:p>
             <a:pPr algn="l" indent="0" marL="0">
@@ -2502,7 +2508,9 @@
           <a:ln/>
         </p:spPr>
         <p:txBody>
-          <a:bodyPr wrap="square" lIns="0" tIns="0" rIns="0" bIns="0" rtlCol="0" anchor="t"/>
+          <a:bodyPr wrap="square" lIns="0" tIns="0" rIns="0" bIns="0" rtlCol="0" anchor="t">
+            <a:normAutofit/>
+          </a:bodyPr>
           <a:lstStyle/>
           <a:p>
             <a:pPr algn="l" indent="0" marL="0">
@@ -2547,7 +2555,9 @@
           <a:ln/>
         </p:spPr>
         <p:txBody>
-          <a:bodyPr wrap="square" lIns="0" tIns="0" rIns="0" bIns="0" rtlCol="0" anchor="t"/>
+          <a:bodyPr wrap="square" lIns="0" tIns="0" rIns="0" bIns="0" rtlCol="0" anchor="t">
+            <a:normAutofit/>
+          </a:bodyPr>
           <a:lstStyle/>
           <a:p>
             <a:pPr algn="l" indent="0" marL="0">
@@ -2585,7 +2595,7 @@
                 <a:ea typeface="Noto Serif" pitchFamily="34" charset="-122"/>
                 <a:cs typeface="Noto Serif" pitchFamily="34" charset="-120"/>
               </a:rPr>
-              <a:t>      ticket. It ends the search at the first human in the chain, which is never where the</a:t>
+              <a:t>ticket. It ends the search at the first human in the chain, which is never where the</a:t>
             </a:r>
             <a:endParaRPr lang="en-US" sz="2000" dirty="0"/>
           </a:p>
@@ -2605,7 +2615,7 @@
                 <a:ea typeface="Noto Serif" pitchFamily="34" charset="-122"/>
                 <a:cs typeface="Noto Serif" pitchFamily="34" charset="-120"/>
               </a:rPr>
-              <a:t>      chain ends.</a:t>
+              <a:t>chain ends.</a:t>
             </a:r>
             <a:endParaRPr lang="en-US" sz="2000" dirty="0"/>
           </a:p>
@@ -2659,7 +2669,7 @@
           <a:ln/>
         </p:spPr>
         <p:txBody>
-          <a:bodyPr wrap="square" lIns="0" tIns="0" rIns="0" bIns="0" rtlCol="0" anchor="t"/>
+          <a:bodyPr wrap="none" lIns="0" tIns="0" rIns="0" bIns="0" rtlCol="0" anchor="t"/>
           <a:lstStyle/>
           <a:p>
             <a:pPr algn="l" indent="0" marL="0">
@@ -2746,7 +2756,9 @@
           <a:ln/>
         </p:spPr>
         <p:txBody>
-          <a:bodyPr wrap="square" lIns="0" tIns="0" rIns="0" bIns="0" rtlCol="0" anchor="t"/>
+          <a:bodyPr wrap="square" lIns="0" tIns="0" rIns="0" bIns="0" rtlCol="0" anchor="t">
+            <a:normAutofit/>
+          </a:bodyPr>
           <a:lstStyle/>
           <a:p>
             <a:pPr algn="l" indent="0" marL="0">
@@ -2784,7 +2796,7 @@
                 <a:ea typeface="Noto Serif" pitchFamily="34" charset="-122"/>
                 <a:cs typeface="Noto Serif" pitchFamily="34" charset="-120"/>
               </a:rPr>
-              <a:t>      assurance that someone now knows better. That is not a control; it leaves with the</a:t>
+              <a:t>assurance that someone now knows better. That is not a control; it leaves with the</a:t>
             </a:r>
             <a:endParaRPr lang="en-US" sz="2000" dirty="0"/>
           </a:p>
@@ -2804,7 +2816,7 @@
                 <a:ea typeface="Noto Serif" pitchFamily="34" charset="-122"/>
                 <a:cs typeface="Noto Serif" pitchFamily="34" charset="-120"/>
               </a:rPr>
-              <a:t>      person.</a:t>
+              <a:t>person.</a:t>
             </a:r>
             <a:endParaRPr lang="en-US" sz="2000" dirty="0"/>
           </a:p>
@@ -2858,7 +2870,7 @@
           <a:ln/>
         </p:spPr>
         <p:txBody>
-          <a:bodyPr wrap="square" lIns="0" tIns="0" rIns="0" bIns="0" rtlCol="0" anchor="t"/>
+          <a:bodyPr wrap="none" lIns="0" tIns="0" rIns="0" bIns="0" rtlCol="0" anchor="t"/>
           <a:lstStyle/>
           <a:p>
             <a:pPr algn="l" indent="0" marL="0">
@@ -2900,7 +2912,7 @@
           <a:ln/>
         </p:spPr>
         <p:txBody>
-          <a:bodyPr wrap="square" lIns="0" tIns="0" rIns="0" bIns="0" rtlCol="0" anchor="t"/>
+          <a:bodyPr wrap="none" lIns="0" tIns="0" rIns="0" bIns="0" rtlCol="0" anchor="t"/>
           <a:lstStyle/>
           <a:p>
             <a:pPr algn="l" indent="0" marL="0">
@@ -2974,7 +2986,7 @@
           <a:ln/>
         </p:spPr>
         <p:txBody>
-          <a:bodyPr wrap="square" lIns="0" tIns="0" rIns="0" bIns="0" rtlCol="0" anchor="t"/>
+          <a:bodyPr wrap="none" lIns="0" tIns="0" rIns="0" bIns="0" rtlCol="0" anchor="t"/>
           <a:lstStyle/>
           <a:p>
             <a:pPr algn="l" indent="0" marL="0">
@@ -3016,7 +3028,7 @@
           <a:ln/>
         </p:spPr>
         <p:txBody>
-          <a:bodyPr wrap="square" lIns="0" tIns="0" rIns="0" bIns="0" rtlCol="0" anchor="t"/>
+          <a:bodyPr wrap="none" lIns="0" tIns="0" rIns="0" bIns="0" rtlCol="0" anchor="t"/>
           <a:lstStyle/>
           <a:p>
             <a:pPr algn="l" indent="0" marL="0">
@@ -3088,7 +3100,7 @@
           <a:ln/>
         </p:spPr>
         <p:txBody>
-          <a:bodyPr wrap="square" lIns="0" tIns="0" rIns="0" bIns="0" rtlCol="0" anchor="t"/>
+          <a:bodyPr wrap="none" lIns="0" tIns="0" rIns="0" bIns="0" rtlCol="0" anchor="t"/>
           <a:lstStyle/>
           <a:p>
             <a:pPr algn="l" indent="0" marL="0">
@@ -3160,7 +3172,7 @@
           <a:ln/>
         </p:spPr>
         <p:txBody>
-          <a:bodyPr wrap="square" lIns="0" tIns="0" rIns="0" bIns="0" rtlCol="0" anchor="t"/>
+          <a:bodyPr wrap="none" lIns="0" tIns="0" rIns="0" bIns="0" rtlCol="0" anchor="t"/>
           <a:lstStyle/>
           <a:p>
             <a:pPr algn="l" indent="0" marL="0">
@@ -3247,7 +3259,9 @@
           <a:ln/>
         </p:spPr>
         <p:txBody>
-          <a:bodyPr wrap="square" lIns="0" tIns="0" rIns="0" bIns="0" rtlCol="0" anchor="t"/>
+          <a:bodyPr wrap="square" lIns="0" tIns="0" rIns="0" bIns="0" rtlCol="0" anchor="t">
+            <a:normAutofit/>
+          </a:bodyPr>
           <a:lstStyle/>
           <a:p>
             <a:pPr algn="l" indent="0" marL="0">
@@ -3285,7 +3299,7 @@
                 <a:ea typeface="Noto Serif" pitchFamily="34" charset="-122"/>
                 <a:cs typeface="Noto Serif" pitchFamily="34" charset="-120"/>
               </a:rPr>
-              <a:t>      where the system allowed it. The field takes conditions: what was reachable, what was</a:t>
+              <a:t>where the system allowed it. The field takes conditions: what was reachable, what was</a:t>
             </a:r>
             <a:endParaRPr lang="en-US" sz="2000" dirty="0"/>
           </a:p>
@@ -3305,7 +3319,7 @@
                 <a:ea typeface="Noto Serif" pitchFamily="34" charset="-122"/>
                 <a:cs typeface="Noto Serif" pitchFamily="34" charset="-120"/>
               </a:rPr>
-              <a:t>      open.</a:t>
+              <a:t>open.</a:t>
             </a:r>
             <a:endParaRPr lang="en-US" sz="2000" dirty="0"/>
           </a:p>
@@ -3359,7 +3373,7 @@
           <a:ln/>
         </p:spPr>
         <p:txBody>
-          <a:bodyPr wrap="square" lIns="0" tIns="0" rIns="0" bIns="0" rtlCol="0" anchor="t"/>
+          <a:bodyPr wrap="none" lIns="0" tIns="0" rIns="0" bIns="0" rtlCol="0" anchor="t"/>
           <a:lstStyle/>
           <a:p>
             <a:pPr algn="l" indent="0" marL="0">
@@ -3446,7 +3460,9 @@
           <a:ln/>
         </p:spPr>
         <p:txBody>
-          <a:bodyPr wrap="square" lIns="0" tIns="0" rIns="0" bIns="0" rtlCol="0" anchor="t"/>
+          <a:bodyPr wrap="square" lIns="0" tIns="0" rIns="0" bIns="0" rtlCol="0" anchor="t">
+            <a:normAutofit/>
+          </a:bodyPr>
           <a:lstStyle/>
           <a:p>
             <a:pPr algn="l" indent="0" marL="0">
@@ -3484,7 +3500,7 @@
                 <a:ea typeface="Noto Serif" pitchFamily="34" charset="-122"/>
                 <a:cs typeface="Noto Serif" pitchFamily="34" charset="-120"/>
               </a:rPr>
-              <a:t>      it, nobody is late, because nobody was ever due. Without both, it is a wish, not a</a:t>
+              <a:t>it, nobody is late, because nobody was ever due. Without both, it is a wish, not a</a:t>
             </a:r>
             <a:endParaRPr lang="en-US" sz="2000" dirty="0"/>
           </a:p>
@@ -3504,7 +3520,7 @@
                 <a:ea typeface="Noto Serif" pitchFamily="34" charset="-122"/>
                 <a:cs typeface="Noto Serif" pitchFamily="34" charset="-120"/>
               </a:rPr>
-              <a:t>      plan.</a:t>
+              <a:t>plan.</a:t>
             </a:r>
             <a:endParaRPr lang="en-US" sz="2000" dirty="0"/>
           </a:p>
@@ -3558,7 +3574,7 @@
           <a:ln/>
         </p:spPr>
         <p:txBody>
-          <a:bodyPr wrap="square" lIns="0" tIns="0" rIns="0" bIns="0" rtlCol="0" anchor="t"/>
+          <a:bodyPr wrap="none" lIns="0" tIns="0" rIns="0" bIns="0" rtlCol="0" anchor="t"/>
           <a:lstStyle/>
           <a:p>
             <a:pPr algn="l" indent="0" marL="0">
@@ -3645,7 +3661,9 @@
           <a:ln/>
         </p:spPr>
         <p:txBody>
-          <a:bodyPr wrap="square" lIns="0" tIns="0" rIns="0" bIns="0" rtlCol="0" anchor="t"/>
+          <a:bodyPr wrap="square" lIns="0" tIns="0" rIns="0" bIns="0" rtlCol="0" anchor="t">
+            <a:normAutofit/>
+          </a:bodyPr>
           <a:lstStyle/>
           <a:p>
             <a:pPr algn="l" indent="0" marL="0">
@@ -3683,7 +3701,7 @@
                 <a:ea typeface="Noto Serif" pitchFamily="34" charset="-122"/>
                 <a:cs typeface="Noto Serif" pitchFamily="34" charset="-120"/>
               </a:rPr>
-              <a:t>      old one again. It is evidence the first fix never landed: new review, new owner, new</a:t>
+              <a:t>old one again. It is evidence the first fix never landed: new review, new owner, new</a:t>
             </a:r>
             <a:endParaRPr lang="en-US" sz="2000" dirty="0"/>
           </a:p>
@@ -3703,7 +3721,7 @@
                 <a:ea typeface="Noto Serif" pitchFamily="34" charset="-122"/>
                 <a:cs typeface="Noto Serif" pitchFamily="34" charset="-120"/>
               </a:rPr>
-              <a:t>      date.</a:t>
+              <a:t>date.</a:t>
             </a:r>
             <a:endParaRPr lang="en-US" sz="2000" dirty="0"/>
           </a:p>
@@ -3757,7 +3775,7 @@
           <a:ln/>
         </p:spPr>
         <p:txBody>
-          <a:bodyPr wrap="square" lIns="0" tIns="0" rIns="0" bIns="0" rtlCol="0" anchor="t"/>
+          <a:bodyPr wrap="none" lIns="0" tIns="0" rIns="0" bIns="0" rtlCol="0" anchor="t"/>
           <a:lstStyle/>
           <a:p>
             <a:pPr algn="l" indent="0" marL="0">
@@ -3799,7 +3817,7 @@
           <a:ln/>
         </p:spPr>
         <p:txBody>
-          <a:bodyPr wrap="square" lIns="0" tIns="0" rIns="0" bIns="0" rtlCol="0" anchor="t"/>
+          <a:bodyPr wrap="none" lIns="0" tIns="0" rIns="0" bIns="0" rtlCol="0" anchor="t"/>
           <a:lstStyle/>
           <a:p>
             <a:pPr algn="l" indent="0" marL="0">
@@ -3873,7 +3891,7 @@
           <a:ln/>
         </p:spPr>
         <p:txBody>
-          <a:bodyPr wrap="square" lIns="0" tIns="0" rIns="0" bIns="0" rtlCol="0" anchor="t"/>
+          <a:bodyPr wrap="none" lIns="0" tIns="0" rIns="0" bIns="0" rtlCol="0" anchor="t"/>
           <a:lstStyle/>
           <a:p>
             <a:pPr algn="l" indent="0" marL="0">
@@ -3915,7 +3933,7 @@
           <a:ln/>
         </p:spPr>
         <p:txBody>
-          <a:bodyPr wrap="square" lIns="0" tIns="0" rIns="0" bIns="0" rtlCol="0" anchor="t"/>
+          <a:bodyPr wrap="none" lIns="0" tIns="0" rIns="0" bIns="0" rtlCol="0" anchor="t"/>
           <a:lstStyle/>
           <a:p>
             <a:pPr algn="l" indent="0" marL="0">
@@ -3987,7 +4005,7 @@
           <a:ln/>
         </p:spPr>
         <p:txBody>
-          <a:bodyPr wrap="square" lIns="0" tIns="0" rIns="0" bIns="0" rtlCol="0" anchor="t"/>
+          <a:bodyPr wrap="none" lIns="0" tIns="0" rIns="0" bIns="0" rtlCol="0" anchor="t"/>
           <a:lstStyle/>
           <a:p>
             <a:pPr algn="l" indent="0" marL="0">
@@ -4059,7 +4077,7 @@
           <a:ln/>
         </p:spPr>
         <p:txBody>
-          <a:bodyPr wrap="square" lIns="0" tIns="0" rIns="0" bIns="0" rtlCol="0" anchor="t"/>
+          <a:bodyPr wrap="none" lIns="0" tIns="0" rIns="0" bIns="0" rtlCol="0" anchor="t"/>
           <a:lstStyle/>
           <a:p>
             <a:pPr algn="l" indent="0" marL="0">
@@ -4146,7 +4164,9 @@
           <a:ln/>
         </p:spPr>
         <p:txBody>
-          <a:bodyPr wrap="square" lIns="0" tIns="0" rIns="0" bIns="0" rtlCol="0" anchor="t"/>
+          <a:bodyPr wrap="square" lIns="0" tIns="0" rIns="0" bIns="0" rtlCol="0" anchor="t">
+            <a:normAutofit/>
+          </a:bodyPr>
           <a:lstStyle/>
           <a:p>
             <a:pPr algn="l" indent="0" marL="0">
@@ -4184,7 +4204,7 @@
                 <a:ea typeface="Noto Serif" pitchFamily="34" charset="-122"/>
                 <a:cs typeface="Noto Serif" pitchFamily="34" charset="-120"/>
               </a:rPr>
-              <a:t>      lose by saying it. They are estimating what the transcript gets used for later, and the</a:t>
+              <a:t>lose by saying it. They are estimating what the transcript gets used for later, and the</a:t>
             </a:r>
             <a:endParaRPr lang="en-US" sz="2000" dirty="0"/>
           </a:p>
@@ -4204,7 +4224,7 @@
                 <a:ea typeface="Noto Serif" pitchFamily="34" charset="-122"/>
                 <a:cs typeface="Noto Serif" pitchFamily="34" charset="-120"/>
               </a:rPr>
-              <a:t>      estimate is usually right. Change the estimate, not the tone.</a:t>
+              <a:t>estimate is usually right. Change the estimate, not the tone.</a:t>
             </a:r>
             <a:endParaRPr lang="en-US" sz="2000" dirty="0"/>
           </a:p>
@@ -4258,7 +4278,7 @@
           <a:ln/>
         </p:spPr>
         <p:txBody>
-          <a:bodyPr wrap="square" lIns="0" tIns="0" rIns="0" bIns="0" rtlCol="0" anchor="t"/>
+          <a:bodyPr wrap="none" lIns="0" tIns="0" rIns="0" bIns="0" rtlCol="0" anchor="t"/>
           <a:lstStyle/>
           <a:p>
             <a:pPr algn="l" indent="0" marL="0">
@@ -4284,28 +4304,59 @@
       </p:sp>
       <p:sp>
         <p:nvSpPr>
-          <p:cNvPr id="12" name="Text 10"/>
-          <p:cNvSpPr/>
-          <p:nvPr/>
-        </p:nvSpPr>
-        <p:spPr>
-          <a:xfrm>
-            <a:off x="5313820" y="2374900"/>
-            <a:ext cx="6333533" cy="3341687"/>
-          </a:xfrm>
-          <a:prstGeom prst="rect">
-            <a:avLst/>
-          </a:prstGeom>
-          <a:noFill/>
-          <a:ln/>
-        </p:spPr>
-        <p:txBody>
-          <a:bodyPr wrap="square" lIns="0" tIns="0" rIns="0" bIns="0" rtlCol="0" anchor="t"/>
-          <a:lstStyle/>
-          <a:p>
-            <a:pPr algn="l" marL="342900" indent="-342900">
-              <a:buSzPct val="100000"/>
-              <a:buChar char="•"/>
+          <p:cNvPr id="12" name="Shape 10"/>
+          <p:cNvSpPr/>
+          <p:nvPr/>
+        </p:nvSpPr>
+        <p:spPr>
+          <a:xfrm>
+            <a:off x="5313820" y="2381250"/>
+            <a:ext cx="6333533" cy="0"/>
+          </a:xfrm>
+          <a:prstGeom prst="line">
+            <a:avLst/>
+          </a:prstGeom>
+          <a:noFill/>
+          <a:ln w="12698">
+            <a:solidFill>
+              <a:srgbClr val="1C1B17"/>
+            </a:solidFill>
+            <a:prstDash val="solid"/>
+          </a:ln>
+        </p:spPr>
+        <p:txBody>
+          <a:bodyPr/>
+          <a:p/>
+        </p:txBody>
+      </p:sp>
+      <p:sp>
+        <p:nvSpPr>
+          <p:cNvPr id="13" name="Text 11"/>
+          <p:cNvSpPr/>
+          <p:nvPr/>
+        </p:nvSpPr>
+        <p:spPr>
+          <a:xfrm>
+            <a:off x="5313820" y="2455267"/>
+            <a:ext cx="6460204" cy="687388"/>
+          </a:xfrm>
+          <a:prstGeom prst="rect">
+            <a:avLst/>
+          </a:prstGeom>
+          <a:noFill/>
+          <a:ln/>
+        </p:spPr>
+        <p:txBody>
+          <a:bodyPr wrap="square" lIns="0" tIns="0" rIns="0" bIns="0" rtlCol="0" anchor="t">
+            <a:normAutofit/>
+          </a:bodyPr>
+          <a:lstStyle/>
+          <a:p>
+            <a:pPr algn="l" indent="0" marL="0">
+              <a:lnSpc>
+                <a:spcPts val="2706"/>
+              </a:lnSpc>
+              <a:buNone/>
             </a:pPr>
             <a:r>
               <a:rPr lang="en-US" sz="1866" b="1" dirty="0">
@@ -4319,10 +4370,13 @@
               <a:t>It is not evidence.</a:t>
             </a:r>
             <a:pPr algn="l" indent="0" marL="0">
-              <a:buNone/>
-            </a:pPr>
-            <a:r>
-              <a:rPr lang="en-US" sz="1600" dirty="0">
+              <a:lnSpc>
+                <a:spcPts val="2706"/>
+              </a:lnSpc>
+              <a:buNone/>
+            </a:pPr>
+            <a:r>
+              <a:rPr lang="en-US" sz="1866" dirty="0">
                 <a:solidFill>
                   <a:srgbClr val="2E2C26"/>
                 </a:solidFill>
@@ -4332,12 +4386,65 @@
               </a:rPr>
               <a:t> Nothing said here reaches a performance file or a promotion packet.</a:t>
             </a:r>
-            <a:endParaRPr lang="en-US" sz="1600" dirty="0"/>
-          </a:p>
-          <a:p>
-            <a:pPr algn="l" marL="342900" indent="-342900">
-              <a:buSzPct val="100000"/>
-              <a:buChar char="•"/>
+            <a:endParaRPr lang="en-US" sz="1866" dirty="0"/>
+          </a:p>
+        </p:txBody>
+      </p:sp>
+      <p:sp>
+        <p:nvSpPr>
+          <p:cNvPr id="14" name="Shape 12"/>
+          <p:cNvSpPr/>
+          <p:nvPr/>
+        </p:nvSpPr>
+        <p:spPr>
+          <a:xfrm>
+            <a:off x="5313820" y="3216672"/>
+            <a:ext cx="6333533" cy="0"/>
+          </a:xfrm>
+          <a:prstGeom prst="line">
+            <a:avLst/>
+          </a:prstGeom>
+          <a:noFill/>
+          <a:ln w="12698">
+            <a:solidFill>
+              <a:srgbClr val="1C1B17"/>
+            </a:solidFill>
+            <a:prstDash val="solid"/>
+          </a:ln>
+        </p:spPr>
+        <p:txBody>
+          <a:bodyPr/>
+          <a:p/>
+        </p:txBody>
+      </p:sp>
+      <p:sp>
+        <p:nvSpPr>
+          <p:cNvPr id="15" name="Text 13"/>
+          <p:cNvSpPr/>
+          <p:nvPr/>
+        </p:nvSpPr>
+        <p:spPr>
+          <a:xfrm>
+            <a:off x="5313820" y="3290689"/>
+            <a:ext cx="6460204" cy="687388"/>
+          </a:xfrm>
+          <a:prstGeom prst="rect">
+            <a:avLst/>
+          </a:prstGeom>
+          <a:noFill/>
+          <a:ln/>
+        </p:spPr>
+        <p:txBody>
+          <a:bodyPr wrap="square" lIns="0" tIns="0" rIns="0" bIns="0" rtlCol="0" anchor="t">
+            <a:normAutofit/>
+          </a:bodyPr>
+          <a:lstStyle/>
+          <a:p>
+            <a:pPr algn="l" indent="0" marL="0">
+              <a:lnSpc>
+                <a:spcPts val="2706"/>
+              </a:lnSpc>
+              <a:buNone/>
             </a:pPr>
             <a:r>
               <a:rPr lang="en-US" sz="1866" b="1" dirty="0">
@@ -4351,10 +4458,13 @@
               <a:t>Not knowing is sayable.</a:t>
             </a:r>
             <a:pPr algn="l" indent="0" marL="0">
-              <a:buNone/>
-            </a:pPr>
-            <a:r>
-              <a:rPr lang="en-US" sz="1600" dirty="0">
+              <a:lnSpc>
+                <a:spcPts val="2706"/>
+              </a:lnSpc>
+              <a:buNone/>
+            </a:pPr>
+            <a:r>
+              <a:rPr lang="en-US" sz="1866" dirty="0">
                 <a:solidFill>
                   <a:srgbClr val="2E2C26"/>
                 </a:solidFill>
@@ -4364,12 +4474,65 @@
               </a:rPr>
               <a:t> “I did not know that flag existed” has to cost nothing to say.</a:t>
             </a:r>
-            <a:endParaRPr lang="en-US" sz="1600" dirty="0"/>
-          </a:p>
-          <a:p>
-            <a:pPr algn="l" marL="342900" indent="-342900">
-              <a:buSzPct val="100000"/>
-              <a:buChar char="•"/>
+            <a:endParaRPr lang="en-US" sz="1866" dirty="0"/>
+          </a:p>
+        </p:txBody>
+      </p:sp>
+      <p:sp>
+        <p:nvSpPr>
+          <p:cNvPr id="16" name="Shape 14"/>
+          <p:cNvSpPr/>
+          <p:nvPr/>
+        </p:nvSpPr>
+        <p:spPr>
+          <a:xfrm>
+            <a:off x="5313820" y="4052094"/>
+            <a:ext cx="6333533" cy="0"/>
+          </a:xfrm>
+          <a:prstGeom prst="line">
+            <a:avLst/>
+          </a:prstGeom>
+          <a:noFill/>
+          <a:ln w="12698">
+            <a:solidFill>
+              <a:srgbClr val="1C1B17"/>
+            </a:solidFill>
+            <a:prstDash val="solid"/>
+          </a:ln>
+        </p:spPr>
+        <p:txBody>
+          <a:bodyPr/>
+          <a:p/>
+        </p:txBody>
+      </p:sp>
+      <p:sp>
+        <p:nvSpPr>
+          <p:cNvPr id="17" name="Text 15"/>
+          <p:cNvSpPr/>
+          <p:nvPr/>
+        </p:nvSpPr>
+        <p:spPr>
+          <a:xfrm>
+            <a:off x="5313820" y="4126111"/>
+            <a:ext cx="6460204" cy="687388"/>
+          </a:xfrm>
+          <a:prstGeom prst="rect">
+            <a:avLst/>
+          </a:prstGeom>
+          <a:noFill/>
+          <a:ln/>
+        </p:spPr>
+        <p:txBody>
+          <a:bodyPr wrap="square" lIns="0" tIns="0" rIns="0" bIns="0" rtlCol="0" anchor="t">
+            <a:normAutofit/>
+          </a:bodyPr>
+          <a:lstStyle/>
+          <a:p>
+            <a:pPr algn="l" indent="0" marL="0">
+              <a:lnSpc>
+                <a:spcPts val="2706"/>
+              </a:lnSpc>
+              <a:buNone/>
             </a:pPr>
             <a:r>
               <a:rPr lang="en-US" sz="1866" b="1" dirty="0">
@@ -4383,10 +4546,13 @@
               <a:t>Timeline before conclusion.</a:t>
             </a:r>
             <a:pPr algn="l" indent="0" marL="0">
-              <a:buNone/>
-            </a:pPr>
-            <a:r>
-              <a:rPr lang="en-US" sz="1600" dirty="0">
+              <a:lnSpc>
+                <a:spcPts val="2706"/>
+              </a:lnSpc>
+              <a:buNone/>
+            </a:pPr>
+            <a:r>
+              <a:rPr lang="en-US" sz="1866" dirty="0">
                 <a:solidFill>
                   <a:srgbClr val="2E2C26"/>
                 </a:solidFill>
@@ -4396,12 +4562,65 @@
               </a:rPr>
               <a:t> Order the facts first, or the room reverse-engineers a culprit.</a:t>
             </a:r>
-            <a:endParaRPr lang="en-US" sz="1600" dirty="0"/>
-          </a:p>
-          <a:p>
-            <a:pPr algn="l" marL="342900" indent="-342900">
-              <a:buSzPct val="100000"/>
-              <a:buChar char="•"/>
+            <a:endParaRPr lang="en-US" sz="1866" dirty="0"/>
+          </a:p>
+        </p:txBody>
+      </p:sp>
+      <p:sp>
+        <p:nvSpPr>
+          <p:cNvPr id="18" name="Shape 16"/>
+          <p:cNvSpPr/>
+          <p:nvPr/>
+        </p:nvSpPr>
+        <p:spPr>
+          <a:xfrm>
+            <a:off x="5313820" y="4887516"/>
+            <a:ext cx="6333533" cy="0"/>
+          </a:xfrm>
+          <a:prstGeom prst="line">
+            <a:avLst/>
+          </a:prstGeom>
+          <a:noFill/>
+          <a:ln w="12698">
+            <a:solidFill>
+              <a:srgbClr val="1C1B17"/>
+            </a:solidFill>
+            <a:prstDash val="solid"/>
+          </a:ln>
+        </p:spPr>
+        <p:txBody>
+          <a:bodyPr/>
+          <a:p/>
+        </p:txBody>
+      </p:sp>
+      <p:sp>
+        <p:nvSpPr>
+          <p:cNvPr id="19" name="Text 17"/>
+          <p:cNvSpPr/>
+          <p:nvPr/>
+        </p:nvSpPr>
+        <p:spPr>
+          <a:xfrm>
+            <a:off x="5313820" y="4961533"/>
+            <a:ext cx="6460204" cy="687388"/>
+          </a:xfrm>
+          <a:prstGeom prst="rect">
+            <a:avLst/>
+          </a:prstGeom>
+          <a:noFill/>
+          <a:ln/>
+        </p:spPr>
+        <p:txBody>
+          <a:bodyPr wrap="square" lIns="0" tIns="0" rIns="0" bIns="0" rtlCol="0" anchor="t">
+            <a:normAutofit/>
+          </a:bodyPr>
+          <a:lstStyle/>
+          <a:p>
+            <a:pPr algn="l" indent="0" marL="0">
+              <a:lnSpc>
+                <a:spcPts val="2706"/>
+              </a:lnSpc>
+              <a:buNone/>
             </a:pPr>
             <a:r>
               <a:rPr lang="en-US" sz="1866" b="1" dirty="0">
@@ -4415,10 +4634,13 @@
               <a:t>The closest person reads it.</a:t>
             </a:r>
             <a:pPr algn="l" indent="0" marL="0">
-              <a:buNone/>
-            </a:pPr>
-            <a:r>
-              <a:rPr lang="en-US" sz="1600" dirty="0">
+              <a:lnSpc>
+                <a:spcPts val="2706"/>
+              </a:lnSpc>
+              <a:buNone/>
+            </a:pPr>
+            <a:r>
+              <a:rPr lang="en-US" sz="1866" dirty="0">
                 <a:solidFill>
                   <a:srgbClr val="2E2C26"/>
                 </a:solidFill>
@@ -4428,249 +4650,13 @@
               </a:rPr>
               <a:t> Whoever was at the keyboard writes it, or signs it before filing.</a:t>
             </a:r>
-            <a:endParaRPr lang="en-US" sz="1600" dirty="0"/>
-          </a:p>
-        </p:txBody>
-      </p:sp>
-      <p:sp>
-        <p:nvSpPr>
-          <p:cNvPr id="13" name="Text 11"/>
-          <p:cNvSpPr/>
-          <p:nvPr/>
-        </p:nvSpPr>
-        <p:spPr>
-          <a:xfrm>
-            <a:off x="5313820" y="2455267"/>
-            <a:ext cx="6460204" cy="687388"/>
-          </a:xfrm>
-          <a:prstGeom prst="rect">
-            <a:avLst/>
-          </a:prstGeom>
-          <a:noFill/>
-          <a:ln/>
-        </p:spPr>
-        <p:txBody>
-          <a:bodyPr wrap="square" lIns="0" tIns="0" rIns="0" bIns="0" rtlCol="0" anchor="t"/>
-          <a:lstStyle/>
-          <a:p>
-            <a:pPr algn="l" indent="0" marL="0">
-              <a:lnSpc>
-                <a:spcPts val="2706"/>
-              </a:lnSpc>
-              <a:buNone/>
-            </a:pPr>
-            <a:r>
-              <a:rPr lang="en-US" sz="1866" b="1" dirty="0">
-                <a:solidFill>
-                  <a:srgbClr val="1C1B17"/>
-                </a:solidFill>
-                <a:latin typeface="Noto Serif" pitchFamily="34" charset="0"/>
-                <a:ea typeface="Noto Serif" pitchFamily="34" charset="-122"/>
-                <a:cs typeface="Noto Serif" pitchFamily="34" charset="-120"/>
-              </a:rPr>
-              <a:t>It is not evidence.</a:t>
-            </a:r>
-            <a:pPr algn="l" indent="0" marL="0">
-              <a:lnSpc>
-                <a:spcPts val="2706"/>
-              </a:lnSpc>
-              <a:buNone/>
-            </a:pPr>
-            <a:r>
-              <a:rPr lang="en-US" sz="1866" dirty="0">
-                <a:solidFill>
-                  <a:srgbClr val="2E2C26"/>
-                </a:solidFill>
-                <a:latin typeface="Noto Serif" pitchFamily="34" charset="0"/>
-                <a:ea typeface="Noto Serif" pitchFamily="34" charset="-122"/>
-                <a:cs typeface="Noto Serif" pitchFamily="34" charset="-120"/>
-              </a:rPr>
-              <a:t> Nothing said here reaches a performance file or a promotion packet.</a:t>
-            </a:r>
             <a:endParaRPr lang="en-US" sz="1866" dirty="0"/>
           </a:p>
         </p:txBody>
       </p:sp>
       <p:sp>
         <p:nvSpPr>
-          <p:cNvPr id="14" name="Text 12"/>
-          <p:cNvSpPr/>
-          <p:nvPr/>
-        </p:nvSpPr>
-        <p:spPr>
-          <a:xfrm>
-            <a:off x="5313820" y="3290689"/>
-            <a:ext cx="6460204" cy="687388"/>
-          </a:xfrm>
-          <a:prstGeom prst="rect">
-            <a:avLst/>
-          </a:prstGeom>
-          <a:noFill/>
-          <a:ln/>
-        </p:spPr>
-        <p:txBody>
-          <a:bodyPr wrap="square" lIns="0" tIns="0" rIns="0" bIns="0" rtlCol="0" anchor="t"/>
-          <a:lstStyle/>
-          <a:p>
-            <a:pPr algn="l" indent="0" marL="0">
-              <a:lnSpc>
-                <a:spcPts val="2706"/>
-              </a:lnSpc>
-              <a:buNone/>
-            </a:pPr>
-            <a:r>
-              <a:rPr lang="en-US" sz="1866" b="1" dirty="0">
-                <a:solidFill>
-                  <a:srgbClr val="1C1B17"/>
-                </a:solidFill>
-                <a:latin typeface="Noto Serif" pitchFamily="34" charset="0"/>
-                <a:ea typeface="Noto Serif" pitchFamily="34" charset="-122"/>
-                <a:cs typeface="Noto Serif" pitchFamily="34" charset="-120"/>
-              </a:rPr>
-              <a:t>Not knowing is sayable.</a:t>
-            </a:r>
-            <a:pPr algn="l" indent="0" marL="0">
-              <a:lnSpc>
-                <a:spcPts val="2706"/>
-              </a:lnSpc>
-              <a:buNone/>
-            </a:pPr>
-            <a:r>
-              <a:rPr lang="en-US" sz="1866" dirty="0">
-                <a:solidFill>
-                  <a:srgbClr val="2E2C26"/>
-                </a:solidFill>
-                <a:latin typeface="Noto Serif" pitchFamily="34" charset="0"/>
-                <a:ea typeface="Noto Serif" pitchFamily="34" charset="-122"/>
-                <a:cs typeface="Noto Serif" pitchFamily="34" charset="-120"/>
-              </a:rPr>
-              <a:t> “I did not know that flag existed” has to cost nothing to say.</a:t>
-            </a:r>
-            <a:endParaRPr lang="en-US" sz="1866" dirty="0"/>
-          </a:p>
-        </p:txBody>
-      </p:sp>
-      <p:sp>
-        <p:nvSpPr>
-          <p:cNvPr id="15" name="Text 13"/>
-          <p:cNvSpPr/>
-          <p:nvPr/>
-        </p:nvSpPr>
-        <p:spPr>
-          <a:xfrm>
-            <a:off x="5313820" y="4126111"/>
-            <a:ext cx="6460204" cy="687388"/>
-          </a:xfrm>
-          <a:prstGeom prst="rect">
-            <a:avLst/>
-          </a:prstGeom>
-          <a:noFill/>
-          <a:ln/>
-        </p:spPr>
-        <p:txBody>
-          <a:bodyPr wrap="square" lIns="0" tIns="0" rIns="0" bIns="0" rtlCol="0" anchor="t"/>
-          <a:lstStyle/>
-          <a:p>
-            <a:pPr algn="l" indent="0" marL="0">
-              <a:lnSpc>
-                <a:spcPts val="2706"/>
-              </a:lnSpc>
-              <a:buNone/>
-            </a:pPr>
-            <a:r>
-              <a:rPr lang="en-US" sz="1866" b="1" dirty="0">
-                <a:solidFill>
-                  <a:srgbClr val="1C1B17"/>
-                </a:solidFill>
-                <a:latin typeface="Noto Serif" pitchFamily="34" charset="0"/>
-                <a:ea typeface="Noto Serif" pitchFamily="34" charset="-122"/>
-                <a:cs typeface="Noto Serif" pitchFamily="34" charset="-120"/>
-              </a:rPr>
-              <a:t>Timeline before conclusion.</a:t>
-            </a:r>
-            <a:pPr algn="l" indent="0" marL="0">
-              <a:lnSpc>
-                <a:spcPts val="2706"/>
-              </a:lnSpc>
-              <a:buNone/>
-            </a:pPr>
-            <a:r>
-              <a:rPr lang="en-US" sz="1866" dirty="0">
-                <a:solidFill>
-                  <a:srgbClr val="2E2C26"/>
-                </a:solidFill>
-                <a:latin typeface="Noto Serif" pitchFamily="34" charset="0"/>
-                <a:ea typeface="Noto Serif" pitchFamily="34" charset="-122"/>
-                <a:cs typeface="Noto Serif" pitchFamily="34" charset="-120"/>
-              </a:rPr>
-              <a:t> Order the facts first, or the room reverse-engineers a culprit.</a:t>
-            </a:r>
-            <a:endParaRPr lang="en-US" sz="1866" dirty="0"/>
-          </a:p>
-        </p:txBody>
-      </p:sp>
-      <p:sp>
-        <p:nvSpPr>
-          <p:cNvPr id="16" name="Text 14"/>
-          <p:cNvSpPr/>
-          <p:nvPr/>
-        </p:nvSpPr>
-        <p:spPr>
-          <a:xfrm>
-            <a:off x="5313820" y="4961533"/>
-            <a:ext cx="6460204" cy="687388"/>
-          </a:xfrm>
-          <a:prstGeom prst="rect">
-            <a:avLst/>
-          </a:prstGeom>
-          <a:noFill/>
-          <a:ln/>
-        </p:spPr>
-        <p:txBody>
-          <a:bodyPr wrap="square" lIns="0" tIns="0" rIns="0" bIns="0" rtlCol="0" anchor="t"/>
-          <a:lstStyle/>
-          <a:p>
-            <a:pPr algn="l" indent="0" marL="0">
-              <a:lnSpc>
-                <a:spcPts val="2706"/>
-              </a:lnSpc>
-              <a:buNone/>
-            </a:pPr>
-            <a:r>
-              <a:rPr lang="en-US" sz="1866" b="1" dirty="0">
-                <a:solidFill>
-                  <a:srgbClr val="1C1B17"/>
-                </a:solidFill>
-                <a:latin typeface="Noto Serif" pitchFamily="34" charset="0"/>
-                <a:ea typeface="Noto Serif" pitchFamily="34" charset="-122"/>
-                <a:cs typeface="Noto Serif" pitchFamily="34" charset="-120"/>
-              </a:rPr>
-              <a:t>The closest person reads it.</a:t>
-            </a:r>
-            <a:pPr algn="l" indent="0" marL="0">
-              <a:lnSpc>
-                <a:spcPts val="2706"/>
-              </a:lnSpc>
-              <a:buNone/>
-            </a:pPr>
-            <a:r>
-              <a:rPr lang="en-US" sz="1866" dirty="0">
-                <a:solidFill>
-                  <a:srgbClr val="2E2C26"/>
-                </a:solidFill>
-                <a:latin typeface="Noto Serif" pitchFamily="34" charset="0"/>
-                <a:ea typeface="Noto Serif" pitchFamily="34" charset="-122"/>
-                <a:cs typeface="Noto Serif" pitchFamily="34" charset="-120"/>
-              </a:rPr>
-              <a:t> Whoever was at the keyboard writes it, or signs it before filing.</a:t>
-            </a:r>
-            <a:endParaRPr lang="en-US" sz="1866" dirty="0"/>
-          </a:p>
-        </p:txBody>
-      </p:sp>
-      <p:sp>
-        <p:nvSpPr>
-          <p:cNvPr id="17" name="Text 15"/>
+          <p:cNvPr id="20" name="Text 18"/>
           <p:cNvSpPr/>
           <p:nvPr/>
         </p:nvSpPr>
@@ -4700,7 +4686,7 @@
       </p:sp>
       <p:sp>
         <p:nvSpPr>
-          <p:cNvPr id="18" name="Text 16"/>
+          <p:cNvPr id="21" name="Text 19"/>
           <p:cNvSpPr/>
           <p:nvPr/>
         </p:nvSpPr>
@@ -4716,7 +4702,7 @@
           <a:ln/>
         </p:spPr>
         <p:txBody>
-          <a:bodyPr wrap="square" lIns="0" tIns="0" rIns="0" bIns="0" rtlCol="0" anchor="t"/>
+          <a:bodyPr wrap="none" lIns="0" tIns="0" rIns="0" bIns="0" rtlCol="0" anchor="t"/>
           <a:lstStyle/>
           <a:p>
             <a:pPr algn="l" indent="0" marL="0">
@@ -4742,7 +4728,7 @@
       </p:sp>
       <p:sp>
         <p:nvSpPr>
-          <p:cNvPr id="19" name="Text 17"/>
+          <p:cNvPr id="22" name="Text 20"/>
           <p:cNvSpPr/>
           <p:nvPr/>
         </p:nvSpPr>
@@ -4758,7 +4744,7 @@
           <a:ln/>
         </p:spPr>
         <p:txBody>
-          <a:bodyPr wrap="square" lIns="0" tIns="0" rIns="0" bIns="0" rtlCol="0" anchor="t"/>
+          <a:bodyPr wrap="none" lIns="0" tIns="0" rIns="0" bIns="0" rtlCol="0" anchor="t"/>
           <a:lstStyle/>
           <a:p>
             <a:pPr algn="l" indent="0" marL="0">
@@ -4832,7 +4818,7 @@
           <a:ln/>
         </p:spPr>
         <p:txBody>
-          <a:bodyPr wrap="square" lIns="0" tIns="0" rIns="0" bIns="0" rtlCol="0" anchor="t"/>
+          <a:bodyPr wrap="none" lIns="0" tIns="0" rIns="0" bIns="0" rtlCol="0" anchor="t"/>
           <a:lstStyle/>
           <a:p>
             <a:pPr algn="l" indent="0" marL="0">
@@ -4874,7 +4860,7 @@
           <a:ln/>
         </p:spPr>
         <p:txBody>
-          <a:bodyPr wrap="square" lIns="0" tIns="0" rIns="0" bIns="0" rtlCol="0" anchor="t"/>
+          <a:bodyPr wrap="none" lIns="0" tIns="0" rIns="0" bIns="0" rtlCol="0" anchor="t"/>
           <a:lstStyle/>
           <a:p>
             <a:pPr algn="l" indent="0" marL="0">
@@ -4946,7 +4932,7 @@
           <a:ln/>
         </p:spPr>
         <p:txBody>
-          <a:bodyPr wrap="square" lIns="0" tIns="0" rIns="0" bIns="0" rtlCol="0" anchor="t"/>
+          <a:bodyPr wrap="none" lIns="0" tIns="0" rIns="0" bIns="0" rtlCol="0" anchor="t"/>
           <a:lstStyle/>
           <a:p>
             <a:pPr algn="l" indent="0" marL="0">
@@ -5018,7 +5004,7 @@
           <a:ln/>
         </p:spPr>
         <p:txBody>
-          <a:bodyPr wrap="square" lIns="0" tIns="0" rIns="0" bIns="0" rtlCol="0" anchor="t"/>
+          <a:bodyPr wrap="none" lIns="0" tIns="0" rIns="0" bIns="0" rtlCol="0" anchor="t"/>
           <a:lstStyle/>
           <a:p>
             <a:pPr algn="l" indent="0" marL="0">
@@ -5105,7 +5091,9 @@
           <a:ln/>
         </p:spPr>
         <p:txBody>
-          <a:bodyPr wrap="square" lIns="0" tIns="0" rIns="0" bIns="0" rtlCol="0" anchor="t"/>
+          <a:bodyPr wrap="square" lIns="0" tIns="0" rIns="0" bIns="0" rtlCol="0" anchor="t">
+            <a:normAutofit/>
+          </a:bodyPr>
           <a:lstStyle/>
           <a:p>
             <a:pPr algn="l" indent="0" marL="0">
@@ -5143,7 +5131,7 @@
                 <a:ea typeface="Noto Serif" pitchFamily="34" charset="-122"/>
                 <a:cs typeface="Noto Serif" pitchFamily="34" charset="-120"/>
               </a:rPr>
-              <a:t>      not free, so the concessions are what gets dropped — quietly, one meeting at a</a:t>
+              <a:t>not free, so the concessions are what gets dropped — quietly, one meeting at a</a:t>
             </a:r>
             <a:endParaRPr lang="en-US" sz="2000" dirty="0"/>
           </a:p>
@@ -5163,7 +5151,7 @@
                 <a:ea typeface="Noto Serif" pitchFamily="34" charset="-122"/>
                 <a:cs typeface="Noto Serif" pitchFamily="34" charset="-120"/>
               </a:rPr>
-              <a:t>      time. Nobody decides to drop them; they are simply never paid.</a:t>
+              <a:t>time. Nobody decides to drop them; they are simply never paid.</a:t>
             </a:r>
             <a:endParaRPr lang="en-US" sz="2000" dirty="0"/>
           </a:p>
@@ -5217,7 +5205,7 @@
           <a:ln/>
         </p:spPr>
         <p:txBody>
-          <a:bodyPr wrap="square" lIns="0" tIns="0" rIns="0" bIns="0" rtlCol="0" anchor="t"/>
+          <a:bodyPr wrap="none" lIns="0" tIns="0" rIns="0" bIns="0" rtlCol="0" anchor="t"/>
           <a:lstStyle/>
           <a:p>
             <a:pPr algn="l" indent="0" marL="0">
@@ -5243,28 +5231,59 @@
       </p:sp>
       <p:sp>
         <p:nvSpPr>
-          <p:cNvPr id="12" name="Text 10"/>
-          <p:cNvSpPr/>
-          <p:nvPr/>
-        </p:nvSpPr>
-        <p:spPr>
-          <a:xfrm>
-            <a:off x="5489790" y="2374900"/>
-            <a:ext cx="6157563" cy="3467100"/>
-          </a:xfrm>
-          <a:prstGeom prst="rect">
-            <a:avLst/>
-          </a:prstGeom>
-          <a:noFill/>
-          <a:ln/>
-        </p:spPr>
-        <p:txBody>
-          <a:bodyPr wrap="square" lIns="0" tIns="0" rIns="0" bIns="0" rtlCol="0" anchor="t"/>
-          <a:lstStyle/>
-          <a:p>
-            <a:pPr algn="l" marL="342900" indent="-342900">
-              <a:buSzPct val="100000"/>
-              <a:buChar char="•"/>
+          <p:cNvPr id="12" name="Shape 10"/>
+          <p:cNvSpPr/>
+          <p:nvPr/>
+        </p:nvSpPr>
+        <p:spPr>
+          <a:xfrm>
+            <a:off x="5489790" y="2381250"/>
+            <a:ext cx="6157563" cy="0"/>
+          </a:xfrm>
+          <a:prstGeom prst="line">
+            <a:avLst/>
+          </a:prstGeom>
+          <a:noFill/>
+          <a:ln w="12698">
+            <a:solidFill>
+              <a:srgbClr val="1C1B17"/>
+            </a:solidFill>
+            <a:prstDash val="solid"/>
+          </a:ln>
+        </p:spPr>
+        <p:txBody>
+          <a:bodyPr/>
+          <a:p/>
+        </p:txBody>
+      </p:sp>
+      <p:sp>
+        <p:nvSpPr>
+          <p:cNvPr id="13" name="Text 11"/>
+          <p:cNvSpPr/>
+          <p:nvPr/>
+        </p:nvSpPr>
+        <p:spPr>
+          <a:xfrm>
+            <a:off x="5489790" y="2590800"/>
+            <a:ext cx="6280715" cy="736600"/>
+          </a:xfrm>
+          <a:prstGeom prst="rect">
+            <a:avLst/>
+          </a:prstGeom>
+          <a:noFill/>
+          <a:ln/>
+        </p:spPr>
+        <p:txBody>
+          <a:bodyPr wrap="square" lIns="0" tIns="0" rIns="0" bIns="0" rtlCol="0" anchor="t">
+            <a:normAutofit/>
+          </a:bodyPr>
+          <a:lstStyle/>
+          <a:p>
+            <a:pPr algn="l" indent="0" marL="0">
+              <a:lnSpc>
+                <a:spcPts val="2900"/>
+              </a:lnSpc>
+              <a:buNone/>
             </a:pPr>
             <a:r>
               <a:rPr lang="en-US" sz="2000" b="1" dirty="0">
@@ -5278,10 +5297,13 @@
               <a:t>The cause field says “human error.”</a:t>
             </a:r>
             <a:pPr algn="l" indent="0" marL="0">
-              <a:buNone/>
-            </a:pPr>
-            <a:r>
-              <a:rPr lang="en-US" sz="1600" dirty="0">
+              <a:lnSpc>
+                <a:spcPts val="2900"/>
+              </a:lnSpc>
+              <a:buNone/>
+            </a:pPr>
+            <a:r>
+              <a:rPr lang="en-US" sz="2000" dirty="0">
                 <a:solidFill>
                   <a:srgbClr val="2E2C26"/>
                 </a:solidFill>
@@ -5291,12 +5313,65 @@
               </a:rPr>
               <a:t> The search stopped at the first person it found.</a:t>
             </a:r>
-            <a:endParaRPr lang="en-US" sz="1600" dirty="0"/>
-          </a:p>
-          <a:p>
-            <a:pPr algn="l" marL="342900" indent="-342900">
-              <a:buSzPct val="100000"/>
-              <a:buChar char="•"/>
+            <a:endParaRPr lang="en-US" sz="2000" dirty="0"/>
+          </a:p>
+        </p:txBody>
+      </p:sp>
+      <p:sp>
+        <p:nvSpPr>
+          <p:cNvPr id="14" name="Shape 12"/>
+          <p:cNvSpPr/>
+          <p:nvPr/>
+        </p:nvSpPr>
+        <p:spPr>
+          <a:xfrm>
+            <a:off x="5489790" y="3536950"/>
+            <a:ext cx="6157563" cy="0"/>
+          </a:xfrm>
+          <a:prstGeom prst="line">
+            <a:avLst/>
+          </a:prstGeom>
+          <a:noFill/>
+          <a:ln w="12698">
+            <a:solidFill>
+              <a:srgbClr val="1C1B17"/>
+            </a:solidFill>
+            <a:prstDash val="solid"/>
+          </a:ln>
+        </p:spPr>
+        <p:txBody>
+          <a:bodyPr/>
+          <a:p/>
+        </p:txBody>
+      </p:sp>
+      <p:sp>
+        <p:nvSpPr>
+          <p:cNvPr id="15" name="Text 13"/>
+          <p:cNvSpPr/>
+          <p:nvPr/>
+        </p:nvSpPr>
+        <p:spPr>
+          <a:xfrm>
+            <a:off x="5489790" y="3746500"/>
+            <a:ext cx="6280715" cy="736600"/>
+          </a:xfrm>
+          <a:prstGeom prst="rect">
+            <a:avLst/>
+          </a:prstGeom>
+          <a:noFill/>
+          <a:ln/>
+        </p:spPr>
+        <p:txBody>
+          <a:bodyPr wrap="square" lIns="0" tIns="0" rIns="0" bIns="0" rtlCol="0" anchor="t">
+            <a:normAutofit/>
+          </a:bodyPr>
+          <a:lstStyle/>
+          <a:p>
+            <a:pPr algn="l" indent="0" marL="0">
+              <a:lnSpc>
+                <a:spcPts val="2900"/>
+              </a:lnSpc>
+              <a:buNone/>
             </a:pPr>
             <a:r>
               <a:rPr lang="en-US" sz="2000" b="1" dirty="0">
@@ -5310,10 +5385,13 @@
               <a:t>Action items are owned by a team.</a:t>
             </a:r>
             <a:pPr algn="l" indent="0" marL="0">
-              <a:buNone/>
-            </a:pPr>
-            <a:r>
-              <a:rPr lang="en-US" sz="1600" dirty="0">
+              <a:lnSpc>
+                <a:spcPts val="2900"/>
+              </a:lnSpc>
+              <a:buNone/>
+            </a:pPr>
+            <a:r>
+              <a:rPr lang="en-US" sz="2000" dirty="0">
                 <a:solidFill>
                   <a:srgbClr val="2E2C26"/>
                 </a:solidFill>
@@ -5323,12 +5401,65 @@
               </a:rPr>
               <a:t> Nobody is late, because nobody was ever due.</a:t>
             </a:r>
-            <a:endParaRPr lang="en-US" sz="1600" dirty="0"/>
-          </a:p>
-          <a:p>
-            <a:pPr algn="l" marL="342900" indent="-342900">
-              <a:buSzPct val="100000"/>
-              <a:buChar char="•"/>
+            <a:endParaRPr lang="en-US" sz="2000" dirty="0"/>
+          </a:p>
+        </p:txBody>
+      </p:sp>
+      <p:sp>
+        <p:nvSpPr>
+          <p:cNvPr id="16" name="Shape 14"/>
+          <p:cNvSpPr/>
+          <p:nvPr/>
+        </p:nvSpPr>
+        <p:spPr>
+          <a:xfrm>
+            <a:off x="5489790" y="4692650"/>
+            <a:ext cx="6157563" cy="0"/>
+          </a:xfrm>
+          <a:prstGeom prst="line">
+            <a:avLst/>
+          </a:prstGeom>
+          <a:noFill/>
+          <a:ln w="12698">
+            <a:solidFill>
+              <a:srgbClr val="1C1B17"/>
+            </a:solidFill>
+            <a:prstDash val="solid"/>
+          </a:ln>
+        </p:spPr>
+        <p:txBody>
+          <a:bodyPr/>
+          <a:p/>
+        </p:txBody>
+      </p:sp>
+      <p:sp>
+        <p:nvSpPr>
+          <p:cNvPr id="17" name="Text 15"/>
+          <p:cNvSpPr/>
+          <p:nvPr/>
+        </p:nvSpPr>
+        <p:spPr>
+          <a:xfrm>
+            <a:off x="5489790" y="4902200"/>
+            <a:ext cx="6280715" cy="736600"/>
+          </a:xfrm>
+          <a:prstGeom prst="rect">
+            <a:avLst/>
+          </a:prstGeom>
+          <a:noFill/>
+          <a:ln/>
+        </p:spPr>
+        <p:txBody>
+          <a:bodyPr wrap="square" lIns="0" tIns="0" rIns="0" bIns="0" rtlCol="0" anchor="t">
+            <a:normAutofit/>
+          </a:bodyPr>
+          <a:lstStyle/>
+          <a:p>
+            <a:pPr algn="l" indent="0" marL="0">
+              <a:lnSpc>
+                <a:spcPts val="2900"/>
+              </a:lnSpc>
+              <a:buNone/>
             </a:pPr>
             <a:r>
               <a:rPr lang="en-US" sz="2000" b="1" dirty="0">
@@ -5342,10 +5473,13 @@
               <a:t>The same failure is filed twice.</a:t>
             </a:r>
             <a:pPr algn="l" indent="0" marL="0">
-              <a:buNone/>
-            </a:pPr>
-            <a:r>
-              <a:rPr lang="en-US" sz="1600" dirty="0">
+              <a:lnSpc>
+                <a:spcPts val="2900"/>
+              </a:lnSpc>
+              <a:buNone/>
+            </a:pPr>
+            <a:r>
+              <a:rPr lang="en-US" sz="2000" dirty="0">
                 <a:solidFill>
                   <a:srgbClr val="2E2C26"/>
                 </a:solidFill>
@@ -5355,190 +5489,13 @@
               </a:rPr>
               <a:t> Two titles, one condition nobody fixed.</a:t>
             </a:r>
-            <a:endParaRPr lang="en-US" sz="1600" dirty="0"/>
-          </a:p>
-        </p:txBody>
-      </p:sp>
-      <p:sp>
-        <p:nvSpPr>
-          <p:cNvPr id="13" name="Text 11"/>
-          <p:cNvSpPr/>
-          <p:nvPr/>
-        </p:nvSpPr>
-        <p:spPr>
-          <a:xfrm>
-            <a:off x="5489790" y="2590800"/>
-            <a:ext cx="6280715" cy="736600"/>
-          </a:xfrm>
-          <a:prstGeom prst="rect">
-            <a:avLst/>
-          </a:prstGeom>
-          <a:noFill/>
-          <a:ln/>
-        </p:spPr>
-        <p:txBody>
-          <a:bodyPr wrap="square" lIns="0" tIns="0" rIns="0" bIns="0" rtlCol="0" anchor="t"/>
-          <a:lstStyle/>
-          <a:p>
-            <a:pPr algn="l" indent="0" marL="0">
-              <a:lnSpc>
-                <a:spcPts val="2900"/>
-              </a:lnSpc>
-              <a:buNone/>
-            </a:pPr>
-            <a:r>
-              <a:rPr lang="en-US" sz="2000" b="1" dirty="0">
-                <a:solidFill>
-                  <a:srgbClr val="1C1B17"/>
-                </a:solidFill>
-                <a:latin typeface="Noto Serif" pitchFamily="34" charset="0"/>
-                <a:ea typeface="Noto Serif" pitchFamily="34" charset="-122"/>
-                <a:cs typeface="Noto Serif" pitchFamily="34" charset="-120"/>
-              </a:rPr>
-              <a:t>The cause field says “human error.”</a:t>
-            </a:r>
-            <a:pPr algn="l" indent="0" marL="0">
-              <a:lnSpc>
-                <a:spcPts val="2900"/>
-              </a:lnSpc>
-              <a:buNone/>
-            </a:pPr>
-            <a:r>
-              <a:rPr lang="en-US" sz="2000" dirty="0">
-                <a:solidFill>
-                  <a:srgbClr val="2E2C26"/>
-                </a:solidFill>
-                <a:latin typeface="Noto Serif" pitchFamily="34" charset="0"/>
-                <a:ea typeface="Noto Serif" pitchFamily="34" charset="-122"/>
-                <a:cs typeface="Noto Serif" pitchFamily="34" charset="-120"/>
-              </a:rPr>
-              <a:t> The search stopped at the first person it found.</a:t>
-            </a:r>
             <a:endParaRPr lang="en-US" sz="2000" dirty="0"/>
           </a:p>
         </p:txBody>
       </p:sp>
       <p:sp>
         <p:nvSpPr>
-          <p:cNvPr id="14" name="Text 12"/>
-          <p:cNvSpPr/>
-          <p:nvPr/>
-        </p:nvSpPr>
-        <p:spPr>
-          <a:xfrm>
-            <a:off x="5489790" y="3746500"/>
-            <a:ext cx="6280715" cy="736600"/>
-          </a:xfrm>
-          <a:prstGeom prst="rect">
-            <a:avLst/>
-          </a:prstGeom>
-          <a:noFill/>
-          <a:ln/>
-        </p:spPr>
-        <p:txBody>
-          <a:bodyPr wrap="square" lIns="0" tIns="0" rIns="0" bIns="0" rtlCol="0" anchor="t"/>
-          <a:lstStyle/>
-          <a:p>
-            <a:pPr algn="l" indent="0" marL="0">
-              <a:lnSpc>
-                <a:spcPts val="2900"/>
-              </a:lnSpc>
-              <a:buNone/>
-            </a:pPr>
-            <a:r>
-              <a:rPr lang="en-US" sz="2000" b="1" dirty="0">
-                <a:solidFill>
-                  <a:srgbClr val="1C1B17"/>
-                </a:solidFill>
-                <a:latin typeface="Noto Serif" pitchFamily="34" charset="0"/>
-                <a:ea typeface="Noto Serif" pitchFamily="34" charset="-122"/>
-                <a:cs typeface="Noto Serif" pitchFamily="34" charset="-120"/>
-              </a:rPr>
-              <a:t>Action items are owned by a team.</a:t>
-            </a:r>
-            <a:pPr algn="l" indent="0" marL="0">
-              <a:lnSpc>
-                <a:spcPts val="2900"/>
-              </a:lnSpc>
-              <a:buNone/>
-            </a:pPr>
-            <a:r>
-              <a:rPr lang="en-US" sz="2000" dirty="0">
-                <a:solidFill>
-                  <a:srgbClr val="2E2C26"/>
-                </a:solidFill>
-                <a:latin typeface="Noto Serif" pitchFamily="34" charset="0"/>
-                <a:ea typeface="Noto Serif" pitchFamily="34" charset="-122"/>
-                <a:cs typeface="Noto Serif" pitchFamily="34" charset="-120"/>
-              </a:rPr>
-              <a:t> Nobody is late, because nobody was ever due.</a:t>
-            </a:r>
-            <a:endParaRPr lang="en-US" sz="2000" dirty="0"/>
-          </a:p>
-        </p:txBody>
-      </p:sp>
-      <p:sp>
-        <p:nvSpPr>
-          <p:cNvPr id="15" name="Text 13"/>
-          <p:cNvSpPr/>
-          <p:nvPr/>
-        </p:nvSpPr>
-        <p:spPr>
-          <a:xfrm>
-            <a:off x="5489790" y="4902200"/>
-            <a:ext cx="6280715" cy="736600"/>
-          </a:xfrm>
-          <a:prstGeom prst="rect">
-            <a:avLst/>
-          </a:prstGeom>
-          <a:noFill/>
-          <a:ln/>
-        </p:spPr>
-        <p:txBody>
-          <a:bodyPr wrap="square" lIns="0" tIns="0" rIns="0" bIns="0" rtlCol="0" anchor="t"/>
-          <a:lstStyle/>
-          <a:p>
-            <a:pPr algn="l" indent="0" marL="0">
-              <a:lnSpc>
-                <a:spcPts val="2900"/>
-              </a:lnSpc>
-              <a:buNone/>
-            </a:pPr>
-            <a:r>
-              <a:rPr lang="en-US" sz="2000" b="1" dirty="0">
-                <a:solidFill>
-                  <a:srgbClr val="1C1B17"/>
-                </a:solidFill>
-                <a:latin typeface="Noto Serif" pitchFamily="34" charset="0"/>
-                <a:ea typeface="Noto Serif" pitchFamily="34" charset="-122"/>
-                <a:cs typeface="Noto Serif" pitchFamily="34" charset="-120"/>
-              </a:rPr>
-              <a:t>The same failure is filed twice.</a:t>
-            </a:r>
-            <a:pPr algn="l" indent="0" marL="0">
-              <a:lnSpc>
-                <a:spcPts val="2900"/>
-              </a:lnSpc>
-              <a:buNone/>
-            </a:pPr>
-            <a:r>
-              <a:rPr lang="en-US" sz="2000" dirty="0">
-                <a:solidFill>
-                  <a:srgbClr val="2E2C26"/>
-                </a:solidFill>
-                <a:latin typeface="Noto Serif" pitchFamily="34" charset="0"/>
-                <a:ea typeface="Noto Serif" pitchFamily="34" charset="-122"/>
-                <a:cs typeface="Noto Serif" pitchFamily="34" charset="-120"/>
-              </a:rPr>
-              <a:t> Two titles, one condition nobody fixed.</a:t>
-            </a:r>
-            <a:endParaRPr lang="en-US" sz="2000" dirty="0"/>
-          </a:p>
-        </p:txBody>
-      </p:sp>
-      <p:sp>
-        <p:nvSpPr>
-          <p:cNvPr id="16" name="Text 14"/>
+          <p:cNvPr id="18" name="Text 16"/>
           <p:cNvSpPr/>
           <p:nvPr/>
         </p:nvSpPr>
@@ -5568,7 +5525,7 @@
       </p:sp>
       <p:sp>
         <p:nvSpPr>
-          <p:cNvPr id="17" name="Text 15"/>
+          <p:cNvPr id="19" name="Text 17"/>
           <p:cNvSpPr/>
           <p:nvPr/>
         </p:nvSpPr>
@@ -5584,7 +5541,7 @@
           <a:ln/>
         </p:spPr>
         <p:txBody>
-          <a:bodyPr wrap="square" lIns="0" tIns="0" rIns="0" bIns="0" rtlCol="0" anchor="t"/>
+          <a:bodyPr wrap="none" lIns="0" tIns="0" rIns="0" bIns="0" rtlCol="0" anchor="t"/>
           <a:lstStyle/>
           <a:p>
             <a:pPr algn="l" indent="0" marL="0">
@@ -5610,7 +5567,7 @@
       </p:sp>
       <p:sp>
         <p:nvSpPr>
-          <p:cNvPr id="18" name="Text 16"/>
+          <p:cNvPr id="20" name="Text 18"/>
           <p:cNvSpPr/>
           <p:nvPr/>
         </p:nvSpPr>
@@ -5626,7 +5583,7 @@
           <a:ln/>
         </p:spPr>
         <p:txBody>
-          <a:bodyPr wrap="square" lIns="0" tIns="0" rIns="0" bIns="0" rtlCol="0" anchor="t"/>
+          <a:bodyPr wrap="none" lIns="0" tIns="0" rIns="0" bIns="0" rtlCol="0" anchor="t"/>
           <a:lstStyle/>
           <a:p>
             <a:pPr algn="l" indent="0" marL="0">
@@ -5700,7 +5657,7 @@
           <a:ln/>
         </p:spPr>
         <p:txBody>
-          <a:bodyPr wrap="square" lIns="0" tIns="0" rIns="0" bIns="0" rtlCol="0" anchor="t"/>
+          <a:bodyPr wrap="none" lIns="0" tIns="0" rIns="0" bIns="0" rtlCol="0" anchor="t"/>
           <a:lstStyle/>
           <a:p>
             <a:pPr algn="l" indent="0" marL="0">
@@ -5742,7 +5699,7 @@
           <a:ln/>
         </p:spPr>
         <p:txBody>
-          <a:bodyPr wrap="square" lIns="0" tIns="0" rIns="0" bIns="0" rtlCol="0" anchor="t"/>
+          <a:bodyPr wrap="none" lIns="0" tIns="0" rIns="0" bIns="0" rtlCol="0" anchor="t"/>
           <a:lstStyle/>
           <a:p>
             <a:pPr algn="l" indent="0" marL="0">
@@ -5814,7 +5771,7 @@
           <a:ln/>
         </p:spPr>
         <p:txBody>
-          <a:bodyPr wrap="square" lIns="0" tIns="0" rIns="0" bIns="0" rtlCol="0" anchor="t"/>
+          <a:bodyPr wrap="none" lIns="0" tIns="0" rIns="0" bIns="0" rtlCol="0" anchor="t"/>
           <a:lstStyle/>
           <a:p>
             <a:pPr algn="l" indent="0" marL="0">
@@ -5886,7 +5843,7 @@
           <a:ln/>
         </p:spPr>
         <p:txBody>
-          <a:bodyPr wrap="square" lIns="0" tIns="0" rIns="0" bIns="0" rtlCol="0" anchor="t"/>
+          <a:bodyPr wrap="none" lIns="0" tIns="0" rIns="0" bIns="0" rtlCol="0" anchor="t"/>
           <a:lstStyle/>
           <a:p>
             <a:pPr algn="l" indent="0" marL="0">
@@ -5928,7 +5885,7 @@
           <a:ln/>
         </p:spPr>
         <p:txBody>
-          <a:bodyPr wrap="square" lIns="0" tIns="0" rIns="0" bIns="0" rtlCol="0" anchor="t"/>
+          <a:bodyPr wrap="none" lIns="0" tIns="0" rIns="0" bIns="0" rtlCol="0" anchor="t"/>
           <a:lstStyle/>
           <a:p>
             <a:pPr algn="l" indent="0" marL="0">
@@ -5973,7 +5930,9 @@
           <a:ln/>
         </p:spPr>
         <p:txBody>
-          <a:bodyPr wrap="square" lIns="0" tIns="0" rIns="0" bIns="0" rtlCol="0" anchor="t"/>
+          <a:bodyPr wrap="square" lIns="0" tIns="0" rIns="0" bIns="0" rtlCol="0" anchor="t">
+            <a:normAutofit/>
+          </a:bodyPr>
           <a:lstStyle/>
           <a:p>
             <a:pPr algn="l" indent="0" marL="0">
@@ -6011,7 +5970,7 @@
                 <a:ea typeface="Noto Serif" pitchFamily="34" charset="-122"/>
                 <a:cs typeface="Noto Serif" pitchFamily="34" charset="-120"/>
               </a:rPr>
-              <a:t>      on the incident? Name the default, and name who may override it.</a:t>
+              <a:t>on the incident? Name the default, and name who may override it.</a:t>
             </a:r>
             <a:endParaRPr lang="en-US" sz="2000" dirty="0"/>
           </a:p>
@@ -6065,7 +6024,7 @@
           <a:ln/>
         </p:spPr>
         <p:txBody>
-          <a:bodyPr wrap="square" lIns="0" tIns="0" rIns="0" bIns="0" rtlCol="0" anchor="t"/>
+          <a:bodyPr wrap="none" lIns="0" tIns="0" rIns="0" bIns="0" rtlCol="0" anchor="t"/>
           <a:lstStyle/>
           <a:p>
             <a:pPr algn="l" indent="0" marL="0">
@@ -6107,7 +6066,7 @@
           <a:ln/>
         </p:spPr>
         <p:txBody>
-          <a:bodyPr wrap="square" lIns="0" tIns="0" rIns="0" bIns="0" rtlCol="0" anchor="t"/>
+          <a:bodyPr wrap="none" lIns="0" tIns="0" rIns="0" bIns="0" rtlCol="0" anchor="t"/>
           <a:lstStyle/>
           <a:p>
             <a:pPr algn="l" indent="0" marL="0">
@@ -6152,7 +6111,9 @@
           <a:ln/>
         </p:spPr>
         <p:txBody>
-          <a:bodyPr wrap="square" lIns="0" tIns="0" rIns="0" bIns="0" rtlCol="0" anchor="t"/>
+          <a:bodyPr wrap="square" lIns="0" tIns="0" rIns="0" bIns="0" rtlCol="0" anchor="t">
+            <a:normAutofit/>
+          </a:bodyPr>
           <a:lstStyle/>
           <a:p>
             <a:pPr algn="l" indent="0" marL="0">
@@ -6190,7 +6151,7 @@
                 <a:ea typeface="Noto Serif" pitchFamily="34" charset="-122"/>
                 <a:cs typeface="Noto Serif" pitchFamily="34" charset="-120"/>
               </a:rPr>
-              <a:t>      allowed to say it slips, to whom, and on what record?</a:t>
+              <a:t>allowed to say it slips, to whom, and on what record?</a:t>
             </a:r>
             <a:endParaRPr lang="en-US" sz="2000" dirty="0"/>
           </a:p>
@@ -6244,7 +6205,7 @@
           <a:ln/>
         </p:spPr>
         <p:txBody>
-          <a:bodyPr wrap="square" lIns="0" tIns="0" rIns="0" bIns="0" rtlCol="0" anchor="t"/>
+          <a:bodyPr wrap="none" lIns="0" tIns="0" rIns="0" bIns="0" rtlCol="0" anchor="t"/>
           <a:lstStyle/>
           <a:p>
             <a:pPr algn="l" indent="0" marL="0">
@@ -6286,7 +6247,7 @@
           <a:ln/>
         </p:spPr>
         <p:txBody>
-          <a:bodyPr wrap="square" lIns="0" tIns="0" rIns="0" bIns="0" rtlCol="0" anchor="t"/>
+          <a:bodyPr wrap="none" lIns="0" tIns="0" rIns="0" bIns="0" rtlCol="0" anchor="t"/>
           <a:lstStyle/>
           <a:p>
             <a:pPr algn="l" indent="0" marL="0">
@@ -6331,7 +6292,9 @@
           <a:ln/>
         </p:spPr>
         <p:txBody>
-          <a:bodyPr wrap="square" lIns="0" tIns="0" rIns="0" bIns="0" rtlCol="0" anchor="t"/>
+          <a:bodyPr wrap="square" lIns="0" tIns="0" rIns="0" bIns="0" rtlCol="0" anchor="t">
+            <a:normAutofit/>
+          </a:bodyPr>
           <a:lstStyle/>
           <a:p>
             <a:pPr algn="l" indent="0" marL="0">
@@ -6369,7 +6332,7 @@
                 <a:ea typeface="Noto Serif" pitchFamily="34" charset="-122"/>
                 <a:cs typeface="Noto Serif" pitchFamily="34" charset="-120"/>
               </a:rPr>
-              <a:t>      It only has to be the answer we chose out loud, before the date.</a:t>
+              <a:t>It only has to be the answer we chose out loud, before the date.</a:t>
             </a:r>
             <a:endParaRPr lang="en-US" sz="2000" dirty="0"/>
           </a:p>
@@ -6423,7 +6386,7 @@
           <a:ln/>
         </p:spPr>
         <p:txBody>
-          <a:bodyPr wrap="square" lIns="0" tIns="0" rIns="0" bIns="0" rtlCol="0" anchor="t"/>
+          <a:bodyPr wrap="none" lIns="0" tIns="0" rIns="0" bIns="0" rtlCol="0" anchor="t"/>
           <a:lstStyle/>
           <a:p>
             <a:pPr algn="l" indent="0" marL="0">
@@ -6498,7 +6461,7 @@
           <a:ln/>
         </p:spPr>
         <p:txBody>
-          <a:bodyPr wrap="square" lIns="0" tIns="0" rIns="0" bIns="0" rtlCol="0" anchor="t"/>
+          <a:bodyPr wrap="none" lIns="0" tIns="0" rIns="0" bIns="0" rtlCol="0" anchor="t"/>
           <a:lstStyle/>
           <a:p>
             <a:pPr algn="l" indent="0" marL="0">
@@ -6540,7 +6503,7 @@
           <a:ln/>
         </p:spPr>
         <p:txBody>
-          <a:bodyPr wrap="square" lIns="0" tIns="0" rIns="0" bIns="0" rtlCol="0" anchor="t"/>
+          <a:bodyPr wrap="none" lIns="0" tIns="0" rIns="0" bIns="0" rtlCol="0" anchor="t"/>
           <a:lstStyle/>
           <a:p>
             <a:pPr algn="l" indent="0" marL="0">
